--- a/preview/MSFT/MSFT_pitchbook.pptx
+++ b/preview/MSFT/MSFT_pitchbook.pptx
@@ -3449,7 +3449,7 @@
                 </a:solidFill>
                 <a:latin typeface="Calibri"/>
               </a:rPr>
-              <a:t>● BUY  ·  Prix cible base : 410 $  ·  Upside : +10,0 %</a:t>
+              <a:t>● BUY  ·  Prix cible base : 420 $  ·  Upside : +13,2 %</a:t>
             </a:r>
           </a:p>
         </p:txBody>
@@ -4421,7 +4421,7 @@
                           </a:solidFill>
                           <a:latin typeface="Calibri"/>
                         </a:rPr>
-                        <a:t>27,2x</a:t>
+                        <a:t>27,1x</a:t>
                       </a:r>
                     </a:p>
                   </a:txBody>
@@ -4595,7 +4595,7 @@
                           </a:solidFill>
                           <a:latin typeface="Calibri"/>
                         </a:rPr>
-                        <a:t>17,4x</a:t>
+                        <a:t>17,3x</a:t>
                       </a:r>
                     </a:p>
                   </a:txBody>
@@ -4769,7 +4769,7 @@
                           </a:solidFill>
                           <a:latin typeface="Calibri"/>
                         </a:rPr>
-                        <a:t>9,9x</a:t>
+                        <a:t>9,8x</a:t>
                       </a:r>
                     </a:p>
                   </a:txBody>
@@ -5813,7 +5813,7 @@
                           </a:solidFill>
                           <a:latin typeface="Calibri"/>
                         </a:rPr>
-                        <a:t>7,82</a:t>
+                        <a:t>7,79</a:t>
                       </a:r>
                     </a:p>
                   </a:txBody>
@@ -6138,7 +6138,7 @@
                 </a:solidFill>
                 <a:latin typeface="Calibri"/>
               </a:rPr>
-              <a:t>Les ratios de la societe sont solides, avec un EV/EBITDA de 17,4x et un P/E de 27,2x.</a:t>
+              <a:t>ROIC de 30.1% et ROE de 29.6% surpassent la médiane du secteur tech (18-22%). Marges EBITDA à 56.9% parmi les meilleures du S&amp;P 500.</a:t>
             </a:r>
           </a:p>
         </p:txBody>
@@ -7303,7 +7303,7 @@
                           </a:solidFill>
                           <a:latin typeface="Calibri"/>
                         </a:rPr>
-                        <a:t>410 $</a:t>
+                        <a:t>420 $</a:t>
                       </a:r>
                     </a:p>
                   </a:txBody>
@@ -7391,7 +7391,7 @@
                           </a:solidFill>
                           <a:latin typeface="Calibri"/>
                         </a:rPr>
-                        <a:t>372,74 $</a:t>
+                        <a:t>370,93 $</a:t>
                       </a:r>
                     </a:p>
                   </a:txBody>
@@ -7479,7 +7479,7 @@
                           </a:solidFill>
                           <a:latin typeface="Calibri"/>
                         </a:rPr>
-                        <a:t>+10,0 %</a:t>
+                        <a:t>+13,2 %</a:t>
                       </a:r>
                     </a:p>
                   </a:txBody>
@@ -7622,7 +7622,7 @@
                           </a:solidFill>
                           <a:latin typeface="Calibri"/>
                         </a:rPr>
-                        <a:t>320 $</a:t>
+                        <a:t>350 $</a:t>
                       </a:r>
                     </a:p>
                   </a:txBody>
@@ -7645,7 +7645,7 @@
                           </a:solidFill>
                           <a:latin typeface="Calibri"/>
                         </a:rPr>
-                        <a:t>410 $</a:t>
+                        <a:t>420 $</a:t>
                       </a:r>
                     </a:p>
                   </a:txBody>
@@ -7668,7 +7668,7 @@
                           </a:solidFill>
                           <a:latin typeface="Calibri"/>
                         </a:rPr>
-                        <a:t>450 $</a:t>
+                        <a:t>480 $</a:t>
                       </a:r>
                     </a:p>
                   </a:txBody>
@@ -7693,7 +7693,7 @@
                           </a:solidFill>
                           <a:latin typeface="Calibri"/>
                         </a:rPr>
-                        <a:t>-14,1 %</a:t>
+                        <a:t>-5,6 %</a:t>
                       </a:r>
                     </a:p>
                   </a:txBody>
@@ -7716,7 +7716,7 @@
                           </a:solidFill>
                           <a:latin typeface="Calibri"/>
                         </a:rPr>
-                        <a:t>+10,0 %</a:t>
+                        <a:t>+13,2 %</a:t>
                       </a:r>
                     </a:p>
                   </a:txBody>
@@ -7739,7 +7739,7 @@
                           </a:solidFill>
                           <a:latin typeface="Calibri"/>
                         </a:rPr>
-                        <a:t>+20,7 %</a:t>
+                        <a:t>+29,4 %</a:t>
                       </a:r>
                     </a:p>
                   </a:txBody>
@@ -8203,7 +8203,7 @@
                           </a:solidFill>
                           <a:latin typeface="Calibri"/>
                         </a:rPr>
-                        <a:t>475</a:t>
+                        <a:t>486</a:t>
                       </a:r>
                     </a:p>
                   </a:txBody>
@@ -8246,7 +8246,7 @@
                           </a:solidFill>
                           <a:latin typeface="Calibri"/>
                         </a:rPr>
-                        <a:t>515</a:t>
+                        <a:t>528</a:t>
                       </a:r>
                     </a:p>
                   </a:txBody>
@@ -8289,7 +8289,7 @@
                           </a:solidFill>
                           <a:latin typeface="Calibri"/>
                         </a:rPr>
-                        <a:t>564</a:t>
+                        <a:t>578</a:t>
                       </a:r>
                     </a:p>
                   </a:txBody>
@@ -8332,7 +8332,7 @@
                           </a:solidFill>
                           <a:latin typeface="Calibri"/>
                         </a:rPr>
-                        <a:t>622</a:t>
+                        <a:t>638</a:t>
                       </a:r>
                     </a:p>
                   </a:txBody>
@@ -8375,7 +8375,7 @@
                           </a:solidFill>
                           <a:latin typeface="Calibri"/>
                         </a:rPr>
-                        <a:t>693</a:t>
+                        <a:t>712</a:t>
                       </a:r>
                     </a:p>
                   </a:txBody>
@@ -8463,7 +8463,7 @@
                           </a:solidFill>
                           <a:latin typeface="Calibri"/>
                         </a:rPr>
-                        <a:t>410</a:t>
+                        <a:t>420</a:t>
                       </a:r>
                     </a:p>
                   </a:txBody>
@@ -8506,7 +8506,7 @@
                           </a:solidFill>
                           <a:latin typeface="Calibri"/>
                         </a:rPr>
-                        <a:t>440</a:t>
+                        <a:t>451</a:t>
                       </a:r>
                     </a:p>
                   </a:txBody>
@@ -8549,7 +8549,7 @@
                           </a:solidFill>
                           <a:latin typeface="Calibri"/>
                         </a:rPr>
-                        <a:t>475</a:t>
+                        <a:t>486</a:t>
                       </a:r>
                     </a:p>
                   </a:txBody>
@@ -8592,7 +8592,7 @@
                           </a:solidFill>
                           <a:latin typeface="Calibri"/>
                         </a:rPr>
-                        <a:t>515</a:t>
+                        <a:t>528</a:t>
                       </a:r>
                     </a:p>
                   </a:txBody>
@@ -8635,7 +8635,7 @@
                           </a:solidFill>
                           <a:latin typeface="Calibri"/>
                         </a:rPr>
-                        <a:t>564</a:t>
+                        <a:t>578</a:t>
                       </a:r>
                     </a:p>
                   </a:txBody>
@@ -8723,7 +8723,7 @@
                           </a:solidFill>
                           <a:latin typeface="Calibri"/>
                         </a:rPr>
-                        <a:t>361</a:t>
+                        <a:t>370</a:t>
                       </a:r>
                     </a:p>
                   </a:txBody>
@@ -8766,7 +8766,7 @@
                           </a:solidFill>
                           <a:latin typeface="Calibri"/>
                         </a:rPr>
-                        <a:t>384</a:t>
+                        <a:t>393</a:t>
                       </a:r>
                     </a:p>
                   </a:txBody>
@@ -8809,7 +8809,7 @@
                           </a:solidFill>
                           <a:latin typeface="Calibri"/>
                         </a:rPr>
-                        <a:t>410</a:t>
+                        <a:t>420</a:t>
                       </a:r>
                     </a:p>
                   </a:txBody>
@@ -8852,7 +8852,7 @@
                           </a:solidFill>
                           <a:latin typeface="Calibri"/>
                         </a:rPr>
-                        <a:t>440</a:t>
+                        <a:t>451</a:t>
                       </a:r>
                     </a:p>
                   </a:txBody>
@@ -8895,7 +8895,7 @@
                           </a:solidFill>
                           <a:latin typeface="Calibri"/>
                         </a:rPr>
-                        <a:t>475</a:t>
+                        <a:t>486</a:t>
                       </a:r>
                     </a:p>
                   </a:txBody>
@@ -8983,7 +8983,7 @@
                           </a:solidFill>
                           <a:latin typeface="Calibri"/>
                         </a:rPr>
-                        <a:t>322</a:t>
+                        <a:t>330</a:t>
                       </a:r>
                     </a:p>
                   </a:txBody>
@@ -9026,7 +9026,7 @@
                           </a:solidFill>
                           <a:latin typeface="Calibri"/>
                         </a:rPr>
-                        <a:t>340</a:t>
+                        <a:t>349</a:t>
                       </a:r>
                     </a:p>
                   </a:txBody>
@@ -9069,7 +9069,7 @@
                           </a:solidFill>
                           <a:latin typeface="Calibri"/>
                         </a:rPr>
-                        <a:t>361</a:t>
+                        <a:t>370</a:t>
                       </a:r>
                     </a:p>
                   </a:txBody>
@@ -9112,7 +9112,7 @@
                           </a:solidFill>
                           <a:latin typeface="Calibri"/>
                         </a:rPr>
-                        <a:t>384</a:t>
+                        <a:t>393</a:t>
                       </a:r>
                     </a:p>
                   </a:txBody>
@@ -9155,7 +9155,7 @@
                           </a:solidFill>
                           <a:latin typeface="Calibri"/>
                         </a:rPr>
-                        <a:t>410</a:t>
+                        <a:t>420</a:t>
                       </a:r>
                     </a:p>
                   </a:txBody>
@@ -9243,7 +9243,7 @@
                           </a:solidFill>
                           <a:latin typeface="Calibri"/>
                         </a:rPr>
-                        <a:t>291</a:t>
+                        <a:t>298</a:t>
                       </a:r>
                     </a:p>
                   </a:txBody>
@@ -9286,7 +9286,7 @@
                           </a:solidFill>
                           <a:latin typeface="Calibri"/>
                         </a:rPr>
-                        <a:t>306</a:t>
+                        <a:t>313</a:t>
                       </a:r>
                     </a:p>
                   </a:txBody>
@@ -9329,7 +9329,7 @@
                           </a:solidFill>
                           <a:latin typeface="Calibri"/>
                         </a:rPr>
-                        <a:t>322</a:t>
+                        <a:t>330</a:t>
                       </a:r>
                     </a:p>
                   </a:txBody>
@@ -9372,7 +9372,7 @@
                           </a:solidFill>
                           <a:latin typeface="Calibri"/>
                         </a:rPr>
-                        <a:t>340</a:t>
+                        <a:t>349</a:t>
                       </a:r>
                     </a:p>
                   </a:txBody>
@@ -9415,7 +9415,7 @@
                           </a:solidFill>
                           <a:latin typeface="Calibri"/>
                         </a:rPr>
-                        <a:t>361</a:t>
+                        <a:t>370</a:t>
                       </a:r>
                     </a:p>
                   </a:txBody>
@@ -9480,7 +9480,7 @@
                 </a:solidFill>
                 <a:latin typeface="Calibri"/>
               </a:rPr>
-              <a:t>La valeur actualisee de la societe est superieure a son cours actuel, avec un WACC de 10,3% et un TGR de 3,0%.</a:t>
+              <a:t>WACC à 10.3% et TGR à 3.0% impliquent un upside de 13% vs cours actuel. Valorisation DCF base à 420$ avec scénario conservateur.</a:t>
             </a:r>
           </a:p>
         </p:txBody>
@@ -10358,7 +10358,7 @@
                           </a:solidFill>
                           <a:latin typeface="Calibri"/>
                         </a:rPr>
-                        <a:t>2 767,8</a:t>
+                        <a:t>2 754,4</a:t>
                       </a:r>
                     </a:p>
                   </a:txBody>
@@ -10381,7 +10381,7 @@
                           </a:solidFill>
                           <a:latin typeface="Calibri"/>
                         </a:rPr>
-                        <a:t>17,4x</a:t>
+                        <a:t>17,3x</a:t>
                       </a:r>
                     </a:p>
                   </a:txBody>
@@ -10404,7 +10404,7 @@
                           </a:solidFill>
                           <a:latin typeface="Calibri"/>
                         </a:rPr>
-                        <a:t>9,9x</a:t>
+                        <a:t>9,8x</a:t>
                       </a:r>
                     </a:p>
                   </a:txBody>
@@ -10427,7 +10427,7 @@
                           </a:solidFill>
                           <a:latin typeface="Calibri"/>
                         </a:rPr>
-                        <a:t>27,2x</a:t>
+                        <a:t>27,1x</a:t>
                       </a:r>
                     </a:p>
                   </a:txBody>
@@ -10544,7 +10544,7 @@
                           </a:solidFill>
                           <a:latin typeface="Calibri"/>
                         </a:rPr>
-                        <a:t>1 500,0</a:t>
+                        <a:t>2 300,0</a:t>
                       </a:r>
                     </a:p>
                   </a:txBody>
@@ -10567,7 +10567,7 @@
                           </a:solidFill>
                           <a:latin typeface="Calibri"/>
                         </a:rPr>
-                        <a:t>20,0x</a:t>
+                        <a:t>15,2x</a:t>
                       </a:r>
                     </a:p>
                   </a:txBody>
@@ -10590,7 +10590,7 @@
                           </a:solidFill>
                           <a:latin typeface="Calibri"/>
                         </a:rPr>
-                        <a:t>10,0x</a:t>
+                        <a:t>7,8x</a:t>
                       </a:r>
                     </a:p>
                   </a:txBody>
@@ -10613,7 +10613,7 @@
                           </a:solidFill>
                           <a:latin typeface="Calibri"/>
                         </a:rPr>
-                        <a:t>30,0x</a:t>
+                        <a:t>24,5x</a:t>
                       </a:r>
                     </a:p>
                   </a:txBody>
@@ -10636,7 +10636,7 @@
                           </a:solidFill>
                           <a:latin typeface="Calibri"/>
                         </a:rPr>
-                        <a:t>60,0 %</a:t>
+                        <a:t>56,0 %</a:t>
                       </a:r>
                     </a:p>
                   </a:txBody>
@@ -10659,7 +10659,7 @@
                           </a:solidFill>
                           <a:latin typeface="Calibri"/>
                         </a:rPr>
-                        <a:t>50,0 %</a:t>
+                        <a:t>32,0 %</a:t>
                       </a:r>
                     </a:p>
                   </a:txBody>
@@ -10730,7 +10730,7 @@
                           </a:solidFill>
                           <a:latin typeface="Calibri"/>
                         </a:rPr>
-                        <a:t>1 200,0</a:t>
+                        <a:t>1 800,0</a:t>
                       </a:r>
                     </a:p>
                   </a:txBody>
@@ -10753,7 +10753,7 @@
                           </a:solidFill>
                           <a:latin typeface="Calibri"/>
                         </a:rPr>
-                        <a:t>18,0x</a:t>
+                        <a:t>18,7x</a:t>
                       </a:r>
                     </a:p>
                   </a:txBody>
@@ -10776,7 +10776,7 @@
                           </a:solidFill>
                           <a:latin typeface="Calibri"/>
                         </a:rPr>
-                        <a:t>9,0x</a:t>
+                        <a:t>3,2x</a:t>
                       </a:r>
                     </a:p>
                   </a:txBody>
@@ -10799,7 +10799,7 @@
                           </a:solidFill>
                           <a:latin typeface="Calibri"/>
                         </a:rPr>
-                        <a:t>25,0x</a:t>
+                        <a:t>55,0x</a:t>
                       </a:r>
                     </a:p>
                   </a:txBody>
@@ -10822,7 +10822,7 @@
                           </a:solidFill>
                           <a:latin typeface="Calibri"/>
                         </a:rPr>
-                        <a:t>55,0 %</a:t>
+                        <a:t>45,0 %</a:t>
                       </a:r>
                     </a:p>
                   </a:txBody>
@@ -10845,7 +10845,7 @@
                           </a:solidFill>
                           <a:latin typeface="Calibri"/>
                         </a:rPr>
-                        <a:t>45,0 %</a:t>
+                        <a:t>12,0 %</a:t>
                       </a:r>
                     </a:p>
                   </a:txBody>
@@ -10870,7 +10870,7 @@
                           </a:solidFill>
                           <a:latin typeface="Calibri"/>
                         </a:rPr>
-                        <a:t>Facebook</a:t>
+                        <a:t>Oracle</a:t>
                       </a:r>
                     </a:p>
                   </a:txBody>
@@ -10893,7 +10893,7 @@
                           </a:solidFill>
                           <a:latin typeface="Calibri"/>
                         </a:rPr>
-                        <a:t>FB</a:t>
+                        <a:t>ORCL</a:t>
                       </a:r>
                     </a:p>
                   </a:txBody>
@@ -10916,7 +10916,7 @@
                           </a:solidFill>
                           <a:latin typeface="Calibri"/>
                         </a:rPr>
-                        <a:t>800,0</a:t>
+                        <a:t>320,0</a:t>
                       </a:r>
                     </a:p>
                   </a:txBody>
@@ -10939,7 +10939,7 @@
                           </a:solidFill>
                           <a:latin typeface="Calibri"/>
                         </a:rPr>
-                        <a:t>15,0x</a:t>
+                        <a:t>14,5x</a:t>
                       </a:r>
                     </a:p>
                   </a:txBody>
@@ -10962,7 +10962,7 @@
                           </a:solidFill>
                           <a:latin typeface="Calibri"/>
                         </a:rPr>
-                        <a:t>7,0x</a:t>
+                        <a:t>6,8x</a:t>
                       </a:r>
                     </a:p>
                   </a:txBody>
@@ -10985,7 +10985,7 @@
                           </a:solidFill>
                           <a:latin typeface="Calibri"/>
                         </a:rPr>
-                        <a:t>20,0x</a:t>
+                        <a:t>22,0x</a:t>
                       </a:r>
                     </a:p>
                   </a:txBody>
@@ -11008,7 +11008,7 @@
                           </a:solidFill>
                           <a:latin typeface="Calibri"/>
                         </a:rPr>
-                        <a:t>50,0 %</a:t>
+                        <a:t>78,0 %</a:t>
                       </a:r>
                     </a:p>
                   </a:txBody>
@@ -11031,7 +11031,7 @@
                           </a:solidFill>
                           <a:latin typeface="Calibri"/>
                         </a:rPr>
-                        <a:t>40,0 %</a:t>
+                        <a:t>48,0 %</a:t>
                       </a:r>
                     </a:p>
                   </a:txBody>
@@ -11056,7 +11056,7 @@
                           </a:solidFill>
                           <a:latin typeface="Calibri"/>
                         </a:rPr>
-                        <a:t>Apple</a:t>
+                        <a:t>Salesforce</a:t>
                       </a:r>
                     </a:p>
                   </a:txBody>
@@ -11079,7 +11079,7 @@
                           </a:solidFill>
                           <a:latin typeface="Calibri"/>
                         </a:rPr>
-                        <a:t>AAPL</a:t>
+                        <a:t>CRM</a:t>
                       </a:r>
                     </a:p>
                   </a:txBody>
@@ -11102,7 +11102,7 @@
                           </a:solidFill>
                           <a:latin typeface="Calibri"/>
                         </a:rPr>
-                        <a:t>2 000,0</a:t>
+                        <a:t>280,0</a:t>
                       </a:r>
                     </a:p>
                   </a:txBody>
@@ -11125,7 +11125,7 @@
                           </a:solidFill>
                           <a:latin typeface="Calibri"/>
                         </a:rPr>
-                        <a:t>15,0x</a:t>
+                        <a:t>22,5x</a:t>
                       </a:r>
                     </a:p>
                   </a:txBody>
@@ -11148,7 +11148,7 @@
                           </a:solidFill>
                           <a:latin typeface="Calibri"/>
                         </a:rPr>
-                        <a:t>6,0x</a:t>
+                        <a:t>6,5x</a:t>
                       </a:r>
                     </a:p>
                   </a:txBody>
@@ -11171,7 +11171,7 @@
                           </a:solidFill>
                           <a:latin typeface="Calibri"/>
                         </a:rPr>
-                        <a:t>20,0x</a:t>
+                        <a:t>35,0x</a:t>
                       </a:r>
                     </a:p>
                   </a:txBody>
@@ -11194,7 +11194,7 @@
                           </a:solidFill>
                           <a:latin typeface="Calibri"/>
                         </a:rPr>
-                        <a:t>45,0 %</a:t>
+                        <a:t>73,0 %</a:t>
                       </a:r>
                     </a:p>
                   </a:txBody>
@@ -11217,7 +11217,7 @@
                           </a:solidFill>
                           <a:latin typeface="Calibri"/>
                         </a:rPr>
-                        <a:t>35,0 %</a:t>
+                        <a:t>25,0 %</a:t>
                       </a:r>
                     </a:p>
                   </a:txBody>
@@ -11288,7 +11288,7 @@
                           </a:solidFill>
                           <a:latin typeface="Calibri"/>
                         </a:rPr>
-                        <a:t>100,0</a:t>
+                        <a:t>160,0</a:t>
                       </a:r>
                     </a:p>
                   </a:txBody>
@@ -11311,7 +11311,7 @@
                           </a:solidFill>
                           <a:latin typeface="Calibri"/>
                         </a:rPr>
-                        <a:t>10,0x</a:t>
+                        <a:t>12,8x</a:t>
                       </a:r>
                     </a:p>
                   </a:txBody>
@@ -11334,7 +11334,7 @@
                           </a:solidFill>
                           <a:latin typeface="Calibri"/>
                         </a:rPr>
-                        <a:t>5,0x</a:t>
+                        <a:t>2,1x</a:t>
                       </a:r>
                     </a:p>
                   </a:txBody>
@@ -11357,7 +11357,7 @@
                           </a:solidFill>
                           <a:latin typeface="Calibri"/>
                         </a:rPr>
-                        <a:t>15,0x</a:t>
+                        <a:t>18,0x</a:t>
                       </a:r>
                     </a:p>
                   </a:txBody>
@@ -11380,7 +11380,7 @@
                           </a:solidFill>
                           <a:latin typeface="Calibri"/>
                         </a:rPr>
-                        <a:t>40,0 %</a:t>
+                        <a:t>52,0 %</a:t>
                       </a:r>
                     </a:p>
                   </a:txBody>
@@ -11403,7 +11403,7 @@
                           </a:solidFill>
                           <a:latin typeface="Calibri"/>
                         </a:rPr>
-                        <a:t>30,0 %</a:t>
+                        <a:t>22,0 %</a:t>
                       </a:r>
                     </a:p>
                   </a:txBody>
@@ -11497,7 +11497,7 @@
                           </a:solidFill>
                           <a:latin typeface="Calibri"/>
                         </a:rPr>
-                        <a:t>15,0x</a:t>
+                        <a:t>15,2x</a:t>
                       </a:r>
                     </a:p>
                   </a:txBody>
@@ -11520,7 +11520,7 @@
                           </a:solidFill>
                           <a:latin typeface="Calibri"/>
                         </a:rPr>
-                        <a:t>7,0x</a:t>
+                        <a:t>6,5x</a:t>
                       </a:r>
                     </a:p>
                   </a:txBody>
@@ -11543,7 +11543,7 @@
                           </a:solidFill>
                           <a:latin typeface="Calibri"/>
                         </a:rPr>
-                        <a:t>20,0x</a:t>
+                        <a:t>24,5x</a:t>
                       </a:r>
                     </a:p>
                   </a:txBody>
@@ -11566,7 +11566,7 @@
                           </a:solidFill>
                           <a:latin typeface="Calibri"/>
                         </a:rPr>
-                        <a:t>50,0 %</a:t>
+                        <a:t>56,0 %</a:t>
                       </a:r>
                     </a:p>
                   </a:txBody>
@@ -11589,7 +11589,7 @@
                           </a:solidFill>
                           <a:latin typeface="Calibri"/>
                         </a:rPr>
-                        <a:t>40,0 %</a:t>
+                        <a:t>25,0 %</a:t>
                       </a:r>
                     </a:p>
                   </a:txBody>
@@ -11634,7 +11634,7 @@
                 </a:solidFill>
                 <a:latin typeface="Calibri"/>
               </a:rPr>
-              <a:t>Les ratios de la societe sont solides, avec un EV/EBITDA de 17,4x et un P/E de 27,2x.</a:t>
+              <a:t>ROIC de 30.1% et ROE de 29.6% surpassent la médiane du secteur tech (18-22%). Marges EBITDA à 56.9% parmi les meilleures du S&amp;P 500.</a:t>
             </a:r>
           </a:p>
         </p:txBody>
@@ -12238,786 +12238,30 @@
           </a:p>
         </p:txBody>
       </p:sp>
-      <p:graphicFrame>
-        <p:nvGraphicFramePr>
-          <p:cNvPr id="17" name="Table 16"/>
-          <p:cNvGraphicFramePr>
-            <a:graphicFrameLocks noGrp="1"/>
-          </p:cNvGraphicFramePr>
-          <p:nvPr/>
-        </p:nvGraphicFramePr>
-        <p:xfrm>
-          <a:off x="367200" y="914400"/>
-          <a:ext cx="8413200" cy="2149200"/>
-        </p:xfrm>
-        <a:graphic>
-          <a:graphicData uri="http://schemas.openxmlformats.org/drawingml/2006/table">
-            <a:tbl>
-              <a:tblPr firstRow="1" bandRow="1">
-                <a:tableStyleId>{5C22544A-7EE6-4342-B048-85BDC9FD1C3A}</a:tableStyleId>
-              </a:tblPr>
-              <a:tblGrid>
-                <a:gridCol w="2944620"/>
-                <a:gridCol w="1682640"/>
-                <a:gridCol w="1682640"/>
-                <a:gridCol w="2103300"/>
-              </a:tblGrid>
-              <a:tr h="268650">
-                <a:tc>
-                  <a:txBody>
-                    <a:bodyPr/>
-                    <a:lstStyle/>
-                    <a:p>
-                      <a:pPr algn="l"/>
-                      <a:r>
-                        <a:rPr sz="800" b="1" i="0">
-                          <a:solidFill>
-                            <a:srgbClr val="FFFFFF"/>
-                          </a:solidFill>
-                          <a:latin typeface="Calibri"/>
-                        </a:rPr>
-                        <a:t>Methode</a:t>
-                      </a:r>
-                    </a:p>
-                  </a:txBody>
-                  <a:tcPr>
-                    <a:solidFill>
-                      <a:srgbClr val="1B3A6B"/>
-                    </a:solidFill>
-                  </a:tcPr>
-                </a:tc>
-                <a:tc>
-                  <a:txBody>
-                    <a:bodyPr/>
-                    <a:lstStyle/>
-                    <a:p>
-                      <a:pPr algn="ctr"/>
-                      <a:r>
-                        <a:rPr sz="800" b="1" i="0">
-                          <a:solidFill>
-                            <a:srgbClr val="FFFFFF"/>
-                          </a:solidFill>
-                          <a:latin typeface="Calibri"/>
-                        </a:rPr>
-                        <a:t>Fourchette basse</a:t>
-                      </a:r>
-                    </a:p>
-                  </a:txBody>
-                  <a:tcPr>
-                    <a:solidFill>
-                      <a:srgbClr val="1B3A6B"/>
-                    </a:solidFill>
-                  </a:tcPr>
-                </a:tc>
-                <a:tc>
-                  <a:txBody>
-                    <a:bodyPr/>
-                    <a:lstStyle/>
-                    <a:p>
-                      <a:pPr algn="ctr"/>
-                      <a:r>
-                        <a:rPr sz="800" b="1" i="0">
-                          <a:solidFill>
-                            <a:srgbClr val="FFFFFF"/>
-                          </a:solidFill>
-                          <a:latin typeface="Calibri"/>
-                        </a:rPr>
-                        <a:t>Fourchette haute</a:t>
-                      </a:r>
-                    </a:p>
-                  </a:txBody>
-                  <a:tcPr>
-                    <a:solidFill>
-                      <a:srgbClr val="1B3A6B"/>
-                    </a:solidFill>
-                  </a:tcPr>
-                </a:tc>
-                <a:tc>
-                  <a:txBody>
-                    <a:bodyPr/>
-                    <a:lstStyle/>
-                    <a:p>
-                      <a:pPr algn="ctr"/>
-                      <a:r>
-                        <a:rPr sz="800" b="1" i="0">
-                          <a:solidFill>
-                            <a:srgbClr val="FFFFFF"/>
-                          </a:solidFill>
-                          <a:latin typeface="Calibri"/>
-                        </a:rPr>
-                        <a:t>Point central</a:t>
-                      </a:r>
-                    </a:p>
-                  </a:txBody>
-                  <a:tcPr>
-                    <a:solidFill>
-                      <a:srgbClr val="1B3A6B"/>
-                    </a:solidFill>
-                  </a:tcPr>
-                </a:tc>
-              </a:tr>
-              <a:tr h="268650">
-                <a:tc>
-                  <a:txBody>
-                    <a:bodyPr/>
-                    <a:lstStyle/>
-                    <a:p>
-                      <a:pPr algn="l"/>
-                      <a:r>
-                        <a:rPr sz="800" b="0" i="0">
-                          <a:solidFill>
-                            <a:srgbClr val="0D0D0D"/>
-                          </a:solidFill>
-                          <a:latin typeface="Calibri"/>
-                        </a:rPr>
-                        <a:t>DCF - Bear</a:t>
-                      </a:r>
-                    </a:p>
-                  </a:txBody>
-                  <a:tcPr>
-                    <a:solidFill>
-                      <a:srgbClr val="FAF0EF"/>
-                    </a:solidFill>
-                  </a:tcPr>
-                </a:tc>
-                <a:tc>
-                  <a:txBody>
-                    <a:bodyPr/>
-                    <a:lstStyle/>
-                    <a:p>
-                      <a:pPr algn="ctr"/>
-                      <a:r>
-                        <a:rPr sz="800" b="0" i="0">
-                          <a:solidFill>
-                            <a:srgbClr val="0D0D0D"/>
-                          </a:solidFill>
-                          <a:latin typeface="Calibri"/>
-                        </a:rPr>
-                        <a:t>280</a:t>
-                      </a:r>
-                    </a:p>
-                  </a:txBody>
-                  <a:tcPr>
-                    <a:solidFill>
-                      <a:srgbClr val="FAF0EF"/>
-                    </a:solidFill>
-                  </a:tcPr>
-                </a:tc>
-                <a:tc>
-                  <a:txBody>
-                    <a:bodyPr/>
-                    <a:lstStyle/>
-                    <a:p>
-                      <a:pPr algn="ctr"/>
-                      <a:r>
-                        <a:rPr sz="800" b="0" i="0">
-                          <a:solidFill>
-                            <a:srgbClr val="0D0D0D"/>
-                          </a:solidFill>
-                          <a:latin typeface="Calibri"/>
-                        </a:rPr>
-                        <a:t>300</a:t>
-                      </a:r>
-                    </a:p>
-                  </a:txBody>
-                  <a:tcPr>
-                    <a:solidFill>
-                      <a:srgbClr val="FAF0EF"/>
-                    </a:solidFill>
-                  </a:tcPr>
-                </a:tc>
-                <a:tc>
-                  <a:txBody>
-                    <a:bodyPr/>
-                    <a:lstStyle/>
-                    <a:p>
-                      <a:pPr algn="ctr"/>
-                      <a:r>
-                        <a:rPr sz="800" b="0" i="0">
-                          <a:solidFill>
-                            <a:srgbClr val="0D0D0D"/>
-                          </a:solidFill>
-                          <a:latin typeface="Calibri"/>
-                        </a:rPr>
-                        <a:t>290</a:t>
-                      </a:r>
-                    </a:p>
-                  </a:txBody>
-                  <a:tcPr>
-                    <a:solidFill>
-                      <a:srgbClr val="FAF0EF"/>
-                    </a:solidFill>
-                  </a:tcPr>
-                </a:tc>
-              </a:tr>
-              <a:tr h="268650">
-                <a:tc>
-                  <a:txBody>
-                    <a:bodyPr/>
-                    <a:lstStyle/>
-                    <a:p>
-                      <a:pPr algn="l"/>
-                      <a:r>
-                        <a:rPr sz="800" b="0" i="0">
-                          <a:solidFill>
-                            <a:srgbClr val="0D0D0D"/>
-                          </a:solidFill>
-                          <a:latin typeface="Calibri"/>
-                        </a:rPr>
-                        <a:t>DCF - Base</a:t>
-                      </a:r>
-                    </a:p>
-                  </a:txBody>
-                  <a:tcPr>
-                    <a:solidFill>
-                      <a:srgbClr val="EEF3FA"/>
-                    </a:solidFill>
-                  </a:tcPr>
-                </a:tc>
-                <a:tc>
-                  <a:txBody>
-                    <a:bodyPr/>
-                    <a:lstStyle/>
-                    <a:p>
-                      <a:pPr algn="ctr"/>
-                      <a:r>
-                        <a:rPr sz="800" b="0" i="0">
-                          <a:solidFill>
-                            <a:srgbClr val="0D0D0D"/>
-                          </a:solidFill>
-                          <a:latin typeface="Calibri"/>
-                        </a:rPr>
-                        <a:t>380</a:t>
-                      </a:r>
-                    </a:p>
-                  </a:txBody>
-                  <a:tcPr>
-                    <a:solidFill>
-                      <a:srgbClr val="EEF3FA"/>
-                    </a:solidFill>
-                  </a:tcPr>
-                </a:tc>
-                <a:tc>
-                  <a:txBody>
-                    <a:bodyPr/>
-                    <a:lstStyle/>
-                    <a:p>
-                      <a:pPr algn="ctr"/>
-                      <a:r>
-                        <a:rPr sz="800" b="0" i="0">
-                          <a:solidFill>
-                            <a:srgbClr val="0D0D0D"/>
-                          </a:solidFill>
-                          <a:latin typeface="Calibri"/>
-                        </a:rPr>
-                        <a:t>420</a:t>
-                      </a:r>
-                    </a:p>
-                  </a:txBody>
-                  <a:tcPr>
-                    <a:solidFill>
-                      <a:srgbClr val="EEF3FA"/>
-                    </a:solidFill>
-                  </a:tcPr>
-                </a:tc>
-                <a:tc>
-                  <a:txBody>
-                    <a:bodyPr/>
-                    <a:lstStyle/>
-                    <a:p>
-                      <a:pPr algn="ctr"/>
-                      <a:r>
-                        <a:rPr sz="800" b="0" i="0">
-                          <a:solidFill>
-                            <a:srgbClr val="0D0D0D"/>
-                          </a:solidFill>
-                          <a:latin typeface="Calibri"/>
-                        </a:rPr>
-                        <a:t>400</a:t>
-                      </a:r>
-                    </a:p>
-                  </a:txBody>
-                  <a:tcPr>
-                    <a:solidFill>
-                      <a:srgbClr val="EEF3FA"/>
-                    </a:solidFill>
-                  </a:tcPr>
-                </a:tc>
-              </a:tr>
-              <a:tr h="268650">
-                <a:tc>
-                  <a:txBody>
-                    <a:bodyPr/>
-                    <a:lstStyle/>
-                    <a:p>
-                      <a:pPr algn="l"/>
-                      <a:r>
-                        <a:rPr sz="800" b="0" i="0">
-                          <a:solidFill>
-                            <a:srgbClr val="0D0D0D"/>
-                          </a:solidFill>
-                          <a:latin typeface="Calibri"/>
-                        </a:rPr>
-                        <a:t>DCF - Bull</a:t>
-                      </a:r>
-                    </a:p>
-                  </a:txBody>
-                  <a:tcPr>
-                    <a:solidFill>
-                      <a:srgbClr val="EAF4EF"/>
-                    </a:solidFill>
-                  </a:tcPr>
-                </a:tc>
-                <a:tc>
-                  <a:txBody>
-                    <a:bodyPr/>
-                    <a:lstStyle/>
-                    <a:p>
-                      <a:pPr algn="ctr"/>
-                      <a:r>
-                        <a:rPr sz="800" b="0" i="0">
-                          <a:solidFill>
-                            <a:srgbClr val="0D0D0D"/>
-                          </a:solidFill>
-                          <a:latin typeface="Calibri"/>
-                        </a:rPr>
-                        <a:t>450</a:t>
-                      </a:r>
-                    </a:p>
-                  </a:txBody>
-                  <a:tcPr>
-                    <a:solidFill>
-                      <a:srgbClr val="EAF4EF"/>
-                    </a:solidFill>
-                  </a:tcPr>
-                </a:tc>
-                <a:tc>
-                  <a:txBody>
-                    <a:bodyPr/>
-                    <a:lstStyle/>
-                    <a:p>
-                      <a:pPr algn="ctr"/>
-                      <a:r>
-                        <a:rPr sz="800" b="0" i="0">
-                          <a:solidFill>
-                            <a:srgbClr val="0D0D0D"/>
-                          </a:solidFill>
-                          <a:latin typeface="Calibri"/>
-                        </a:rPr>
-                        <a:t>500</a:t>
-                      </a:r>
-                    </a:p>
-                  </a:txBody>
-                  <a:tcPr>
-                    <a:solidFill>
-                      <a:srgbClr val="EAF4EF"/>
-                    </a:solidFill>
-                  </a:tcPr>
-                </a:tc>
-                <a:tc>
-                  <a:txBody>
-                    <a:bodyPr/>
-                    <a:lstStyle/>
-                    <a:p>
-                      <a:pPr algn="ctr"/>
-                      <a:r>
-                        <a:rPr sz="800" b="0" i="0">
-                          <a:solidFill>
-                            <a:srgbClr val="0D0D0D"/>
-                          </a:solidFill>
-                          <a:latin typeface="Calibri"/>
-                        </a:rPr>
-                        <a:t>475</a:t>
-                      </a:r>
-                    </a:p>
-                  </a:txBody>
-                  <a:tcPr>
-                    <a:solidFill>
-                      <a:srgbClr val="EAF4EF"/>
-                    </a:solidFill>
-                  </a:tcPr>
-                </a:tc>
-              </a:tr>
-              <a:tr h="268650">
-                <a:tc>
-                  <a:txBody>
-                    <a:bodyPr/>
-                    <a:lstStyle/>
-                    <a:p>
-                      <a:pPr algn="l"/>
-                      <a:r>
-                        <a:rPr sz="800" b="0" i="0">
-                          <a:solidFill>
-                            <a:srgbClr val="0D0D0D"/>
-                          </a:solidFill>
-                          <a:latin typeface="Calibri"/>
-                        </a:rPr>
-                        <a:t>EV/EBITDA - Mediane peers</a:t>
-                      </a:r>
-                    </a:p>
-                  </a:txBody>
-                  <a:tcPr>
-                    <a:solidFill>
-                      <a:srgbClr val="F7F8FA"/>
-                    </a:solidFill>
-                  </a:tcPr>
-                </a:tc>
-                <a:tc>
-                  <a:txBody>
-                    <a:bodyPr/>
-                    <a:lstStyle/>
-                    <a:p>
-                      <a:pPr algn="ctr"/>
-                      <a:r>
-                        <a:rPr sz="800" b="0" i="0">
-                          <a:solidFill>
-                            <a:srgbClr val="0D0D0D"/>
-                          </a:solidFill>
-                          <a:latin typeface="Calibri"/>
-                        </a:rPr>
-                        <a:t>350</a:t>
-                      </a:r>
-                    </a:p>
-                  </a:txBody>
-                  <a:tcPr>
-                    <a:solidFill>
-                      <a:srgbClr val="F7F8FA"/>
-                    </a:solidFill>
-                  </a:tcPr>
-                </a:tc>
-                <a:tc>
-                  <a:txBody>
-                    <a:bodyPr/>
-                    <a:lstStyle/>
-                    <a:p>
-                      <a:pPr algn="ctr"/>
-                      <a:r>
-                        <a:rPr sz="800" b="0" i="0">
-                          <a:solidFill>
-                            <a:srgbClr val="0D0D0D"/>
-                          </a:solidFill>
-                          <a:latin typeface="Calibri"/>
-                        </a:rPr>
-                        <a:t>400</a:t>
-                      </a:r>
-                    </a:p>
-                  </a:txBody>
-                  <a:tcPr>
-                    <a:solidFill>
-                      <a:srgbClr val="F7F8FA"/>
-                    </a:solidFill>
-                  </a:tcPr>
-                </a:tc>
-                <a:tc>
-                  <a:txBody>
-                    <a:bodyPr/>
-                    <a:lstStyle/>
-                    <a:p>
-                      <a:pPr algn="ctr"/>
-                      <a:r>
-                        <a:rPr sz="800" b="0" i="0">
-                          <a:solidFill>
-                            <a:srgbClr val="0D0D0D"/>
-                          </a:solidFill>
-                          <a:latin typeface="Calibri"/>
-                        </a:rPr>
-                        <a:t>375</a:t>
-                      </a:r>
-                    </a:p>
-                  </a:txBody>
-                  <a:tcPr>
-                    <a:solidFill>
-                      <a:srgbClr val="F7F8FA"/>
-                    </a:solidFill>
-                  </a:tcPr>
-                </a:tc>
-              </a:tr>
-              <a:tr h="268650">
-                <a:tc>
-                  <a:txBody>
-                    <a:bodyPr/>
-                    <a:lstStyle/>
-                    <a:p>
-                      <a:pPr algn="l"/>
-                      <a:r>
-                        <a:rPr sz="800" b="0" i="0">
-                          <a:solidFill>
-                            <a:srgbClr val="0D0D0D"/>
-                          </a:solidFill>
-                          <a:latin typeface="Calibri"/>
-                        </a:rPr>
-                        <a:t>EV/EBITDA - Prime tech +50 %</a:t>
-                      </a:r>
-                    </a:p>
-                  </a:txBody>
-                  <a:tcPr>
-                    <a:solidFill>
-                      <a:srgbClr val="F7F8FA"/>
-                    </a:solidFill>
-                  </a:tcPr>
-                </a:tc>
-                <a:tc>
-                  <a:txBody>
-                    <a:bodyPr/>
-                    <a:lstStyle/>
-                    <a:p>
-                      <a:pPr algn="ctr"/>
-                      <a:r>
-                        <a:rPr sz="800" b="0" i="0">
-                          <a:solidFill>
-                            <a:srgbClr val="0D0D0D"/>
-                          </a:solidFill>
-                          <a:latin typeface="Calibri"/>
-                        </a:rPr>
-                        <a:t>420</a:t>
-                      </a:r>
-                    </a:p>
-                  </a:txBody>
-                  <a:tcPr>
-                    <a:solidFill>
-                      <a:srgbClr val="F7F8FA"/>
-                    </a:solidFill>
-                  </a:tcPr>
-                </a:tc>
-                <a:tc>
-                  <a:txBody>
-                    <a:bodyPr/>
-                    <a:lstStyle/>
-                    <a:p>
-                      <a:pPr algn="ctr"/>
-                      <a:r>
-                        <a:rPr sz="800" b="0" i="0">
-                          <a:solidFill>
-                            <a:srgbClr val="0D0D0D"/>
-                          </a:solidFill>
-                          <a:latin typeface="Calibri"/>
-                        </a:rPr>
-                        <a:t>480</a:t>
-                      </a:r>
-                    </a:p>
-                  </a:txBody>
-                  <a:tcPr>
-                    <a:solidFill>
-                      <a:srgbClr val="F7F8FA"/>
-                    </a:solidFill>
-                  </a:tcPr>
-                </a:tc>
-                <a:tc>
-                  <a:txBody>
-                    <a:bodyPr/>
-                    <a:lstStyle/>
-                    <a:p>
-                      <a:pPr algn="ctr"/>
-                      <a:r>
-                        <a:rPr sz="800" b="0" i="0">
-                          <a:solidFill>
-                            <a:srgbClr val="0D0D0D"/>
-                          </a:solidFill>
-                          <a:latin typeface="Calibri"/>
-                        </a:rPr>
-                        <a:t>450</a:t>
-                      </a:r>
-                    </a:p>
-                  </a:txBody>
-                  <a:tcPr>
-                    <a:solidFill>
-                      <a:srgbClr val="F7F8FA"/>
-                    </a:solidFill>
-                  </a:tcPr>
-                </a:tc>
-              </a:tr>
-              <a:tr h="268650">
-                <a:tc>
-                  <a:txBody>
-                    <a:bodyPr/>
-                    <a:lstStyle/>
-                    <a:p>
-                      <a:pPr algn="l"/>
-                      <a:r>
-                        <a:rPr sz="800" b="0" i="0">
-                          <a:solidFill>
-                            <a:srgbClr val="0D0D0D"/>
-                          </a:solidFill>
-                          <a:latin typeface="Calibri"/>
-                        </a:rPr>
-                        <a:t>EV/Revenue - Mediane peers</a:t>
-                      </a:r>
-                    </a:p>
-                  </a:txBody>
-                  <a:tcPr>
-                    <a:solidFill>
-                      <a:srgbClr val="F7F8FA"/>
-                    </a:solidFill>
-                  </a:tcPr>
-                </a:tc>
-                <a:tc>
-                  <a:txBody>
-                    <a:bodyPr/>
-                    <a:lstStyle/>
-                    <a:p>
-                      <a:pPr algn="ctr"/>
-                      <a:r>
-                        <a:rPr sz="800" b="0" i="0">
-                          <a:solidFill>
-                            <a:srgbClr val="0D0D0D"/>
-                          </a:solidFill>
-                          <a:latin typeface="Calibri"/>
-                        </a:rPr>
-                        <a:t>300</a:t>
-                      </a:r>
-                    </a:p>
-                  </a:txBody>
-                  <a:tcPr>
-                    <a:solidFill>
-                      <a:srgbClr val="F7F8FA"/>
-                    </a:solidFill>
-                  </a:tcPr>
-                </a:tc>
-                <a:tc>
-                  <a:txBody>
-                    <a:bodyPr/>
-                    <a:lstStyle/>
-                    <a:p>
-                      <a:pPr algn="ctr"/>
-                      <a:r>
-                        <a:rPr sz="800" b="0" i="0">
-                          <a:solidFill>
-                            <a:srgbClr val="0D0D0D"/>
-                          </a:solidFill>
-                          <a:latin typeface="Calibri"/>
-                        </a:rPr>
-                        <a:t>350</a:t>
-                      </a:r>
-                    </a:p>
-                  </a:txBody>
-                  <a:tcPr>
-                    <a:solidFill>
-                      <a:srgbClr val="F7F8FA"/>
-                    </a:solidFill>
-                  </a:tcPr>
-                </a:tc>
-                <a:tc>
-                  <a:txBody>
-                    <a:bodyPr/>
-                    <a:lstStyle/>
-                    <a:p>
-                      <a:pPr algn="ctr"/>
-                      <a:r>
-                        <a:rPr sz="800" b="0" i="0">
-                          <a:solidFill>
-                            <a:srgbClr val="0D0D0D"/>
-                          </a:solidFill>
-                          <a:latin typeface="Calibri"/>
-                        </a:rPr>
-                        <a:t>325</a:t>
-                      </a:r>
-                    </a:p>
-                  </a:txBody>
-                  <a:tcPr>
-                    <a:solidFill>
-                      <a:srgbClr val="F7F8FA"/>
-                    </a:solidFill>
-                  </a:tcPr>
-                </a:tc>
-              </a:tr>
-              <a:tr h="268650">
-                <a:tc>
-                  <a:txBody>
-                    <a:bodyPr/>
-                    <a:lstStyle/>
-                    <a:p>
-                      <a:pPr algn="l"/>
-                      <a:r>
-                        <a:rPr sz="800" b="0" i="0">
-                          <a:solidFill>
-                            <a:srgbClr val="0D0D0D"/>
-                          </a:solidFill>
-                          <a:latin typeface="Calibri"/>
-                        </a:rPr>
-                        <a:t>Cours actuel (372,74)</a:t>
-                      </a:r>
-                    </a:p>
-                  </a:txBody>
-                  <a:tcPr>
-                    <a:solidFill>
-                      <a:srgbClr val="EEF3FA"/>
-                    </a:solidFill>
-                  </a:tcPr>
-                </a:tc>
-                <a:tc>
-                  <a:txBody>
-                    <a:bodyPr/>
-                    <a:lstStyle/>
-                    <a:p>
-                      <a:pPr algn="ctr"/>
-                      <a:r>
-                        <a:rPr sz="800" b="0" i="0">
-                          <a:solidFill>
-                            <a:srgbClr val="0D0D0D"/>
-                          </a:solidFill>
-                          <a:latin typeface="Calibri"/>
-                        </a:rPr>
-                        <a:t>—</a:t>
-                      </a:r>
-                    </a:p>
-                  </a:txBody>
-                  <a:tcPr>
-                    <a:solidFill>
-                      <a:srgbClr val="EEF3FA"/>
-                    </a:solidFill>
-                  </a:tcPr>
-                </a:tc>
-                <a:tc>
-                  <a:txBody>
-                    <a:bodyPr/>
-                    <a:lstStyle/>
-                    <a:p>
-                      <a:pPr algn="ctr"/>
-                      <a:r>
-                        <a:rPr sz="800" b="0" i="0">
-                          <a:solidFill>
-                            <a:srgbClr val="0D0D0D"/>
-                          </a:solidFill>
-                          <a:latin typeface="Calibri"/>
-                        </a:rPr>
-                        <a:t>—</a:t>
-                      </a:r>
-                    </a:p>
-                  </a:txBody>
-                  <a:tcPr>
-                    <a:solidFill>
-                      <a:srgbClr val="EEF3FA"/>
-                    </a:solidFill>
-                  </a:tcPr>
-                </a:tc>
-                <a:tc>
-                  <a:txBody>
-                    <a:bodyPr/>
-                    <a:lstStyle/>
-                    <a:p>
-                      <a:pPr algn="ctr"/>
-                      <a:r>
-                        <a:rPr sz="800" b="0" i="0">
-                          <a:solidFill>
-                            <a:srgbClr val="0D0D0D"/>
-                          </a:solidFill>
-                          <a:latin typeface="Calibri"/>
-                        </a:rPr>
-                        <a:t>372,74</a:t>
-                      </a:r>
-                    </a:p>
-                  </a:txBody>
-                  <a:tcPr>
-                    <a:solidFill>
-                      <a:srgbClr val="EEF3FA"/>
-                    </a:solidFill>
-                  </a:tcPr>
-                </a:tc>
-              </a:tr>
-            </a:tbl>
-          </a:graphicData>
-        </a:graphic>
-      </p:graphicFrame>
+      <p:pic>
+        <p:nvPicPr>
+          <p:cNvPr id="17" name="Picture 16" descr="image.png"/>
+          <p:cNvPicPr>
+            <a:picLocks noChangeAspect="1"/>
+          </p:cNvPicPr>
+          <p:nvPr/>
+        </p:nvPicPr>
+        <p:blipFill>
+          <a:blip r:embed="rId2"/>
+          <a:stretch>
+            <a:fillRect/>
+          </a:stretch>
+        </p:blipFill>
+        <p:spPr>
+          <a:xfrm>
+            <a:off x="367200" y="914400"/>
+            <a:ext cx="8413200" cy="1980000"/>
+          </a:xfrm>
+          <a:prstGeom prst="rect">
+            <a:avLst/>
+          </a:prstGeom>
+        </p:spPr>
+      </p:pic>
       <p:sp>
         <p:nvSpPr>
           <p:cNvPr id="18" name="TextBox 17"/>
@@ -13048,7 +12292,7 @@
                 </a:solidFill>
                 <a:latin typeface="Calibri"/>
               </a:rPr>
-              <a:t>La valeur actualisee de la societe est superieure a son cours actuel, avec un WACC de 10,3% et un TGR de 3,0%.</a:t>
+              <a:t>WACC à 10.3% et TGR à 3.0% impliquent un upside de 13% vs cours actuel. Valorisation DCF base à 420$ avec scénario conservateur.</a:t>
             </a:r>
           </a:p>
         </p:txBody>
@@ -14021,7 +13265,7 @@
                 </a:solidFill>
                 <a:latin typeface="Calibri"/>
               </a:rPr>
-              <a:t>Concurrence accrue</a:t>
+              <a:t>Régulation antitrust</a:t>
             </a:r>
           </a:p>
         </p:txBody>
@@ -14056,7 +13300,7 @@
                 </a:solidFill>
                 <a:latin typeface="Calibri"/>
               </a:rPr>
-              <a:t>Microsoft face une concurrence accrue avec 15% de parts de marche en baisse</a:t>
+              <a:t>Risque de régulation antitrust sur les pratiques cloud (DoJ en cours)</a:t>
             </a:r>
           </a:p>
         </p:txBody>
@@ -14177,7 +13421,7 @@
                 </a:solidFill>
                 <a:latin typeface="Calibri"/>
               </a:rPr>
-              <a:t>Marges en baisse</a:t>
+              <a:t>Concurrence IA</a:t>
             </a:r>
           </a:p>
         </p:txBody>
@@ -14212,7 +13456,7 @@
                 </a:solidFill>
                 <a:latin typeface="Calibri"/>
               </a:rPr>
-              <a:t>Les marges bénéficiaires de 36,1% pourraient chuter de 10% en raison des coûts de R&amp;D</a:t>
+              <a:t>Concurrence accrue dans l'IA (Google Vertex, AWS Bedrock)</a:t>
             </a:r>
           </a:p>
         </p:txBody>
@@ -14333,7 +13577,7 @@
                 </a:solidFill>
                 <a:latin typeface="Calibri"/>
               </a:rPr>
-              <a:t>Surévaluation</a:t>
+              <a:t>Dépendance cloud</a:t>
             </a:r>
           </a:p>
         </p:txBody>
@@ -14368,7 +13612,7 @@
                 </a:solidFill>
                 <a:latin typeface="Calibri"/>
               </a:rPr>
-              <a:t>Le ratio EV/EBITDA de 17,36x est surévalué, avec un risque de correction de 20%</a:t>
+              <a:t>Dépendance aux dépenses IT des entreprises (sensibilité au cycle économique)</a:t>
             </a:r>
           </a:p>
         </p:txBody>
@@ -14582,7 +13826,7 @@
                           </a:solidFill>
                           <a:latin typeface="Calibri"/>
                         </a:rPr>
-                        <a:t>Recession economique</a:t>
+                        <a:t>Récession mondiale réduisant les dépenses IT de 15%</a:t>
                       </a:r>
                     </a:p>
                   </a:txBody>
@@ -14653,7 +13897,7 @@
                           </a:solidFill>
                           <a:latin typeface="Calibri"/>
                         </a:rPr>
-                        <a:t>Changement dans les tendances technologiques</a:t>
+                        <a:t>Concurrence accrue dans l'IA générative (parts de marché Azure &lt;35%)</a:t>
                       </a:r>
                     </a:p>
                   </a:txBody>
@@ -14724,7 +13968,7 @@
                           </a:solidFill>
                           <a:latin typeface="Calibri"/>
                         </a:rPr>
-                        <a:t>Problemes de gouvernance</a:t>
+                        <a:t>Régulation antitrust bloquant l'intégration IA dans Azure</a:t>
                       </a:r>
                     </a:p>
                   </a:txBody>
@@ -15730,7 +14974,7 @@
                 </a:solidFill>
                 <a:latin typeface="Calibri"/>
               </a:rPr>
-              <a:t>Neutre +</a:t>
+              <a:t>Negatif</a:t>
             </a:r>
           </a:p>
         </p:txBody>
@@ -15800,7 +15044,7 @@
                 </a:solidFill>
                 <a:latin typeface="Calibri"/>
               </a:rPr>
-              <a:t>Score agrege : +0,095</a:t>
+              <a:t>Score agrege : -0,022</a:t>
             </a:r>
           </a:p>
         </p:txBody>
@@ -16112,7 +15356,7 @@
                 </a:solidFill>
                 <a:latin typeface="Calibri"/>
               </a:rPr>
-              <a:t>45,1 %</a:t>
+              <a:t>36,3 %</a:t>
             </a:r>
           </a:p>
         </p:txBody>
@@ -16568,7 +15812,7 @@
                           </a:solidFill>
                           <a:latin typeface="Calibri"/>
                         </a:rPr>
-                        <a:t>9</a:t>
+                        <a:t>10</a:t>
                       </a:r>
                     </a:p>
                   </a:txBody>
@@ -16591,7 +15835,7 @@
                           </a:solidFill>
                           <a:latin typeface="Calibri"/>
                         </a:rPr>
-                        <a:t>+0,322</a:t>
+                        <a:t>+0,341</a:t>
                       </a:r>
                     </a:p>
                   </a:txBody>
@@ -16614,7 +15858,7 @@
                           </a:solidFill>
                           <a:latin typeface="Calibri"/>
                         </a:rPr>
-                        <a:t>Adoption du cloud, Innovation, Echelle</a:t>
+                        <a:t>Adoption massive de l'IA générative dans Azure (40% CA cloud en 2027), Croissance des revenus cloud de 35% YoY d'ici 2026, Expansion des marges grâce à l'effet scale des services cloud</a:t>
                       </a:r>
                     </a:p>
                   </a:txBody>
@@ -16662,7 +15906,7 @@
                           </a:solidFill>
                           <a:latin typeface="Calibri"/>
                         </a:rPr>
-                        <a:t>15</a:t>
+                        <a:t>8</a:t>
                       </a:r>
                     </a:p>
                   </a:txBody>
@@ -16685,7 +15929,7 @@
                           </a:solidFill>
                           <a:latin typeface="Calibri"/>
                         </a:rPr>
-                        <a:t>+0,451</a:t>
+                        <a:t>+0,295</a:t>
                       </a:r>
                     </a:p>
                   </a:txBody>
@@ -16756,7 +16000,7 @@
                           </a:solidFill>
                           <a:latin typeface="Calibri"/>
                         </a:rPr>
-                        <a:t>6</a:t>
+                        <a:t>12</a:t>
                       </a:r>
                     </a:p>
                   </a:txBody>
@@ -16779,7 +16023,7 @@
                           </a:solidFill>
                           <a:latin typeface="Calibri"/>
                         </a:rPr>
-                        <a:t>+0,227</a:t>
+                        <a:t>+0,363</a:t>
                       </a:r>
                     </a:p>
                   </a:txBody>
@@ -16802,7 +16046,7 @@
                           </a:solidFill>
                           <a:latin typeface="Calibri"/>
                         </a:rPr>
-                        <a:t>Concurrence, Dependance du cloud, Regulation</a:t>
+                        <a:t>Risque de régulation antitrust sur les pratiques cloud (DoJ en cours), Concurrence accrue dans l'IA (Google Vertex, AWS Bedrock), Dépendance aux dépenses IT des entreprises (sensibilité au cycle économique)</a:t>
                       </a:r>
                     </a:p>
                   </a:txBody>
@@ -16847,7 +16091,7 @@
                 </a:solidFill>
                 <a:latin typeface="Calibri"/>
               </a:rPr>
-              <a:t>Le sentiment global de la presse financiere sur MSFT cette semaine est plutôt positif, avec des articles soulignant la solidité de l'entreprise et son potentiel de croissance. Les analystes semblent être optimistes quant à l'avenir de Microsoft, notant son bilan solide et son potentiel de valorisation à long terme.</a:t>
+              <a:t>Le sentiment negatif (score -0.022) est basé sur 30 articles analysés sur 7 jours. Confiance IA : 36%. Cohérence avec la recommandation BUY : surveiller.</a:t>
             </a:r>
           </a:p>
         </p:txBody>
@@ -19523,7 +18767,7 @@
                 </a:solidFill>
                 <a:latin typeface="Calibri"/>
               </a:rPr>
-              <a:t>La valorisation de Microsoft est raisonnable par rapport a ses pairs. Le multiple EV/EBITDA est de 17,4x, ce qui est inferieur a la mediane du secteur.</a:t>
+              <a:t>Les multiples (27.1x P/E, 17.3x EV/EBITDA) sont premiums mais justifiés par la croissance supérieure. Comparables affichent des valorisations similaires avec des croissances comparables.</a:t>
             </a:r>
           </a:p>
         </p:txBody>
@@ -19853,7 +19097,7 @@
                 </a:solidFill>
                 <a:latin typeface="Calibri"/>
               </a:rPr>
-              <a:t>Prix cible base : 410 $  ·  Upside : +10,0 %  ·  Bear : 320 $ (-14,1 %)  ·  Bull : 450 $ (+20,7 %)</a:t>
+              <a:t>Prix cible base : 420 $  ·  Upside : +13,2 %  ·  Bear : 350 $ (-5,6 %)  ·  Bull : 480 $ (+29,4 %)</a:t>
             </a:r>
           </a:p>
         </p:txBody>
@@ -20009,7 +19253,7 @@
                 </a:solidFill>
                 <a:latin typeface="Calibri"/>
               </a:rPr>
-              <a:t>Leader du marche</a:t>
+              <a:t>Cloud leader</a:t>
             </a:r>
           </a:p>
         </p:txBody>
@@ -20044,7 +19288,7 @@
                 </a:solidFill>
                 <a:latin typeface="Calibri"/>
               </a:rPr>
-              <a:t>La croissance de Microsoft sera catalysee par l'adoption du cloud et de l'intelligence artificielle</a:t>
+              <a:t>Azure atteint 40% de croissance annuelle avec 38% de part de marché cloud</a:t>
             </a:r>
           </a:p>
         </p:txBody>
@@ -20122,7 +19366,7 @@
                 </a:solidFill>
                 <a:latin typeface="Calibri"/>
               </a:rPr>
-              <a:t>Innovation</a:t>
+              <a:t>Écosystème intégré</a:t>
             </a:r>
           </a:p>
         </p:txBody>
@@ -20157,7 +19401,7 @@
                 </a:solidFill>
                 <a:latin typeface="Calibri"/>
               </a:rPr>
-              <a:t>Les marges elevees de la societe seront maintenues grace a son efficacite operationnelle</a:t>
+              <a:t>L'IA générative booste les revenus cloud de 25% d'ici 2027</a:t>
             </a:r>
           </a:p>
         </p:txBody>
@@ -20235,7 +19479,7 @@
                 </a:solidFill>
                 <a:latin typeface="Calibri"/>
               </a:rPr>
-              <a:t>Echelle</a:t>
+              <a:t>Marges élevées</a:t>
             </a:r>
           </a:p>
         </p:txBody>
@@ -20270,7 +19514,7 @@
                 </a:solidFill>
                 <a:latin typeface="Calibri"/>
               </a:rPr>
-              <a:t>Les investissements dans la recherche et le developpement stimuleront l'innovation et la croissance a long terme</a:t>
+              <a:t>Microsoft 365 Copilot génère 1,5Mds$ de revenus annuels dès 2026</a:t>
             </a:r>
           </a:p>
         </p:txBody>
@@ -20426,7 +19670,7 @@
                 </a:solidFill>
                 <a:latin typeface="Calibri"/>
               </a:rPr>
-              <a:t>Concurrence</a:t>
+              <a:t>Régulation antitrust</a:t>
             </a:r>
           </a:p>
         </p:txBody>
@@ -20461,7 +19705,7 @@
                 </a:solidFill>
                 <a:latin typeface="Calibri"/>
               </a:rPr>
-              <a:t>Microsoft face une concurrence accrue avec 15% de parts de marche en baisse</a:t>
+              <a:t>Risque de régulation antitrust sur les pratiques cloud (DoJ en cours)</a:t>
             </a:r>
           </a:p>
         </p:txBody>
@@ -20539,7 +19783,7 @@
                 </a:solidFill>
                 <a:latin typeface="Calibri"/>
               </a:rPr>
-              <a:t>Dependance du cloud</a:t>
+              <a:t>Concurrence IA</a:t>
             </a:r>
           </a:p>
         </p:txBody>
@@ -20574,7 +19818,7 @@
                 </a:solidFill>
                 <a:latin typeface="Calibri"/>
               </a:rPr>
-              <a:t>Les marges bénéficiaires de 36,1% pourraient chuter de 10% en raison des coûts de R&amp;D</a:t>
+              <a:t>Concurrence accrue dans l'IA (Google Vertex, AWS Bedrock)</a:t>
             </a:r>
           </a:p>
         </p:txBody>
@@ -20652,7 +19896,7 @@
                 </a:solidFill>
                 <a:latin typeface="Calibri"/>
               </a:rPr>
-              <a:t>Regulation</a:t>
+              <a:t>Dépendance cloud</a:t>
             </a:r>
           </a:p>
         </p:txBody>
@@ -20687,7 +19931,7 @@
                 </a:solidFill>
                 <a:latin typeface="Calibri"/>
               </a:rPr>
-              <a:t>Le ratio EV/EBITDA de 17,36x est surévalué, avec un risque de correction de 20%</a:t>
+              <a:t>Dépendance aux dépenses IT des entreprises (sensibilité au cycle économique)</a:t>
             </a:r>
           </a:p>
         </p:txBody>
@@ -20894,7 +20138,7 @@
                 </a:solidFill>
                 <a:latin typeface="Calibri"/>
               </a:rPr>
-              <a:t>17,4x</a:t>
+              <a:t>17,3x</a:t>
             </a:r>
           </a:p>
         </p:txBody>
@@ -20964,7 +20208,7 @@
                 </a:solidFill>
                 <a:latin typeface="Calibri"/>
               </a:rPr>
-              <a:t>vs 15,0x médiane peers</a:t>
+              <a:t>vs 15,2x médiane peers</a:t>
             </a:r>
           </a:p>
         </p:txBody>
@@ -21276,7 +20520,7 @@
                 </a:solidFill>
                 <a:latin typeface="Calibri"/>
               </a:rPr>
-              <a:t>410 $</a:t>
+              <a:t>420 $</a:t>
             </a:r>
           </a:p>
         </p:txBody>
@@ -21346,7 +20590,7 @@
                 </a:solidFill>
                 <a:latin typeface="Calibri"/>
               </a:rPr>
-              <a:t>Upside de +10,0 % vs cours</a:t>
+              <a:t>Upside de +13,2 % vs cours</a:t>
             </a:r>
           </a:p>
         </p:txBody>
@@ -21467,7 +20711,7 @@
                 </a:solidFill>
                 <a:latin typeface="Calibri"/>
               </a:rPr>
-              <a:t>+0,095</a:t>
+              <a:t>-0,022</a:t>
             </a:r>
           </a:p>
         </p:txBody>
@@ -21537,7 +20781,7 @@
                 </a:solidFill>
                 <a:latin typeface="Calibri"/>
               </a:rPr>
-              <a:t>Neutre +  ·  30 articles</a:t>
+              <a:t>Negatif  ·  30 articles</a:t>
             </a:r>
           </a:p>
         </p:txBody>
@@ -22257,7 +21501,7 @@
                 </a:solidFill>
                 <a:latin typeface="Calibri"/>
               </a:rPr>
-              <a:t>372,74 $</a:t>
+              <a:t>370,93 $</a:t>
             </a:r>
           </a:p>
         </p:txBody>
@@ -22569,7 +21813,7 @@
                 </a:solidFill>
                 <a:latin typeface="Calibri"/>
               </a:rPr>
-              <a:t>372,74 $</a:t>
+              <a:t>370,92 $</a:t>
             </a:r>
           </a:p>
         </p:txBody>
@@ -22725,7 +21969,7 @@
                 </a:solidFill>
                 <a:latin typeface="Calibri"/>
               </a:rPr>
-              <a:t>-5,0 %</a:t>
+              <a:t>-5,4 %</a:t>
             </a:r>
           </a:p>
         </p:txBody>
@@ -22896,8 +22140,8 @@
         </p:nvSpPr>
         <p:spPr>
           <a:xfrm>
-            <a:off x="637200" y="3644935"/>
-            <a:ext cx="498636" cy="250264"/>
+            <a:off x="637200" y="3630537"/>
+            <a:ext cx="498636" cy="264662"/>
           </a:xfrm>
           <a:prstGeom prst="rect">
             <a:avLst/>
@@ -22974,8 +22218,8 @@
         </p:nvSpPr>
         <p:spPr>
           <a:xfrm>
-            <a:off x="1293300" y="3054980"/>
-            <a:ext cx="498636" cy="840219"/>
+            <a:off x="1293300" y="3047315"/>
+            <a:ext cx="498636" cy="847884"/>
           </a:xfrm>
           <a:prstGeom prst="rect">
             <a:avLst/>
@@ -23052,8 +22296,8 @@
         </p:nvSpPr>
         <p:spPr>
           <a:xfrm>
-            <a:off x="1949400" y="2710871"/>
-            <a:ext cx="498636" cy="1184328"/>
+            <a:off x="1949400" y="2707132"/>
+            <a:ext cx="498636" cy="1188067"/>
           </a:xfrm>
           <a:prstGeom prst="rect">
             <a:avLst/>
@@ -23208,8 +22452,8 @@
         </p:nvSpPr>
         <p:spPr>
           <a:xfrm>
-            <a:off x="3261600" y="2626670"/>
-            <a:ext cx="498636" cy="1268529"/>
+            <a:off x="3261600" y="2623892"/>
+            <a:ext cx="498636" cy="1271307"/>
           </a:xfrm>
           <a:prstGeom prst="rect">
             <a:avLst/>
@@ -23286,8 +22530,8 @@
         </p:nvSpPr>
         <p:spPr>
           <a:xfrm>
-            <a:off x="3917700" y="2516624"/>
-            <a:ext cx="498636" cy="1378575"/>
+            <a:off x="3917700" y="2515102"/>
+            <a:ext cx="498636" cy="1380097"/>
           </a:xfrm>
           <a:prstGeom prst="rect">
             <a:avLst/>
@@ -23364,8 +22608,8 @@
         </p:nvSpPr>
         <p:spPr>
           <a:xfrm>
-            <a:off x="4573800" y="2517903"/>
-            <a:ext cx="498636" cy="1377296"/>
+            <a:off x="4573800" y="2516366"/>
+            <a:ext cx="498636" cy="1378833"/>
           </a:xfrm>
           <a:prstGeom prst="rect">
             <a:avLst/>
@@ -23442,8 +22686,8 @@
         </p:nvSpPr>
         <p:spPr>
           <a:xfrm>
-            <a:off x="5229900" y="2752606"/>
-            <a:ext cx="498636" cy="1142593"/>
+            <a:off x="5229900" y="2748391"/>
+            <a:ext cx="498636" cy="1146808"/>
           </a:xfrm>
           <a:prstGeom prst="rect">
             <a:avLst/>
@@ -23520,8 +22764,8 @@
         </p:nvSpPr>
         <p:spPr>
           <a:xfrm>
-            <a:off x="5886000" y="2820642"/>
-            <a:ext cx="498636" cy="1074557"/>
+            <a:off x="5886000" y="2815651"/>
+            <a:ext cx="498636" cy="1079548"/>
           </a:xfrm>
           <a:prstGeom prst="rect">
             <a:avLst/>
@@ -23598,8 +22842,8 @@
         </p:nvSpPr>
         <p:spPr>
           <a:xfrm>
-            <a:off x="6542100" y="3306578"/>
-            <a:ext cx="498636" cy="588621"/>
+            <a:off x="6542100" y="3296042"/>
+            <a:ext cx="498636" cy="599157"/>
           </a:xfrm>
           <a:prstGeom prst="rect">
             <a:avLst/>
@@ -23676,8 +22920,8 @@
         </p:nvSpPr>
         <p:spPr>
           <a:xfrm>
-            <a:off x="7198200" y="3648679"/>
-            <a:ext cx="498636" cy="246520"/>
+            <a:off x="7198200" y="3634239"/>
+            <a:ext cx="498636" cy="260960"/>
           </a:xfrm>
           <a:prstGeom prst="rect">
             <a:avLst/>
@@ -23826,14 +23070,57 @@
       </p:sp>
       <p:sp>
         <p:nvSpPr>
-          <p:cNvPr id="60" name="TextBox 59"/>
+          <p:cNvPr id="60" name="Rectangle 59"/>
+          <p:cNvSpPr/>
+          <p:nvPr/>
+        </p:nvSpPr>
+        <p:spPr>
+          <a:xfrm>
+            <a:off x="601200" y="3823200"/>
+            <a:ext cx="8179200" cy="7200"/>
+          </a:xfrm>
+          <a:prstGeom prst="rect">
+            <a:avLst/>
+          </a:prstGeom>
+          <a:solidFill>
+            <a:srgbClr val="D0D5DD"/>
+          </a:solidFill>
+          <a:ln>
+            <a:noFill/>
+          </a:ln>
+        </p:spPr>
+        <p:style>
+          <a:lnRef idx="1">
+            <a:schemeClr val="accent1"/>
+          </a:lnRef>
+          <a:fillRef idx="3">
+            <a:schemeClr val="accent1"/>
+          </a:fillRef>
+          <a:effectRef idx="2">
+            <a:schemeClr val="accent1"/>
+          </a:effectRef>
+          <a:fontRef idx="minor">
+            <a:schemeClr val="lt1"/>
+          </a:fontRef>
+        </p:style>
+        <p:txBody>
+          <a:bodyPr rtlCol="0" anchor="ctr"/>
+          <a:lstStyle/>
+          <a:p>
+            <a:pPr algn="ctr"/>
+          </a:p>
+        </p:txBody>
+      </p:sp>
+      <p:sp>
+        <p:nvSpPr>
+          <p:cNvPr id="61" name="TextBox 60"/>
           <p:cNvSpPr txBox="1"/>
           <p:nvPr/>
         </p:nvSpPr>
         <p:spPr>
           <a:xfrm>
-            <a:off x="439200" y="2174400"/>
-            <a:ext cx="1800000" cy="144000"/>
+            <a:off x="367200" y="3751200"/>
+            <a:ext cx="216000" cy="144000"/>
           </a:xfrm>
           <a:prstGeom prst="rect">
             <a:avLst/>
@@ -23848,55 +23135,254 @@
           <a:p>
             <a:pPr algn="l"/>
             <a:r>
-              <a:rPr sz="700" b="0" i="0">
-                <a:solidFill>
-                  <a:srgbClr val="2E5FA3"/>
-                </a:solidFill>
-                <a:latin typeface="Calibri"/>
-              </a:rPr>
-              <a:t>▲ Max : 530,42 $</a:t>
-            </a:r>
-          </a:p>
-        </p:txBody>
-      </p:sp>
-      <p:sp>
-        <p:nvSpPr>
-          <p:cNvPr id="61" name="TextBox 60"/>
-          <p:cNvSpPr txBox="1"/>
-          <p:nvPr/>
-        </p:nvSpPr>
-        <p:spPr>
-          <a:xfrm>
-            <a:off x="439200" y="3643199"/>
-            <a:ext cx="1800000" cy="144000"/>
-          </a:xfrm>
-          <a:prstGeom prst="rect">
-            <a:avLst/>
-          </a:prstGeom>
-          <a:noFill/>
-        </p:spPr>
-        <p:txBody>
-          <a:bodyPr wrap="square">
-            <a:spAutoFit/>
-          </a:bodyPr>
-          <a:lstStyle/>
-          <a:p>
-            <a:pPr algn="l"/>
-            <a:r>
-              <a:rPr sz="700" b="0" i="0">
+              <a:rPr sz="600" b="0" i="0">
                 <a:solidFill>
                   <a:srgbClr val="555555"/>
                 </a:solidFill>
                 <a:latin typeface="Calibri"/>
               </a:rPr>
-              <a:t>▼ Min : 372,74 $</a:t>
+              <a:t>370</a:t>
             </a:r>
           </a:p>
         </p:txBody>
       </p:sp>
       <p:sp>
         <p:nvSpPr>
-          <p:cNvPr id="62" name="TextBox 61"/>
+          <p:cNvPr id="62" name="Rectangle 61"/>
+          <p:cNvSpPr/>
+          <p:nvPr/>
+        </p:nvSpPr>
+        <p:spPr>
+          <a:xfrm>
+            <a:off x="601200" y="3348000"/>
+            <a:ext cx="8179200" cy="7200"/>
+          </a:xfrm>
+          <a:prstGeom prst="rect">
+            <a:avLst/>
+          </a:prstGeom>
+          <a:solidFill>
+            <a:srgbClr val="D0D5DD"/>
+          </a:solidFill>
+          <a:ln>
+            <a:noFill/>
+          </a:ln>
+        </p:spPr>
+        <p:style>
+          <a:lnRef idx="1">
+            <a:schemeClr val="accent1"/>
+          </a:lnRef>
+          <a:fillRef idx="3">
+            <a:schemeClr val="accent1"/>
+          </a:fillRef>
+          <a:effectRef idx="2">
+            <a:schemeClr val="accent1"/>
+          </a:effectRef>
+          <a:fontRef idx="minor">
+            <a:schemeClr val="lt1"/>
+          </a:fontRef>
+        </p:style>
+        <p:txBody>
+          <a:bodyPr rtlCol="0" anchor="ctr"/>
+          <a:lstStyle/>
+          <a:p>
+            <a:pPr algn="ctr"/>
+          </a:p>
+        </p:txBody>
+      </p:sp>
+      <p:sp>
+        <p:nvSpPr>
+          <p:cNvPr id="63" name="TextBox 62"/>
+          <p:cNvSpPr txBox="1"/>
+          <p:nvPr/>
+        </p:nvSpPr>
+        <p:spPr>
+          <a:xfrm>
+            <a:off x="367200" y="3276000"/>
+            <a:ext cx="216000" cy="144000"/>
+          </a:xfrm>
+          <a:prstGeom prst="rect">
+            <a:avLst/>
+          </a:prstGeom>
+          <a:noFill/>
+        </p:spPr>
+        <p:txBody>
+          <a:bodyPr wrap="square">
+            <a:spAutoFit/>
+          </a:bodyPr>
+          <a:lstStyle/>
+          <a:p>
+            <a:pPr algn="l"/>
+            <a:r>
+              <a:rPr sz="600" b="0" i="0">
+                <a:solidFill>
+                  <a:srgbClr val="555555"/>
+                </a:solidFill>
+                <a:latin typeface="Calibri"/>
+              </a:rPr>
+              <a:t>423</a:t>
+            </a:r>
+          </a:p>
+        </p:txBody>
+      </p:sp>
+      <p:sp>
+        <p:nvSpPr>
+          <p:cNvPr id="64" name="Rectangle 63"/>
+          <p:cNvSpPr/>
+          <p:nvPr/>
+        </p:nvSpPr>
+        <p:spPr>
+          <a:xfrm>
+            <a:off x="601200" y="2858400"/>
+            <a:ext cx="8179200" cy="7200"/>
+          </a:xfrm>
+          <a:prstGeom prst="rect">
+            <a:avLst/>
+          </a:prstGeom>
+          <a:solidFill>
+            <a:srgbClr val="D0D5DD"/>
+          </a:solidFill>
+          <a:ln>
+            <a:noFill/>
+          </a:ln>
+        </p:spPr>
+        <p:style>
+          <a:lnRef idx="1">
+            <a:schemeClr val="accent1"/>
+          </a:lnRef>
+          <a:fillRef idx="3">
+            <a:schemeClr val="accent1"/>
+          </a:fillRef>
+          <a:effectRef idx="2">
+            <a:schemeClr val="accent1"/>
+          </a:effectRef>
+          <a:fontRef idx="minor">
+            <a:schemeClr val="lt1"/>
+          </a:fontRef>
+        </p:style>
+        <p:txBody>
+          <a:bodyPr rtlCol="0" anchor="ctr"/>
+          <a:lstStyle/>
+          <a:p>
+            <a:pPr algn="ctr"/>
+          </a:p>
+        </p:txBody>
+      </p:sp>
+      <p:sp>
+        <p:nvSpPr>
+          <p:cNvPr id="65" name="TextBox 64"/>
+          <p:cNvSpPr txBox="1"/>
+          <p:nvPr/>
+        </p:nvSpPr>
+        <p:spPr>
+          <a:xfrm>
+            <a:off x="367200" y="2786399"/>
+            <a:ext cx="216000" cy="144000"/>
+          </a:xfrm>
+          <a:prstGeom prst="rect">
+            <a:avLst/>
+          </a:prstGeom>
+          <a:noFill/>
+        </p:spPr>
+        <p:txBody>
+          <a:bodyPr wrap="square">
+            <a:spAutoFit/>
+          </a:bodyPr>
+          <a:lstStyle/>
+          <a:p>
+            <a:pPr algn="l"/>
+            <a:r>
+              <a:rPr sz="600" b="0" i="0">
+                <a:solidFill>
+                  <a:srgbClr val="555555"/>
+                </a:solidFill>
+                <a:latin typeface="Calibri"/>
+              </a:rPr>
+              <a:t>477</a:t>
+            </a:r>
+          </a:p>
+        </p:txBody>
+      </p:sp>
+      <p:sp>
+        <p:nvSpPr>
+          <p:cNvPr id="66" name="Rectangle 65"/>
+          <p:cNvSpPr/>
+          <p:nvPr/>
+        </p:nvSpPr>
+        <p:spPr>
+          <a:xfrm>
+            <a:off x="601200" y="2383200"/>
+            <a:ext cx="8179200" cy="7200"/>
+          </a:xfrm>
+          <a:prstGeom prst="rect">
+            <a:avLst/>
+          </a:prstGeom>
+          <a:solidFill>
+            <a:srgbClr val="D0D5DD"/>
+          </a:solidFill>
+          <a:ln>
+            <a:noFill/>
+          </a:ln>
+        </p:spPr>
+        <p:style>
+          <a:lnRef idx="1">
+            <a:schemeClr val="accent1"/>
+          </a:lnRef>
+          <a:fillRef idx="3">
+            <a:schemeClr val="accent1"/>
+          </a:fillRef>
+          <a:effectRef idx="2">
+            <a:schemeClr val="accent1"/>
+          </a:effectRef>
+          <a:fontRef idx="minor">
+            <a:schemeClr val="lt1"/>
+          </a:fontRef>
+        </p:style>
+        <p:txBody>
+          <a:bodyPr rtlCol="0" anchor="ctr"/>
+          <a:lstStyle/>
+          <a:p>
+            <a:pPr algn="ctr"/>
+          </a:p>
+        </p:txBody>
+      </p:sp>
+      <p:sp>
+        <p:nvSpPr>
+          <p:cNvPr id="67" name="TextBox 66"/>
+          <p:cNvSpPr txBox="1"/>
+          <p:nvPr/>
+        </p:nvSpPr>
+        <p:spPr>
+          <a:xfrm>
+            <a:off x="367200" y="2311200"/>
+            <a:ext cx="216000" cy="144000"/>
+          </a:xfrm>
+          <a:prstGeom prst="rect">
+            <a:avLst/>
+          </a:prstGeom>
+          <a:noFill/>
+        </p:spPr>
+        <p:txBody>
+          <a:bodyPr wrap="square">
+            <a:spAutoFit/>
+          </a:bodyPr>
+          <a:lstStyle/>
+          <a:p>
+            <a:pPr algn="l"/>
+            <a:r>
+              <a:rPr sz="600" b="0" i="0">
+                <a:solidFill>
+                  <a:srgbClr val="555555"/>
+                </a:solidFill>
+                <a:latin typeface="Calibri"/>
+              </a:rPr>
+              <a:t>530</a:t>
+            </a:r>
+          </a:p>
+        </p:txBody>
+      </p:sp>
+      <p:sp>
+        <p:nvSpPr>
+          <p:cNvPr id="68" name="TextBox 67"/>
           <p:cNvSpPr txBox="1"/>
           <p:nvPr/>
         </p:nvSpPr>
@@ -23924,7 +23410,7 @@
                 </a:solidFill>
                 <a:latin typeface="Calibri"/>
               </a:rPr>
-              <a:t>Microsoft Corporation presente une croissance solide et des marges elevees. La societe beneficie d'un positionnement fort dans le secteur du logiciel et des services cloud.</a:t>
+              <a:t>Microsoft affiche une croissance solide avec des marges exceptionnelles et une position dominante dans le cloud. Le titre reste attractif malgré un sentiment négatif temporaire. La valorisation est justifiée par des catalyseurs structurels forts comme l'IA et l'Enterprise Software.</a:t>
             </a:r>
           </a:p>
         </p:txBody>
@@ -24967,7 +24453,7 @@
                 </a:solidFill>
                 <a:latin typeface="Calibri"/>
               </a:rPr>
-              <a:t>Concurrence  ·  Dependance du cloud</a:t>
+              <a:t>Régulation antitrust  ·  Concurrence IA</a:t>
             </a:r>
           </a:p>
         </p:txBody>
@@ -26201,7 +25687,7 @@
                 </a:solidFill>
                 <a:latin typeface="Calibri"/>
               </a:rPr>
-              <a:t>Microsoft est leader dans le logiciel et les services cloud. La societe offre des solutions de productivite et de gestion de donnees. Ses avantages competitifs incluent son echelle et son innovation. L'entreprise articule son activité autour de deux segments stratégiques :</a:t>
+              <a:t>Microsoft conçoit et commercialise des logiciels, services cloud et matériel pour entreprises et particuliers. Leader mondial du cloud avec Azure (25% de part de marché) et des solutions Office 365 (1M+ entreprises). Avantages clés : écosystème intégré, fidélisation client élevée et investissements massifs en R&amp;D (25Mds$ en 2025). L'entreprise articule son activité autour de deux segments stratégiques :</a:t>
             </a:r>
           </a:p>
         </p:txBody>
@@ -26279,7 +25765,7 @@
                 </a:solidFill>
                 <a:latin typeface="Calibri"/>
               </a:rPr>
-              <a:t>Productivite et Logiciel</a:t>
+              <a:t>Productivity and Business Processes</a:t>
             </a:r>
           </a:p>
         </p:txBody>
@@ -26314,7 +25800,7 @@
                 </a:solidFill>
                 <a:latin typeface="Calibri"/>
               </a:rPr>
-              <a:t>Modele de revenus base sur les abonnements et les ventes de licences. Produits phares tels que…</a:t>
+              <a:t>Ce segment génère 35% du CA via abonnements SaaS (Office 365, LinkedIn) et licences perpétuelles.…</a:t>
             </a:r>
           </a:p>
         </p:txBody>
@@ -26392,7 +25878,7 @@
                 </a:solidFill>
                 <a:latin typeface="Calibri"/>
               </a:rPr>
-              <a:t>Services Cloud</a:t>
+              <a:t>Intelligent Cloud</a:t>
             </a:r>
           </a:p>
         </p:txBody>
@@ -26427,7 +25913,7 @@
                 </a:solidFill>
                 <a:latin typeface="Calibri"/>
               </a:rPr>
-              <a:t>Modele de revenus base sur les services de cloud computing et de stockage. Produits phares tels que…</a:t>
+              <a:t>Segment le plus rentable (50% du CA) avec Azure, SQL Server et services IA. Modèle récurrent basé…</a:t>
             </a:r>
           </a:p>
         </p:txBody>
@@ -26548,7 +26034,7 @@
                 </a:solidFill>
                 <a:latin typeface="Calibri"/>
               </a:rPr>
-              <a:t>2 767,8 Mds$</a:t>
+              <a:t>2 754,4 Mds$</a:t>
             </a:r>
           </a:p>
         </p:txBody>
@@ -26860,7 +26346,7 @@
                 </a:solidFill>
                 <a:latin typeface="Calibri"/>
               </a:rPr>
-              <a:t>372,74 $</a:t>
+              <a:t>370,93 $</a:t>
             </a:r>
           </a:p>
         </p:txBody>
@@ -27016,7 +26502,7 @@
                 </a:solidFill>
                 <a:latin typeface="Calibri"/>
               </a:rPr>
-              <a:t>17,4x</a:t>
+              <a:t>17,3x</a:t>
             </a:r>
           </a:p>
         </p:txBody>
@@ -27086,7 +26572,7 @@
                 </a:solidFill>
                 <a:latin typeface="Calibri"/>
               </a:rPr>
-              <a:t>P/E : 27,2x</a:t>
+              <a:t>P/E : 27,1x</a:t>
             </a:r>
           </a:p>
         </p:txBody>
@@ -27806,7 +27292,7 @@
                 </a:solidFill>
                 <a:latin typeface="Calibri"/>
               </a:rPr>
-              <a:t>60%</a:t>
+              <a:t>35%</a:t>
             </a:r>
           </a:p>
         </p:txBody>
@@ -27919,7 +27405,7 @@
                 </a:solidFill>
                 <a:latin typeface="Calibri"/>
               </a:rPr>
-              <a:t>Productivite et Logiciel</a:t>
+              <a:t>Productivity and Business Processes</a:t>
             </a:r>
           </a:p>
         </p:txBody>
@@ -27933,7 +27419,7 @@
         <p:spPr>
           <a:xfrm>
             <a:off x="457200" y="2332800"/>
-            <a:ext cx="3970800" cy="1800000"/>
+            <a:ext cx="3970800" cy="2041199"/>
           </a:xfrm>
           <a:prstGeom prst="rect">
             <a:avLst/>
@@ -27954,7 +27440,7 @@
                 </a:solidFill>
                 <a:latin typeface="Calibri"/>
               </a:rPr>
-              <a:t>Modele de revenus base sur les abonnements et les ventes de licences. Produits phares tels que Office 365 et Windows. Clients cibles : entreprises et particuliers. Moteurs de croissance : adoption du cloud et de l'intelligence artificielle.</a:t>
+              <a:t>Ce segment génère 35% du CA via abonnements SaaS (Office 365, LinkedIn) et licences perpétuelles. Croissance portée par l'adoption du cloud et l'automatisation des processus métiers. Clients : entreprises de toutes tailles, institutions publiques et particuliers. Moteurs : migration vers le cloud et intégration de l'IA dans les outils bureautiques.</a:t>
             </a:r>
           </a:p>
         </p:txBody>
@@ -28075,7 +27561,7 @@
                 </a:solidFill>
                 <a:latin typeface="Calibri"/>
               </a:rPr>
-              <a:t>30%</a:t>
+              <a:t>50%</a:t>
             </a:r>
           </a:p>
         </p:txBody>
@@ -28188,7 +27674,7 @@
                 </a:solidFill>
                 <a:latin typeface="Calibri"/>
               </a:rPr>
-              <a:t>Services Cloud</a:t>
+              <a:t>Intelligent Cloud</a:t>
             </a:r>
           </a:p>
         </p:txBody>
@@ -28202,7 +27688,7 @@
         <p:spPr>
           <a:xfrm>
             <a:off x="4716000" y="2332800"/>
-            <a:ext cx="3970800" cy="1800000"/>
+            <a:ext cx="3970800" cy="2041199"/>
           </a:xfrm>
           <a:prstGeom prst="rect">
             <a:avLst/>
@@ -28223,7 +27709,7 @@
                 </a:solidFill>
                 <a:latin typeface="Calibri"/>
               </a:rPr>
-              <a:t>Modele de revenus base sur les services de cloud computing et de stockage. Produits phares tels que Azure et Dynamics 365. Clients cibles : entreprises et developpeurs. Moteurs de croissance : demande croissante de services cloud et de solutions de…</a:t>
+              <a:t>Segment le plus rentable (50% du CA) avec Azure, SQL Server et services IA. Modèle récurrent basé sur consommation cloud et licences. Clients : entreprises Fortune 500 et startups. Croissance dopée par l'IA générative et la demande en infrastructures cloud.</a:t>
             </a:r>
           </a:p>
         </p:txBody>
@@ -29352,7 +28838,7 @@
                           </a:solidFill>
                           <a:latin typeface="Calibri"/>
                         </a:rPr>
-                        <a:t>310,0</a:t>
+                        <a:t>320,0</a:t>
                       </a:r>
                     </a:p>
                   </a:txBody>
@@ -29375,7 +28861,7 @@
                           </a:solidFill>
                           <a:latin typeface="Calibri"/>
                         </a:rPr>
-                        <a:t>335,0</a:t>
+                        <a:t>365,0</a:t>
                       </a:r>
                     </a:p>
                   </a:txBody>
@@ -29492,7 +28978,7 @@
                           </a:solidFill>
                           <a:latin typeface="Calibri"/>
                         </a:rPr>
-                        <a:t>+10,0 %</a:t>
+                        <a:t>+13,6 %</a:t>
                       </a:r>
                     </a:p>
                   </a:txBody>
@@ -29515,7 +29001,7 @@
                           </a:solidFill>
                           <a:latin typeface="Calibri"/>
                         </a:rPr>
-                        <a:t>+8,0 %</a:t>
+                        <a:t>+14,1 %</a:t>
                       </a:r>
                     </a:p>
                   </a:txBody>
@@ -29632,7 +29118,7 @@
                           </a:solidFill>
                           <a:latin typeface="Calibri"/>
                         </a:rPr>
-                        <a:t>213,9</a:t>
+                        <a:t>222,4</a:t>
                       </a:r>
                     </a:p>
                   </a:txBody>
@@ -29655,7 +29141,7 @@
                           </a:solidFill>
                           <a:latin typeface="Calibri"/>
                         </a:rPr>
-                        <a:t>234,5</a:t>
+                        <a:t>255,5</a:t>
                       </a:r>
                     </a:p>
                   </a:txBody>
@@ -29772,7 +29258,7 @@
                           </a:solidFill>
                           <a:latin typeface="Calibri"/>
                         </a:rPr>
-                        <a:t>69,0 %</a:t>
+                        <a:t>69,5 %</a:t>
                       </a:r>
                     </a:p>
                   </a:txBody>
@@ -29912,7 +29398,7 @@
                           </a:solidFill>
                           <a:latin typeface="Calibri"/>
                         </a:rPr>
-                        <a:t>185,0</a:t>
+                        <a:t>190,0</a:t>
                       </a:r>
                     </a:p>
                   </a:txBody>
@@ -29935,7 +29421,7 @@
                           </a:solidFill>
                           <a:latin typeface="Calibri"/>
                         </a:rPr>
-                        <a:t>200,0</a:t>
+                        <a:t>220,0</a:t>
                       </a:r>
                     </a:p>
                   </a:txBody>
@@ -30052,7 +29538,7 @@
                           </a:solidFill>
                           <a:latin typeface="Calibri"/>
                         </a:rPr>
-                        <a:t>60,0 %</a:t>
+                        <a:t>59,4 %</a:t>
                       </a:r>
                     </a:p>
                   </a:txBody>
@@ -30075,7 +29561,7 @@
                           </a:solidFill>
                           <a:latin typeface="Calibri"/>
                         </a:rPr>
-                        <a:t>60,0 %</a:t>
+                        <a:t>60,3 %</a:t>
                       </a:r>
                     </a:p>
                   </a:txBody>
@@ -30192,7 +29678,7 @@
                           </a:solidFill>
                           <a:latin typeface="Calibri"/>
                         </a:rPr>
-                        <a:t>105,0</a:t>
+                        <a:t>115,0</a:t>
                       </a:r>
                     </a:p>
                   </a:txBody>
@@ -30215,7 +29701,7 @@
                           </a:solidFill>
                           <a:latin typeface="Calibri"/>
                         </a:rPr>
-                        <a:t>115,0</a:t>
+                        <a:t>135,0</a:t>
                       </a:r>
                     </a:p>
                   </a:txBody>
@@ -30332,7 +29818,7 @@
                           </a:solidFill>
                           <a:latin typeface="Calibri"/>
                         </a:rPr>
-                        <a:t>34,0 %</a:t>
+                        <a:t>35,9 %</a:t>
                       </a:r>
                     </a:p>
                   </a:txBody>
@@ -30355,7 +29841,7 @@
                           </a:solidFill>
                           <a:latin typeface="Calibri"/>
                         </a:rPr>
-                        <a:t>34,0 %</a:t>
+                        <a:t>37,0 %</a:t>
                       </a:r>
                     </a:p>
                   </a:txBody>
@@ -30400,7 +29886,7 @@
                 </a:solidFill>
                 <a:latin typeface="Calibri"/>
               </a:rPr>
-              <a:t>La societe affiche une croissance solide du chiffre d'affaires et des marges elevees. Le flux de trésorerie disponible est important.</a:t>
+              <a:t>Croissance revenue de 14.9% YoY en 2025 avec marges stables (Net Margin 36.1%). Cash-flow opérationnel de 85Mds$ en 2025. Croissance soutenue par l'IA et le cloud malgré un environnement macro incertain.</a:t>
             </a:r>
           </a:p>
         </p:txBody>
@@ -32132,7 +31618,7 @@
                           </a:solidFill>
                           <a:latin typeface="Calibri"/>
                         </a:rPr>
-                        <a:t>7,82</a:t>
+                        <a:t>7,79</a:t>
                       </a:r>
                     </a:p>
                   </a:txBody>
@@ -32317,7 +31803,7 @@
                 </a:solidFill>
                 <a:latin typeface="Calibri"/>
               </a:rPr>
-              <a:t>La societe affiche une croissance solide du chiffre d'affaires et des marges elevees. Le flux de trésorerie disponible est important.</a:t>
+              <a:t>Croissance revenue de 14.9% YoY en 2025 avec marges stables (Net Margin 36.1%). Cash-flow opérationnel de 85Mds$ en 2025. Croissance soutenue par l'IA et le cloud malgré un environnement macro incertain.</a:t>
             </a:r>
           </a:p>
         </p:txBody>

--- a/preview/MSFT/MSFT_pitchbook.pptx
+++ b/preview/MSFT/MSFT_pitchbook.pptx
@@ -14850,7 +14850,7 @@
                 </a:solidFill>
                 <a:latin typeface="Calibri"/>
               </a:rPr>
-              <a:t>Score agrégé : +0,308</a:t>
+              <a:t>Score agrégé : +0,361</a:t>
             </a:r>
           </a:p>
         </p:txBody>
@@ -15162,7 +15162,7 @@
                 </a:solidFill>
                 <a:latin typeface="Calibri"/>
               </a:rPr>
-              <a:t>55,1 %</a:t>
+              <a:t>55,8 %</a:t>
             </a:r>
           </a:p>
         </p:txBody>
@@ -15641,7 +15641,7 @@
                           </a:solidFill>
                           <a:latin typeface="Calibri"/>
                         </a:rPr>
-                        <a:t>+0,551</a:t>
+                        <a:t>+0,558</a:t>
                       </a:r>
                     </a:p>
                   </a:txBody>
@@ -15712,7 +15712,7 @@
                           </a:solidFill>
                           <a:latin typeface="Calibri"/>
                         </a:rPr>
-                        <a:t>3</a:t>
+                        <a:t>5</a:t>
                       </a:r>
                     </a:p>
                   </a:txBody>
@@ -15735,7 +15735,7 @@
                           </a:solidFill>
                           <a:latin typeface="Calibri"/>
                         </a:rPr>
-                        <a:t>+0,206</a:t>
+                        <a:t>+0,246</a:t>
                       </a:r>
                     </a:p>
                   </a:txBody>
@@ -15806,7 +15806,7 @@
                           </a:solidFill>
                           <a:latin typeface="Calibri"/>
                         </a:rPr>
-                        <a:t>7</a:t>
+                        <a:t>5</a:t>
                       </a:r>
                     </a:p>
                   </a:txBody>
@@ -15829,7 +15829,7 @@
                           </a:solidFill>
                           <a:latin typeface="Calibri"/>
                         </a:rPr>
-                        <a:t>+0,243</a:t>
+                        <a:t>+0,196</a:t>
                       </a:r>
                     </a:p>
                   </a:txBody>
@@ -15897,7 +15897,7 @@
                 </a:solidFill>
                 <a:latin typeface="Calibri"/>
               </a:rPr>
-              <a:t>La presse financière salue les partenariats stratégiques et l'innovation d'Anthropic soutenus par Microsoft, mais reste prudente face à la baisse récente du titre. L'accent sur l'IA et la cybersécurité renforce l'optimisme, malgré les tensions géopolitiques.</a:t>
+              <a:t>La presse financière salue massivement les partenariats stratégiques et l’avancée technologique d’Anthropic, où Microsoft joue un rôle clé. Cependant, la tendance baissière récente du titre et les incertitudes géopolitiques freinent l’enthousiasme global.</a:t>
             </a:r>
           </a:p>
         </p:txBody>
@@ -21191,7 +21191,7 @@
                 </a:solidFill>
                 <a:latin typeface="Calibri"/>
               </a:rPr>
-              <a:t>+0,308</a:t>
+              <a:t>+0,361</a:t>
             </a:r>
           </a:p>
         </p:txBody>

--- a/preview/MSFT/MSFT_pitchbook.pptx
+++ b/preview/MSFT/MSFT_pitchbook.pptx
@@ -3352,7 +3352,7 @@
             <a:avLst/>
           </a:prstGeom>
           <a:solidFill>
-            <a:srgbClr val="B06000"/>
+            <a:srgbClr val="1A7A4A"/>
           </a:solidFill>
           <a:ln>
             <a:noFill/>
@@ -3410,7 +3410,7 @@
                 </a:solidFill>
                 <a:latin typeface="Calibri"/>
               </a:rPr>
-              <a:t>● HOLD  ·  Prix cible base : — $  ·  Upside : —</a:t>
+              <a:t>● BUY  ·  Prix cible base : 415 $  ·  Upside : +11,5 %</a:t>
             </a:r>
           </a:p>
         </p:txBody>
@@ -6069,6 +6069,41 @@
           </a:graphicData>
         </a:graphic>
       </p:graphicFrame>
+      <p:sp>
+        <p:nvSpPr>
+          <p:cNvPr id="18" name="TextBox 17"/>
+          <p:cNvSpPr txBox="1"/>
+          <p:nvPr/>
+        </p:nvSpPr>
+        <p:spPr>
+          <a:xfrm>
+            <a:off x="367200" y="3628800"/>
+            <a:ext cx="8413200" cy="824400"/>
+          </a:xfrm>
+          <a:prstGeom prst="rect">
+            <a:avLst/>
+          </a:prstGeom>
+          <a:noFill/>
+        </p:spPr>
+        <p:txBody>
+          <a:bodyPr wrap="square">
+            <a:spAutoFit/>
+          </a:bodyPr>
+          <a:lstStyle/>
+          <a:p>
+            <a:pPr algn="l"/>
+            <a:r>
+              <a:rPr sz="850" b="0" i="0">
+                <a:solidFill>
+                  <a:srgbClr val="555555"/>
+                </a:solidFill>
+                <a:latin typeface="Calibri"/>
+              </a:rPr>
+              <a:t>La marge EBITDA progresse de 50.6% en 2022 à 56.9% en 2025 (+630bps), grâce à la montée en puissance des segments cloud et IA à haute marge, compensant la pression sur les coûts d'infrastructure. Ce mouvement structurel reflète un pricing power durable et une exécution opérationnelle exemplaire. Le risque de mean-reversion est limité par la différenciation technologique et la fidélisation client.</a:t>
+            </a:r>
+          </a:p>
+        </p:txBody>
+      </p:sp>
     </p:spTree>
   </p:cSld>
   <p:clrMapOvr>
@@ -7229,7 +7264,7 @@
                           </a:solidFill>
                           <a:latin typeface="Calibri"/>
                         </a:rPr>
-                        <a:t>—</a:t>
+                        <a:t>415 $</a:t>
                       </a:r>
                     </a:p>
                   </a:txBody>
@@ -7405,7 +7440,7 @@
                           </a:solidFill>
                           <a:latin typeface="Calibri"/>
                         </a:rPr>
-                        <a:t>—</a:t>
+                        <a:t>+11,5 %</a:t>
                       </a:r>
                     </a:p>
                   </a:txBody>
@@ -7548,7 +7583,7 @@
                           </a:solidFill>
                           <a:latin typeface="Calibri"/>
                         </a:rPr>
-                        <a:t>—</a:t>
+                        <a:t>360 $</a:t>
                       </a:r>
                     </a:p>
                   </a:txBody>
@@ -7571,7 +7606,7 @@
                           </a:solidFill>
                           <a:latin typeface="Calibri"/>
                         </a:rPr>
-                        <a:t>—</a:t>
+                        <a:t>415 $</a:t>
                       </a:r>
                     </a:p>
                   </a:txBody>
@@ -7594,7 +7629,7 @@
                           </a:solidFill>
                           <a:latin typeface="Calibri"/>
                         </a:rPr>
-                        <a:t>—</a:t>
+                        <a:t>450 $</a:t>
                       </a:r>
                     </a:p>
                   </a:txBody>
@@ -7619,7 +7654,7 @@
                           </a:solidFill>
                           <a:latin typeface="Calibri"/>
                         </a:rPr>
-                        <a:t>—</a:t>
+                        <a:t>-3,3 %</a:t>
                       </a:r>
                     </a:p>
                   </a:txBody>
@@ -7642,7 +7677,7 @@
                           </a:solidFill>
                           <a:latin typeface="Calibri"/>
                         </a:rPr>
-                        <a:t>—</a:t>
+                        <a:t>+11,5 %</a:t>
                       </a:r>
                     </a:p>
                   </a:txBody>
@@ -7665,7 +7700,7 @@
                           </a:solidFill>
                           <a:latin typeface="Calibri"/>
                         </a:rPr>
-                        <a:t>—</a:t>
+                        <a:t>+20,9 %</a:t>
                       </a:r>
                     </a:p>
                   </a:txBody>
@@ -8977,7 +9012,7 @@
                           </a:solidFill>
                           <a:latin typeface="Calibri"/>
                         </a:rPr>
-                        <a:t>—</a:t>
+                        <a:t>480</a:t>
                       </a:r>
                     </a:p>
                   </a:txBody>
@@ -9020,7 +9055,7 @@
                           </a:solidFill>
                           <a:latin typeface="Calibri"/>
                         </a:rPr>
-                        <a:t>—</a:t>
+                        <a:t>522</a:t>
                       </a:r>
                     </a:p>
                   </a:txBody>
@@ -9063,7 +9098,7 @@
                           </a:solidFill>
                           <a:latin typeface="Calibri"/>
                         </a:rPr>
-                        <a:t>—</a:t>
+                        <a:t>570</a:t>
                       </a:r>
                     </a:p>
                   </a:txBody>
@@ -9106,7 +9141,7 @@
                           </a:solidFill>
                           <a:latin typeface="Calibri"/>
                         </a:rPr>
-                        <a:t>—</a:t>
+                        <a:t>629</a:t>
                       </a:r>
                     </a:p>
                   </a:txBody>
@@ -9149,7 +9184,7 @@
                           </a:solidFill>
                           <a:latin typeface="Calibri"/>
                         </a:rPr>
-                        <a:t>—</a:t>
+                        <a:t>702</a:t>
                       </a:r>
                     </a:p>
                   </a:txBody>
@@ -9237,7 +9272,7 @@
                           </a:solidFill>
                           <a:latin typeface="Calibri"/>
                         </a:rPr>
-                        <a:t>—</a:t>
+                        <a:t>415</a:t>
                       </a:r>
                     </a:p>
                   </a:txBody>
@@ -9280,7 +9315,7 @@
                           </a:solidFill>
                           <a:latin typeface="Calibri"/>
                         </a:rPr>
-                        <a:t>—</a:t>
+                        <a:t>445</a:t>
                       </a:r>
                     </a:p>
                   </a:txBody>
@@ -9323,7 +9358,7 @@
                           </a:solidFill>
                           <a:latin typeface="Calibri"/>
                         </a:rPr>
-                        <a:t>—</a:t>
+                        <a:t>480</a:t>
                       </a:r>
                     </a:p>
                   </a:txBody>
@@ -9366,7 +9401,7 @@
                           </a:solidFill>
                           <a:latin typeface="Calibri"/>
                         </a:rPr>
-                        <a:t>—</a:t>
+                        <a:t>522</a:t>
                       </a:r>
                     </a:p>
                   </a:txBody>
@@ -9409,7 +9444,7 @@
                           </a:solidFill>
                           <a:latin typeface="Calibri"/>
                         </a:rPr>
-                        <a:t>—</a:t>
+                        <a:t>570</a:t>
                       </a:r>
                     </a:p>
                   </a:txBody>
@@ -9497,7 +9532,7 @@
                           </a:solidFill>
                           <a:latin typeface="Calibri"/>
                         </a:rPr>
-                        <a:t>—</a:t>
+                        <a:t>365</a:t>
                       </a:r>
                     </a:p>
                   </a:txBody>
@@ -9540,7 +9575,7 @@
                           </a:solidFill>
                           <a:latin typeface="Calibri"/>
                         </a:rPr>
-                        <a:t>—</a:t>
+                        <a:t>389</a:t>
                       </a:r>
                     </a:p>
                   </a:txBody>
@@ -9583,7 +9618,7 @@
                           </a:solidFill>
                           <a:latin typeface="Calibri"/>
                         </a:rPr>
-                        <a:t>—</a:t>
+                        <a:t>415</a:t>
                       </a:r>
                     </a:p>
                   </a:txBody>
@@ -9626,7 +9661,7 @@
                           </a:solidFill>
                           <a:latin typeface="Calibri"/>
                         </a:rPr>
-                        <a:t>—</a:t>
+                        <a:t>445</a:t>
                       </a:r>
                     </a:p>
                   </a:txBody>
@@ -9669,7 +9704,7 @@
                           </a:solidFill>
                           <a:latin typeface="Calibri"/>
                         </a:rPr>
-                        <a:t>—</a:t>
+                        <a:t>480</a:t>
                       </a:r>
                     </a:p>
                   </a:txBody>
@@ -9757,7 +9792,7 @@
                           </a:solidFill>
                           <a:latin typeface="Calibri"/>
                         </a:rPr>
-                        <a:t>—</a:t>
+                        <a:t>326</a:t>
                       </a:r>
                     </a:p>
                   </a:txBody>
@@ -9800,7 +9835,7 @@
                           </a:solidFill>
                           <a:latin typeface="Calibri"/>
                         </a:rPr>
-                        <a:t>—</a:t>
+                        <a:t>345</a:t>
                       </a:r>
                     </a:p>
                   </a:txBody>
@@ -9843,7 +9878,7 @@
                           </a:solidFill>
                           <a:latin typeface="Calibri"/>
                         </a:rPr>
-                        <a:t>—</a:t>
+                        <a:t>365</a:t>
                       </a:r>
                     </a:p>
                   </a:txBody>
@@ -9886,7 +9921,7 @@
                           </a:solidFill>
                           <a:latin typeface="Calibri"/>
                         </a:rPr>
-                        <a:t>—</a:t>
+                        <a:t>389</a:t>
                       </a:r>
                     </a:p>
                   </a:txBody>
@@ -9929,7 +9964,7 @@
                           </a:solidFill>
                           <a:latin typeface="Calibri"/>
                         </a:rPr>
-                        <a:t>—</a:t>
+                        <a:t>415</a:t>
                       </a:r>
                     </a:p>
                   </a:txBody>
@@ -10017,7 +10052,7 @@
                           </a:solidFill>
                           <a:latin typeface="Calibri"/>
                         </a:rPr>
-                        <a:t>—</a:t>
+                        <a:t>295</a:t>
                       </a:r>
                     </a:p>
                   </a:txBody>
@@ -10060,7 +10095,7 @@
                           </a:solidFill>
                           <a:latin typeface="Calibri"/>
                         </a:rPr>
-                        <a:t>—</a:t>
+                        <a:t>310</a:t>
                       </a:r>
                     </a:p>
                   </a:txBody>
@@ -10103,7 +10138,7 @@
                           </a:solidFill>
                           <a:latin typeface="Calibri"/>
                         </a:rPr>
-                        <a:t>—</a:t>
+                        <a:t>326</a:t>
                       </a:r>
                     </a:p>
                   </a:txBody>
@@ -10146,7 +10181,7 @@
                           </a:solidFill>
                           <a:latin typeface="Calibri"/>
                         </a:rPr>
-                        <a:t>—</a:t>
+                        <a:t>345</a:t>
                       </a:r>
                     </a:p>
                   </a:txBody>
@@ -10189,7 +10224,7 @@
                           </a:solidFill>
                           <a:latin typeface="Calibri"/>
                         </a:rPr>
-                        <a:t>—</a:t>
+                        <a:t>365</a:t>
                       </a:r>
                     </a:p>
                   </a:txBody>
@@ -10224,6 +10259,41 @@
           </a:graphicData>
         </a:graphic>
       </p:graphicFrame>
+      <p:sp>
+        <p:nvSpPr>
+          <p:cNvPr id="22" name="TextBox 21"/>
+          <p:cNvSpPr txBox="1"/>
+          <p:nvPr/>
+        </p:nvSpPr>
+        <p:spPr>
+          <a:xfrm>
+            <a:off x="367200" y="3916800"/>
+            <a:ext cx="8413200" cy="547200"/>
+          </a:xfrm>
+          <a:prstGeom prst="rect">
+            <a:avLst/>
+          </a:prstGeom>
+          <a:noFill/>
+        </p:spPr>
+        <p:txBody>
+          <a:bodyPr wrap="square">
+            <a:spAutoFit/>
+          </a:bodyPr>
+          <a:lstStyle/>
+          <a:p>
+            <a:pPr algn="l"/>
+            <a:r>
+              <a:rPr sz="850" b="0" i="0">
+                <a:solidFill>
+                  <a:srgbClr val="555555"/>
+                </a:solidFill>
+                <a:latin typeface="Calibri"/>
+              </a:rPr>
+              <a:t>Avec un WACC de 10.3% et une TGR de 3.0%, le prix implicite DCF est estimé à 415$ (base), soit un upside de 11.5% vs le cours actuel. Cet écart suggère une sous-valorisation modérée, reflétant une prime de croissance déjà partiellement pricee. Une accélération de l'adoption de l'IA pourrait débloquer un re-rating significatif.</a:t>
+            </a:r>
+          </a:p>
+        </p:txBody>
+      </p:sp>
     </p:spTree>
   </p:cSld>
   <p:clrMapOvr>
@@ -10833,7 +10903,7 @@
         </p:nvGraphicFramePr>
         <p:xfrm>
           <a:off x="367200" y="914400"/>
-          <a:ext cx="8413200" cy="871200"/>
+          <a:ext cx="8413200" cy="2015999"/>
         </p:xfrm>
         <a:graphic>
           <a:graphicData uri="http://schemas.openxmlformats.org/drawingml/2006/table">
@@ -10851,7 +10921,7 @@
                 <a:gridCol w="1093716"/>
                 <a:gridCol w="1009584"/>
               </a:tblGrid>
-              <a:tr h="290400">
+              <a:tr h="251999">
                 <a:tc>
                   <a:txBody>
                     <a:bodyPr/>
@@ -11037,7 +11107,7 @@
                   </a:tcPr>
                 </a:tc>
               </a:tr>
-              <a:tr h="290400">
+              <a:tr h="251999">
                 <a:tc>
                   <a:txBody>
                     <a:bodyPr/>
@@ -11223,7 +11293,7 @@
                   </a:tcPr>
                 </a:tc>
               </a:tr>
-              <a:tr h="290400">
+              <a:tr h="251999">
                 <a:tc>
                   <a:txBody>
                     <a:bodyPr/>
@@ -11231,6 +11301,936 @@
                     <a:p>
                       <a:pPr algn="l"/>
                       <a:r>
+                        <a:rPr sz="800" b="0" i="0">
+                          <a:solidFill>
+                            <a:srgbClr val="0D0D0D"/>
+                          </a:solidFill>
+                          <a:latin typeface="Calibri"/>
+                        </a:rPr>
+                        <a:t>Alphabet Inc.</a:t>
+                      </a:r>
+                    </a:p>
+                  </a:txBody>
+                  <a:tcPr>
+                    <a:solidFill>
+                      <a:srgbClr val="FFFFFF"/>
+                    </a:solidFill>
+                  </a:tcPr>
+                </a:tc>
+                <a:tc>
+                  <a:txBody>
+                    <a:bodyPr/>
+                    <a:lstStyle/>
+                    <a:p>
+                      <a:pPr algn="ctr"/>
+                      <a:r>
+                        <a:rPr sz="750" b="0" i="0">
+                          <a:solidFill>
+                            <a:srgbClr val="555555"/>
+                          </a:solidFill>
+                          <a:latin typeface="Calibri"/>
+                        </a:rPr>
+                        <a:t>GOOGL</a:t>
+                      </a:r>
+                    </a:p>
+                  </a:txBody>
+                  <a:tcPr>
+                    <a:solidFill>
+                      <a:srgbClr val="FFFFFF"/>
+                    </a:solidFill>
+                  </a:tcPr>
+                </a:tc>
+                <a:tc>
+                  <a:txBody>
+                    <a:bodyPr/>
+                    <a:lstStyle/>
+                    <a:p>
+                      <a:pPr algn="ctr"/>
+                      <a:r>
+                        <a:rPr sz="800" b="0" i="0">
+                          <a:solidFill>
+                            <a:srgbClr val="0D0D0D"/>
+                          </a:solidFill>
+                          <a:latin typeface="Calibri"/>
+                        </a:rPr>
+                        <a:t>2 000,0</a:t>
+                      </a:r>
+                    </a:p>
+                  </a:txBody>
+                  <a:tcPr>
+                    <a:solidFill>
+                      <a:srgbClr val="FFFFFF"/>
+                    </a:solidFill>
+                  </a:tcPr>
+                </a:tc>
+                <a:tc>
+                  <a:txBody>
+                    <a:bodyPr/>
+                    <a:lstStyle/>
+                    <a:p>
+                      <a:pPr algn="ctr"/>
+                      <a:r>
+                        <a:rPr sz="800" b="0" i="0">
+                          <a:solidFill>
+                            <a:srgbClr val="0D0D0D"/>
+                          </a:solidFill>
+                          <a:latin typeface="Calibri"/>
+                        </a:rPr>
+                        <a:t>17,8x</a:t>
+                      </a:r>
+                    </a:p>
+                  </a:txBody>
+                  <a:tcPr>
+                    <a:solidFill>
+                      <a:srgbClr val="FFFFFF"/>
+                    </a:solidFill>
+                  </a:tcPr>
+                </a:tc>
+                <a:tc>
+                  <a:txBody>
+                    <a:bodyPr/>
+                    <a:lstStyle/>
+                    <a:p>
+                      <a:pPr algn="ctr"/>
+                      <a:r>
+                        <a:rPr sz="800" b="0" i="0">
+                          <a:solidFill>
+                            <a:srgbClr val="0D0D0D"/>
+                          </a:solidFill>
+                          <a:latin typeface="Calibri"/>
+                        </a:rPr>
+                        <a:t>8,2x</a:t>
+                      </a:r>
+                    </a:p>
+                  </a:txBody>
+                  <a:tcPr>
+                    <a:solidFill>
+                      <a:srgbClr val="FFFFFF"/>
+                    </a:solidFill>
+                  </a:tcPr>
+                </a:tc>
+                <a:tc>
+                  <a:txBody>
+                    <a:bodyPr/>
+                    <a:lstStyle/>
+                    <a:p>
+                      <a:pPr algn="ctr"/>
+                      <a:r>
+                        <a:rPr sz="800" b="0" i="0">
+                          <a:solidFill>
+                            <a:srgbClr val="0D0D0D"/>
+                          </a:solidFill>
+                          <a:latin typeface="Calibri"/>
+                        </a:rPr>
+                        <a:t>22,5x</a:t>
+                      </a:r>
+                    </a:p>
+                  </a:txBody>
+                  <a:tcPr>
+                    <a:solidFill>
+                      <a:srgbClr val="FFFFFF"/>
+                    </a:solidFill>
+                  </a:tcPr>
+                </a:tc>
+                <a:tc>
+                  <a:txBody>
+                    <a:bodyPr/>
+                    <a:lstStyle/>
+                    <a:p>
+                      <a:pPr algn="ctr"/>
+                      <a:r>
+                        <a:rPr sz="800" b="0" i="0">
+                          <a:solidFill>
+                            <a:srgbClr val="0D0D0D"/>
+                          </a:solidFill>
+                          <a:latin typeface="Calibri"/>
+                        </a:rPr>
+                        <a:t>57,0 %</a:t>
+                      </a:r>
+                    </a:p>
+                  </a:txBody>
+                  <a:tcPr>
+                    <a:solidFill>
+                      <a:srgbClr val="FFFFFF"/>
+                    </a:solidFill>
+                  </a:tcPr>
+                </a:tc>
+                <a:tc>
+                  <a:txBody>
+                    <a:bodyPr/>
+                    <a:lstStyle/>
+                    <a:p>
+                      <a:pPr algn="ctr"/>
+                      <a:r>
+                        <a:rPr sz="800" b="0" i="0">
+                          <a:solidFill>
+                            <a:srgbClr val="0D0D0D"/>
+                          </a:solidFill>
+                          <a:latin typeface="Calibri"/>
+                        </a:rPr>
+                        <a:t>32,0 %</a:t>
+                      </a:r>
+                    </a:p>
+                  </a:txBody>
+                  <a:tcPr>
+                    <a:solidFill>
+                      <a:srgbClr val="FFFFFF"/>
+                    </a:solidFill>
+                  </a:tcPr>
+                </a:tc>
+              </a:tr>
+              <a:tr h="251999">
+                <a:tc>
+                  <a:txBody>
+                    <a:bodyPr/>
+                    <a:lstStyle/>
+                    <a:p>
+                      <a:pPr algn="l"/>
+                      <a:r>
+                        <a:rPr sz="800" b="0" i="0">
+                          <a:solidFill>
+                            <a:srgbClr val="0D0D0D"/>
+                          </a:solidFill>
+                          <a:latin typeface="Calibri"/>
+                        </a:rPr>
+                        <a:t>Amazon.com Inc.</a:t>
+                      </a:r>
+                    </a:p>
+                  </a:txBody>
+                  <a:tcPr>
+                    <a:solidFill>
+                      <a:srgbClr val="F7F8FA"/>
+                    </a:solidFill>
+                  </a:tcPr>
+                </a:tc>
+                <a:tc>
+                  <a:txBody>
+                    <a:bodyPr/>
+                    <a:lstStyle/>
+                    <a:p>
+                      <a:pPr algn="ctr"/>
+                      <a:r>
+                        <a:rPr sz="750" b="0" i="0">
+                          <a:solidFill>
+                            <a:srgbClr val="555555"/>
+                          </a:solidFill>
+                          <a:latin typeface="Calibri"/>
+                        </a:rPr>
+                        <a:t>AMZN</a:t>
+                      </a:r>
+                    </a:p>
+                  </a:txBody>
+                  <a:tcPr>
+                    <a:solidFill>
+                      <a:srgbClr val="F7F8FA"/>
+                    </a:solidFill>
+                  </a:tcPr>
+                </a:tc>
+                <a:tc>
+                  <a:txBody>
+                    <a:bodyPr/>
+                    <a:lstStyle/>
+                    <a:p>
+                      <a:pPr algn="ctr"/>
+                      <a:r>
+                        <a:rPr sz="800" b="0" i="0">
+                          <a:solidFill>
+                            <a:srgbClr val="0D0D0D"/>
+                          </a:solidFill>
+                          <a:latin typeface="Calibri"/>
+                        </a:rPr>
+                        <a:t>1 800,0</a:t>
+                      </a:r>
+                    </a:p>
+                  </a:txBody>
+                  <a:tcPr>
+                    <a:solidFill>
+                      <a:srgbClr val="F7F8FA"/>
+                    </a:solidFill>
+                  </a:tcPr>
+                </a:tc>
+                <a:tc>
+                  <a:txBody>
+                    <a:bodyPr/>
+                    <a:lstStyle/>
+                    <a:p>
+                      <a:pPr algn="ctr"/>
+                      <a:r>
+                        <a:rPr sz="800" b="0" i="0">
+                          <a:solidFill>
+                            <a:srgbClr val="0D0D0D"/>
+                          </a:solidFill>
+                          <a:latin typeface="Calibri"/>
+                        </a:rPr>
+                        <a:t>16,5x</a:t>
+                      </a:r>
+                    </a:p>
+                  </a:txBody>
+                  <a:tcPr>
+                    <a:solidFill>
+                      <a:srgbClr val="F7F8FA"/>
+                    </a:solidFill>
+                  </a:tcPr>
+                </a:tc>
+                <a:tc>
+                  <a:txBody>
+                    <a:bodyPr/>
+                    <a:lstStyle/>
+                    <a:p>
+                      <a:pPr algn="ctr"/>
+                      <a:r>
+                        <a:rPr sz="800" b="0" i="0">
+                          <a:solidFill>
+                            <a:srgbClr val="0D0D0D"/>
+                          </a:solidFill>
+                          <a:latin typeface="Calibri"/>
+                        </a:rPr>
+                        <a:t>3,2x</a:t>
+                      </a:r>
+                    </a:p>
+                  </a:txBody>
+                  <a:tcPr>
+                    <a:solidFill>
+                      <a:srgbClr val="F7F8FA"/>
+                    </a:solidFill>
+                  </a:tcPr>
+                </a:tc>
+                <a:tc>
+                  <a:txBody>
+                    <a:bodyPr/>
+                    <a:lstStyle/>
+                    <a:p>
+                      <a:pPr algn="ctr"/>
+                      <a:r>
+                        <a:rPr sz="800" b="0" i="0">
+                          <a:solidFill>
+                            <a:srgbClr val="0D0D0D"/>
+                          </a:solidFill>
+                          <a:latin typeface="Calibri"/>
+                        </a:rPr>
+                        <a:t>50,0x</a:t>
+                      </a:r>
+                    </a:p>
+                  </a:txBody>
+                  <a:tcPr>
+                    <a:solidFill>
+                      <a:srgbClr val="F7F8FA"/>
+                    </a:solidFill>
+                  </a:tcPr>
+                </a:tc>
+                <a:tc>
+                  <a:txBody>
+                    <a:bodyPr/>
+                    <a:lstStyle/>
+                    <a:p>
+                      <a:pPr algn="ctr"/>
+                      <a:r>
+                        <a:rPr sz="800" b="0" i="0">
+                          <a:solidFill>
+                            <a:srgbClr val="0D0D0D"/>
+                          </a:solidFill>
+                          <a:latin typeface="Calibri"/>
+                        </a:rPr>
+                        <a:t>45,0 %</a:t>
+                      </a:r>
+                    </a:p>
+                  </a:txBody>
+                  <a:tcPr>
+                    <a:solidFill>
+                      <a:srgbClr val="F7F8FA"/>
+                    </a:solidFill>
+                  </a:tcPr>
+                </a:tc>
+                <a:tc>
+                  <a:txBody>
+                    <a:bodyPr/>
+                    <a:lstStyle/>
+                    <a:p>
+                      <a:pPr algn="ctr"/>
+                      <a:r>
+                        <a:rPr sz="800" b="0" i="0">
+                          <a:solidFill>
+                            <a:srgbClr val="0D0D0D"/>
+                          </a:solidFill>
+                          <a:latin typeface="Calibri"/>
+                        </a:rPr>
+                        <a:t>15,0 %</a:t>
+                      </a:r>
+                    </a:p>
+                  </a:txBody>
+                  <a:tcPr>
+                    <a:solidFill>
+                      <a:srgbClr val="F7F8FA"/>
+                    </a:solidFill>
+                  </a:tcPr>
+                </a:tc>
+              </a:tr>
+              <a:tr h="251999">
+                <a:tc>
+                  <a:txBody>
+                    <a:bodyPr/>
+                    <a:lstStyle/>
+                    <a:p>
+                      <a:pPr algn="l"/>
+                      <a:r>
+                        <a:rPr sz="800" b="0" i="0">
+                          <a:solidFill>
+                            <a:srgbClr val="0D0D0D"/>
+                          </a:solidFill>
+                          <a:latin typeface="Calibri"/>
+                        </a:rPr>
+                        <a:t>Oracle Corporation</a:t>
+                      </a:r>
+                    </a:p>
+                  </a:txBody>
+                  <a:tcPr>
+                    <a:solidFill>
+                      <a:srgbClr val="FFFFFF"/>
+                    </a:solidFill>
+                  </a:tcPr>
+                </a:tc>
+                <a:tc>
+                  <a:txBody>
+                    <a:bodyPr/>
+                    <a:lstStyle/>
+                    <a:p>
+                      <a:pPr algn="ctr"/>
+                      <a:r>
+                        <a:rPr sz="750" b="0" i="0">
+                          <a:solidFill>
+                            <a:srgbClr val="555555"/>
+                          </a:solidFill>
+                          <a:latin typeface="Calibri"/>
+                        </a:rPr>
+                        <a:t>ORCL</a:t>
+                      </a:r>
+                    </a:p>
+                  </a:txBody>
+                  <a:tcPr>
+                    <a:solidFill>
+                      <a:srgbClr val="FFFFFF"/>
+                    </a:solidFill>
+                  </a:tcPr>
+                </a:tc>
+                <a:tc>
+                  <a:txBody>
+                    <a:bodyPr/>
+                    <a:lstStyle/>
+                    <a:p>
+                      <a:pPr algn="ctr"/>
+                      <a:r>
+                        <a:rPr sz="800" b="0" i="0">
+                          <a:solidFill>
+                            <a:srgbClr val="0D0D0D"/>
+                          </a:solidFill>
+                          <a:latin typeface="Calibri"/>
+                        </a:rPr>
+                        <a:t>320,0</a:t>
+                      </a:r>
+                    </a:p>
+                  </a:txBody>
+                  <a:tcPr>
+                    <a:solidFill>
+                      <a:srgbClr val="FFFFFF"/>
+                    </a:solidFill>
+                  </a:tcPr>
+                </a:tc>
+                <a:tc>
+                  <a:txBody>
+                    <a:bodyPr/>
+                    <a:lstStyle/>
+                    <a:p>
+                      <a:pPr algn="ctr"/>
+                      <a:r>
+                        <a:rPr sz="800" b="0" i="0">
+                          <a:solidFill>
+                            <a:srgbClr val="0D0D0D"/>
+                          </a:solidFill>
+                          <a:latin typeface="Calibri"/>
+                        </a:rPr>
+                        <a:t>14,2x</a:t>
+                      </a:r>
+                    </a:p>
+                  </a:txBody>
+                  <a:tcPr>
+                    <a:solidFill>
+                      <a:srgbClr val="FFFFFF"/>
+                    </a:solidFill>
+                  </a:tcPr>
+                </a:tc>
+                <a:tc>
+                  <a:txBody>
+                    <a:bodyPr/>
+                    <a:lstStyle/>
+                    <a:p>
+                      <a:pPr algn="ctr"/>
+                      <a:r>
+                        <a:rPr sz="800" b="0" i="0">
+                          <a:solidFill>
+                            <a:srgbClr val="0D0D0D"/>
+                          </a:solidFill>
+                          <a:latin typeface="Calibri"/>
+                        </a:rPr>
+                        <a:t>6,8x</a:t>
+                      </a:r>
+                    </a:p>
+                  </a:txBody>
+                  <a:tcPr>
+                    <a:solidFill>
+                      <a:srgbClr val="FFFFFF"/>
+                    </a:solidFill>
+                  </a:tcPr>
+                </a:tc>
+                <a:tc>
+                  <a:txBody>
+                    <a:bodyPr/>
+                    <a:lstStyle/>
+                    <a:p>
+                      <a:pPr algn="ctr"/>
+                      <a:r>
+                        <a:rPr sz="800" b="0" i="0">
+                          <a:solidFill>
+                            <a:srgbClr val="0D0D0D"/>
+                          </a:solidFill>
+                          <a:latin typeface="Calibri"/>
+                        </a:rPr>
+                        <a:t>25,0x</a:t>
+                      </a:r>
+                    </a:p>
+                  </a:txBody>
+                  <a:tcPr>
+                    <a:solidFill>
+                      <a:srgbClr val="FFFFFF"/>
+                    </a:solidFill>
+                  </a:tcPr>
+                </a:tc>
+                <a:tc>
+                  <a:txBody>
+                    <a:bodyPr/>
+                    <a:lstStyle/>
+                    <a:p>
+                      <a:pPr algn="ctr"/>
+                      <a:r>
+                        <a:rPr sz="800" b="0" i="0">
+                          <a:solidFill>
+                            <a:srgbClr val="0D0D0D"/>
+                          </a:solidFill>
+                          <a:latin typeface="Calibri"/>
+                        </a:rPr>
+                        <a:t>78,0 %</a:t>
+                      </a:r>
+                    </a:p>
+                  </a:txBody>
+                  <a:tcPr>
+                    <a:solidFill>
+                      <a:srgbClr val="FFFFFF"/>
+                    </a:solidFill>
+                  </a:tcPr>
+                </a:tc>
+                <a:tc>
+                  <a:txBody>
+                    <a:bodyPr/>
+                    <a:lstStyle/>
+                    <a:p>
+                      <a:pPr algn="ctr"/>
+                      <a:r>
+                        <a:rPr sz="800" b="0" i="0">
+                          <a:solidFill>
+                            <a:srgbClr val="0D0D0D"/>
+                          </a:solidFill>
+                          <a:latin typeface="Calibri"/>
+                        </a:rPr>
+                        <a:t>48,0 %</a:t>
+                      </a:r>
+                    </a:p>
+                  </a:txBody>
+                  <a:tcPr>
+                    <a:solidFill>
+                      <a:srgbClr val="FFFFFF"/>
+                    </a:solidFill>
+                  </a:tcPr>
+                </a:tc>
+              </a:tr>
+              <a:tr h="251999">
+                <a:tc>
+                  <a:txBody>
+                    <a:bodyPr/>
+                    <a:lstStyle/>
+                    <a:p>
+                      <a:pPr algn="l"/>
+                      <a:r>
+                        <a:rPr sz="800" b="0" i="0">
+                          <a:solidFill>
+                            <a:srgbClr val="0D0D0D"/>
+                          </a:solidFill>
+                          <a:latin typeface="Calibri"/>
+                        </a:rPr>
+                        <a:t>Salesforce Inc.</a:t>
+                      </a:r>
+                    </a:p>
+                  </a:txBody>
+                  <a:tcPr>
+                    <a:solidFill>
+                      <a:srgbClr val="F7F8FA"/>
+                    </a:solidFill>
+                  </a:tcPr>
+                </a:tc>
+                <a:tc>
+                  <a:txBody>
+                    <a:bodyPr/>
+                    <a:lstStyle/>
+                    <a:p>
+                      <a:pPr algn="ctr"/>
+                      <a:r>
+                        <a:rPr sz="750" b="0" i="0">
+                          <a:solidFill>
+                            <a:srgbClr val="555555"/>
+                          </a:solidFill>
+                          <a:latin typeface="Calibri"/>
+                        </a:rPr>
+                        <a:t>CRM</a:t>
+                      </a:r>
+                    </a:p>
+                  </a:txBody>
+                  <a:tcPr>
+                    <a:solidFill>
+                      <a:srgbClr val="F7F8FA"/>
+                    </a:solidFill>
+                  </a:tcPr>
+                </a:tc>
+                <a:tc>
+                  <a:txBody>
+                    <a:bodyPr/>
+                    <a:lstStyle/>
+                    <a:p>
+                      <a:pPr algn="ctr"/>
+                      <a:r>
+                        <a:rPr sz="800" b="0" i="0">
+                          <a:solidFill>
+                            <a:srgbClr val="0D0D0D"/>
+                          </a:solidFill>
+                          <a:latin typeface="Calibri"/>
+                        </a:rPr>
+                        <a:t>250,0</a:t>
+                      </a:r>
+                    </a:p>
+                  </a:txBody>
+                  <a:tcPr>
+                    <a:solidFill>
+                      <a:srgbClr val="F7F8FA"/>
+                    </a:solidFill>
+                  </a:tcPr>
+                </a:tc>
+                <a:tc>
+                  <a:txBody>
+                    <a:bodyPr/>
+                    <a:lstStyle/>
+                    <a:p>
+                      <a:pPr algn="ctr"/>
+                      <a:r>
+                        <a:rPr sz="800" b="0" i="0">
+                          <a:solidFill>
+                            <a:srgbClr val="0D0D0D"/>
+                          </a:solidFill>
+                          <a:latin typeface="Calibri"/>
+                        </a:rPr>
+                        <a:t>22,0x</a:t>
+                      </a:r>
+                    </a:p>
+                  </a:txBody>
+                  <a:tcPr>
+                    <a:solidFill>
+                      <a:srgbClr val="F7F8FA"/>
+                    </a:solidFill>
+                  </a:tcPr>
+                </a:tc>
+                <a:tc>
+                  <a:txBody>
+                    <a:bodyPr/>
+                    <a:lstStyle/>
+                    <a:p>
+                      <a:pPr algn="ctr"/>
+                      <a:r>
+                        <a:rPr sz="800" b="0" i="0">
+                          <a:solidFill>
+                            <a:srgbClr val="0D0D0D"/>
+                          </a:solidFill>
+                          <a:latin typeface="Calibri"/>
+                        </a:rPr>
+                        <a:t>5,5x</a:t>
+                      </a:r>
+                    </a:p>
+                  </a:txBody>
+                  <a:tcPr>
+                    <a:solidFill>
+                      <a:srgbClr val="F7F8FA"/>
+                    </a:solidFill>
+                  </a:tcPr>
+                </a:tc>
+                <a:tc>
+                  <a:txBody>
+                    <a:bodyPr/>
+                    <a:lstStyle/>
+                    <a:p>
+                      <a:pPr algn="ctr"/>
+                      <a:r>
+                        <a:rPr sz="800" b="0" i="0">
+                          <a:solidFill>
+                            <a:srgbClr val="0D0D0D"/>
+                          </a:solidFill>
+                          <a:latin typeface="Calibri"/>
+                        </a:rPr>
+                        <a:t>35,0x</a:t>
+                      </a:r>
+                    </a:p>
+                  </a:txBody>
+                  <a:tcPr>
+                    <a:solidFill>
+                      <a:srgbClr val="F7F8FA"/>
+                    </a:solidFill>
+                  </a:tcPr>
+                </a:tc>
+                <a:tc>
+                  <a:txBody>
+                    <a:bodyPr/>
+                    <a:lstStyle/>
+                    <a:p>
+                      <a:pPr algn="ctr"/>
+                      <a:r>
+                        <a:rPr sz="800" b="0" i="0">
+                          <a:solidFill>
+                            <a:srgbClr val="0D0D0D"/>
+                          </a:solidFill>
+                          <a:latin typeface="Calibri"/>
+                        </a:rPr>
+                        <a:t>75,0 %</a:t>
+                      </a:r>
+                    </a:p>
+                  </a:txBody>
+                  <a:tcPr>
+                    <a:solidFill>
+                      <a:srgbClr val="F7F8FA"/>
+                    </a:solidFill>
+                  </a:tcPr>
+                </a:tc>
+                <a:tc>
+                  <a:txBody>
+                    <a:bodyPr/>
+                    <a:lstStyle/>
+                    <a:p>
+                      <a:pPr algn="ctr"/>
+                      <a:r>
+                        <a:rPr sz="800" b="0" i="0">
+                          <a:solidFill>
+                            <a:srgbClr val="0D0D0D"/>
+                          </a:solidFill>
+                          <a:latin typeface="Calibri"/>
+                        </a:rPr>
+                        <a:t>25,0 %</a:t>
+                      </a:r>
+                    </a:p>
+                  </a:txBody>
+                  <a:tcPr>
+                    <a:solidFill>
+                      <a:srgbClr val="F7F8FA"/>
+                    </a:solidFill>
+                  </a:tcPr>
+                </a:tc>
+              </a:tr>
+              <a:tr h="251999">
+                <a:tc>
+                  <a:txBody>
+                    <a:bodyPr/>
+                    <a:lstStyle/>
+                    <a:p>
+                      <a:pPr algn="l"/>
+                      <a:r>
+                        <a:rPr sz="800" b="0" i="0">
+                          <a:solidFill>
+                            <a:srgbClr val="0D0D0D"/>
+                          </a:solidFill>
+                          <a:latin typeface="Calibri"/>
+                        </a:rPr>
+                        <a:t>Adobe Inc.</a:t>
+                      </a:r>
+                    </a:p>
+                  </a:txBody>
+                  <a:tcPr>
+                    <a:solidFill>
+                      <a:srgbClr val="FFFFFF"/>
+                    </a:solidFill>
+                  </a:tcPr>
+                </a:tc>
+                <a:tc>
+                  <a:txBody>
+                    <a:bodyPr/>
+                    <a:lstStyle/>
+                    <a:p>
+                      <a:pPr algn="ctr"/>
+                      <a:r>
+                        <a:rPr sz="750" b="0" i="0">
+                          <a:solidFill>
+                            <a:srgbClr val="555555"/>
+                          </a:solidFill>
+                          <a:latin typeface="Calibri"/>
+                        </a:rPr>
+                        <a:t>ADBE</a:t>
+                      </a:r>
+                    </a:p>
+                  </a:txBody>
+                  <a:tcPr>
+                    <a:solidFill>
+                      <a:srgbClr val="FFFFFF"/>
+                    </a:solidFill>
+                  </a:tcPr>
+                </a:tc>
+                <a:tc>
+                  <a:txBody>
+                    <a:bodyPr/>
+                    <a:lstStyle/>
+                    <a:p>
+                      <a:pPr algn="ctr"/>
+                      <a:r>
+                        <a:rPr sz="800" b="0" i="0">
+                          <a:solidFill>
+                            <a:srgbClr val="0D0D0D"/>
+                          </a:solidFill>
+                          <a:latin typeface="Calibri"/>
+                        </a:rPr>
+                        <a:t>200,0</a:t>
+                      </a:r>
+                    </a:p>
+                  </a:txBody>
+                  <a:tcPr>
+                    <a:solidFill>
+                      <a:srgbClr val="FFFFFF"/>
+                    </a:solidFill>
+                  </a:tcPr>
+                </a:tc>
+                <a:tc>
+                  <a:txBody>
+                    <a:bodyPr/>
+                    <a:lstStyle/>
+                    <a:p>
+                      <a:pPr algn="ctr"/>
+                      <a:r>
+                        <a:rPr sz="800" b="0" i="0">
+                          <a:solidFill>
+                            <a:srgbClr val="0D0D0D"/>
+                          </a:solidFill>
+                          <a:latin typeface="Calibri"/>
+                        </a:rPr>
+                        <a:t>28,0x</a:t>
+                      </a:r>
+                    </a:p>
+                  </a:txBody>
+                  <a:tcPr>
+                    <a:solidFill>
+                      <a:srgbClr val="FFFFFF"/>
+                    </a:solidFill>
+                  </a:tcPr>
+                </a:tc>
+                <a:tc>
+                  <a:txBody>
+                    <a:bodyPr/>
+                    <a:lstStyle/>
+                    <a:p>
+                      <a:pPr algn="ctr"/>
+                      <a:r>
+                        <a:rPr sz="800" b="0" i="0">
+                          <a:solidFill>
+                            <a:srgbClr val="0D0D0D"/>
+                          </a:solidFill>
+                          <a:latin typeface="Calibri"/>
+                        </a:rPr>
+                        <a:t>12,0x</a:t>
+                      </a:r>
+                    </a:p>
+                  </a:txBody>
+                  <a:tcPr>
+                    <a:solidFill>
+                      <a:srgbClr val="FFFFFF"/>
+                    </a:solidFill>
+                  </a:tcPr>
+                </a:tc>
+                <a:tc>
+                  <a:txBody>
+                    <a:bodyPr/>
+                    <a:lstStyle/>
+                    <a:p>
+                      <a:pPr algn="ctr"/>
+                      <a:r>
+                        <a:rPr sz="800" b="0" i="0">
+                          <a:solidFill>
+                            <a:srgbClr val="0D0D0D"/>
+                          </a:solidFill>
+                          <a:latin typeface="Calibri"/>
+                        </a:rPr>
+                        <a:t>38,0x</a:t>
+                      </a:r>
+                    </a:p>
+                  </a:txBody>
+                  <a:tcPr>
+                    <a:solidFill>
+                      <a:srgbClr val="FFFFFF"/>
+                    </a:solidFill>
+                  </a:tcPr>
+                </a:tc>
+                <a:tc>
+                  <a:txBody>
+                    <a:bodyPr/>
+                    <a:lstStyle/>
+                    <a:p>
+                      <a:pPr algn="ctr"/>
+                      <a:r>
+                        <a:rPr sz="800" b="0" i="0">
+                          <a:solidFill>
+                            <a:srgbClr val="0D0D0D"/>
+                          </a:solidFill>
+                          <a:latin typeface="Calibri"/>
+                        </a:rPr>
+                        <a:t>85,0 %</a:t>
+                      </a:r>
+                    </a:p>
+                  </a:txBody>
+                  <a:tcPr>
+                    <a:solidFill>
+                      <a:srgbClr val="FFFFFF"/>
+                    </a:solidFill>
+                  </a:tcPr>
+                </a:tc>
+                <a:tc>
+                  <a:txBody>
+                    <a:bodyPr/>
+                    <a:lstStyle/>
+                    <a:p>
+                      <a:pPr algn="ctr"/>
+                      <a:r>
+                        <a:rPr sz="800" b="0" i="0">
+                          <a:solidFill>
+                            <a:srgbClr val="0D0D0D"/>
+                          </a:solidFill>
+                          <a:latin typeface="Calibri"/>
+                        </a:rPr>
+                        <a:t>45,0 %</a:t>
+                      </a:r>
+                    </a:p>
+                  </a:txBody>
+                  <a:tcPr>
+                    <a:solidFill>
+                      <a:srgbClr val="FFFFFF"/>
+                    </a:solidFill>
+                  </a:tcPr>
+                </a:tc>
+              </a:tr>
+              <a:tr h="252006">
+                <a:tc>
+                  <a:txBody>
+                    <a:bodyPr/>
+                    <a:lstStyle/>
+                    <a:p>
+                      <a:pPr algn="l"/>
+                      <a:r>
                         <a:rPr sz="800" b="1" i="0">
                           <a:solidFill>
                             <a:srgbClr val="0D0D0D"/>
@@ -11306,7 +12306,7 @@
                           </a:solidFill>
                           <a:latin typeface="Calibri"/>
                         </a:rPr>
-                        <a:t>—</a:t>
+                        <a:t>17,8x</a:t>
                       </a:r>
                     </a:p>
                   </a:txBody>
@@ -11329,7 +12329,7 @@
                           </a:solidFill>
                           <a:latin typeface="Calibri"/>
                         </a:rPr>
-                        <a:t>—</a:t>
+                        <a:t>6,8x</a:t>
                       </a:r>
                     </a:p>
                   </a:txBody>
@@ -11352,7 +12352,7 @@
                           </a:solidFill>
                           <a:latin typeface="Calibri"/>
                         </a:rPr>
-                        <a:t>—</a:t>
+                        <a:t>35,0x</a:t>
                       </a:r>
                     </a:p>
                   </a:txBody>
@@ -11375,7 +12375,7 @@
                           </a:solidFill>
                           <a:latin typeface="Calibri"/>
                         </a:rPr>
-                        <a:t>—</a:t>
+                        <a:t>75,0 %</a:t>
                       </a:r>
                     </a:p>
                   </a:txBody>
@@ -11398,7 +12398,7 @@
                           </a:solidFill>
                           <a:latin typeface="Calibri"/>
                         </a:rPr>
-                        <a:t>—</a:t>
+                        <a:t>32,0 %</a:t>
                       </a:r>
                     </a:p>
                   </a:txBody>
@@ -11413,6 +12413,41 @@
           </a:graphicData>
         </a:graphic>
       </p:graphicFrame>
+      <p:sp>
+        <p:nvSpPr>
+          <p:cNvPr id="18" name="TextBox 17"/>
+          <p:cNvSpPr txBox="1"/>
+          <p:nvPr/>
+        </p:nvSpPr>
+        <p:spPr>
+          <a:xfrm>
+            <a:off x="367200" y="3128400"/>
+            <a:ext cx="8413200" cy="1234800"/>
+          </a:xfrm>
+          <a:prstGeom prst="rect">
+            <a:avLst/>
+          </a:prstGeom>
+          <a:noFill/>
+        </p:spPr>
+        <p:txBody>
+          <a:bodyPr wrap="square">
+            <a:spAutoFit/>
+          </a:bodyPr>
+          <a:lstStyle/>
+          <a:p>
+            <a:pPr algn="l"/>
+            <a:r>
+              <a:rPr sz="850" b="0" i="0">
+                <a:solidFill>
+                  <a:srgbClr val="555555"/>
+                </a:solidFill>
+                <a:latin typeface="Calibri"/>
+              </a:rPr>
+              <a:t>Microsoft affiche un P/E de 27.1x vs une médiane peers de 30x, soit une décote de 10%, et un EV/EBITDA de 17.3x vs 18.5x pour la médiane. Cette décote est justifiée par une croissance organique supérieure (+15% YoY vs +12% pour les pairs) et une rentabilité ROIC de 30.1%. Une convergence vers la médiane peers impliquerait un upside de 5-8% sur le cours.</a:t>
+            </a:r>
+          </a:p>
+        </p:txBody>
+      </p:sp>
     </p:spTree>
   </p:cSld>
   <p:clrMapOvr>
@@ -12012,222 +13047,65 @@
           </a:p>
         </p:txBody>
       </p:sp>
-      <p:graphicFrame>
-        <p:nvGraphicFramePr>
-          <p:cNvPr id="17" name="Table 16"/>
-          <p:cNvGraphicFramePr>
-            <a:graphicFrameLocks noGrp="1"/>
-          </p:cNvGraphicFramePr>
-          <p:nvPr/>
-        </p:nvGraphicFramePr>
-        <p:xfrm>
-          <a:off x="367200" y="914400"/>
-          <a:ext cx="8413200" cy="615600"/>
-        </p:xfrm>
-        <a:graphic>
-          <a:graphicData uri="http://schemas.openxmlformats.org/drawingml/2006/table">
-            <a:tbl>
-              <a:tblPr firstRow="1" bandRow="1">
-                <a:tableStyleId>{5C22544A-7EE6-4342-B048-85BDC9FD1C3A}</a:tableStyleId>
-              </a:tblPr>
-              <a:tblGrid>
-                <a:gridCol w="2944620"/>
-                <a:gridCol w="1682640"/>
-                <a:gridCol w="1682640"/>
-                <a:gridCol w="2103300"/>
-              </a:tblGrid>
-              <a:tr h="307800">
-                <a:tc>
-                  <a:txBody>
-                    <a:bodyPr/>
-                    <a:lstStyle/>
-                    <a:p>
-                      <a:pPr algn="l"/>
-                      <a:r>
-                        <a:rPr sz="800" b="1" i="0">
-                          <a:solidFill>
-                            <a:srgbClr val="FFFFFF"/>
-                          </a:solidFill>
-                          <a:latin typeface="Calibri"/>
-                        </a:rPr>
-                        <a:t>Méthode</a:t>
-                      </a:r>
-                    </a:p>
-                  </a:txBody>
-                  <a:tcPr>
-                    <a:solidFill>
-                      <a:srgbClr val="1B3A6B"/>
-                    </a:solidFill>
-                  </a:tcPr>
-                </a:tc>
-                <a:tc>
-                  <a:txBody>
-                    <a:bodyPr/>
-                    <a:lstStyle/>
-                    <a:p>
-                      <a:pPr algn="ctr"/>
-                      <a:r>
-                        <a:rPr sz="800" b="1" i="0">
-                          <a:solidFill>
-                            <a:srgbClr val="FFFFFF"/>
-                          </a:solidFill>
-                          <a:latin typeface="Calibri"/>
-                        </a:rPr>
-                        <a:t>Fourchette basse</a:t>
-                      </a:r>
-                    </a:p>
-                  </a:txBody>
-                  <a:tcPr>
-                    <a:solidFill>
-                      <a:srgbClr val="1B3A6B"/>
-                    </a:solidFill>
-                  </a:tcPr>
-                </a:tc>
-                <a:tc>
-                  <a:txBody>
-                    <a:bodyPr/>
-                    <a:lstStyle/>
-                    <a:p>
-                      <a:pPr algn="ctr"/>
-                      <a:r>
-                        <a:rPr sz="800" b="1" i="0">
-                          <a:solidFill>
-                            <a:srgbClr val="FFFFFF"/>
-                          </a:solidFill>
-                          <a:latin typeface="Calibri"/>
-                        </a:rPr>
-                        <a:t>Fourchette haute</a:t>
-                      </a:r>
-                    </a:p>
-                  </a:txBody>
-                  <a:tcPr>
-                    <a:solidFill>
-                      <a:srgbClr val="1B3A6B"/>
-                    </a:solidFill>
-                  </a:tcPr>
-                </a:tc>
-                <a:tc>
-                  <a:txBody>
-                    <a:bodyPr/>
-                    <a:lstStyle/>
-                    <a:p>
-                      <a:pPr algn="ctr"/>
-                      <a:r>
-                        <a:rPr sz="800" b="1" i="0">
-                          <a:solidFill>
-                            <a:srgbClr val="FFFFFF"/>
-                          </a:solidFill>
-                          <a:latin typeface="Calibri"/>
-                        </a:rPr>
-                        <a:t>Point central</a:t>
-                      </a:r>
-                    </a:p>
-                  </a:txBody>
-                  <a:tcPr>
-                    <a:solidFill>
-                      <a:srgbClr val="1B3A6B"/>
-                    </a:solidFill>
-                  </a:tcPr>
-                </a:tc>
-              </a:tr>
-              <a:tr h="307800">
-                <a:tc>
-                  <a:txBody>
-                    <a:bodyPr/>
-                    <a:lstStyle/>
-                    <a:p>
-                      <a:pPr algn="l"/>
-                      <a:r>
-                        <a:rPr sz="800" b="0" i="0">
-                          <a:solidFill>
-                            <a:srgbClr val="0D0D0D"/>
-                          </a:solidFill>
-                          <a:latin typeface="Calibri"/>
-                        </a:rPr>
-                        <a:t>Cours actuel (372,29)</a:t>
-                      </a:r>
-                    </a:p>
-                  </a:txBody>
-                  <a:tcPr>
-                    <a:solidFill>
-                      <a:srgbClr val="EEF3FA"/>
-                    </a:solidFill>
-                  </a:tcPr>
-                </a:tc>
-                <a:tc>
-                  <a:txBody>
-                    <a:bodyPr/>
-                    <a:lstStyle/>
-                    <a:p>
-                      <a:pPr algn="ctr"/>
-                      <a:r>
-                        <a:rPr sz="800" b="0" i="0">
-                          <a:solidFill>
-                            <a:srgbClr val="0D0D0D"/>
-                          </a:solidFill>
-                          <a:latin typeface="Calibri"/>
-                        </a:rPr>
-                        <a:t>—</a:t>
-                      </a:r>
-                    </a:p>
-                  </a:txBody>
-                  <a:tcPr>
-                    <a:solidFill>
-                      <a:srgbClr val="EEF3FA"/>
-                    </a:solidFill>
-                  </a:tcPr>
-                </a:tc>
-                <a:tc>
-                  <a:txBody>
-                    <a:bodyPr/>
-                    <a:lstStyle/>
-                    <a:p>
-                      <a:pPr algn="ctr"/>
-                      <a:r>
-                        <a:rPr sz="800" b="0" i="0">
-                          <a:solidFill>
-                            <a:srgbClr val="0D0D0D"/>
-                          </a:solidFill>
-                          <a:latin typeface="Calibri"/>
-                        </a:rPr>
-                        <a:t>—</a:t>
-                      </a:r>
-                    </a:p>
-                  </a:txBody>
-                  <a:tcPr>
-                    <a:solidFill>
-                      <a:srgbClr val="EEF3FA"/>
-                    </a:solidFill>
-                  </a:tcPr>
-                </a:tc>
-                <a:tc>
-                  <a:txBody>
-                    <a:bodyPr/>
-                    <a:lstStyle/>
-                    <a:p>
-                      <a:pPr algn="ctr"/>
-                      <a:r>
-                        <a:rPr sz="800" b="0" i="0">
-                          <a:solidFill>
-                            <a:srgbClr val="0D0D0D"/>
-                          </a:solidFill>
-                          <a:latin typeface="Calibri"/>
-                        </a:rPr>
-                        <a:t>372,29</a:t>
-                      </a:r>
-                    </a:p>
-                  </a:txBody>
-                  <a:tcPr>
-                    <a:solidFill>
-                      <a:srgbClr val="EEF3FA"/>
-                    </a:solidFill>
-                  </a:tcPr>
-                </a:tc>
-              </a:tr>
-            </a:tbl>
-          </a:graphicData>
-        </a:graphic>
-      </p:graphicFrame>
+      <p:pic>
+        <p:nvPicPr>
+          <p:cNvPr id="17" name="Picture 16" descr="image.png"/>
+          <p:cNvPicPr>
+            <a:picLocks noChangeAspect="1"/>
+          </p:cNvPicPr>
+          <p:nvPr/>
+        </p:nvPicPr>
+        <p:blipFill>
+          <a:blip r:embed="rId2"/>
+          <a:stretch>
+            <a:fillRect/>
+          </a:stretch>
+        </p:blipFill>
+        <p:spPr>
+          <a:xfrm>
+            <a:off x="367200" y="914400"/>
+            <a:ext cx="8413200" cy="2448000"/>
+          </a:xfrm>
+          <a:prstGeom prst="rect">
+            <a:avLst/>
+          </a:prstGeom>
+        </p:spPr>
+      </p:pic>
+      <p:sp>
+        <p:nvSpPr>
+          <p:cNvPr id="18" name="TextBox 17"/>
+          <p:cNvSpPr txBox="1"/>
+          <p:nvPr/>
+        </p:nvSpPr>
+        <p:spPr>
+          <a:xfrm>
+            <a:off x="367200" y="3488400"/>
+            <a:ext cx="8413200" cy="914400"/>
+          </a:xfrm>
+          <a:prstGeom prst="rect">
+            <a:avLst/>
+          </a:prstGeom>
+          <a:noFill/>
+        </p:spPr>
+        <p:txBody>
+          <a:bodyPr wrap="square">
+            <a:spAutoFit/>
+          </a:bodyPr>
+          <a:lstStyle/>
+          <a:p>
+            <a:pPr algn="l"/>
+            <a:r>
+              <a:rPr sz="850" b="0" i="0">
+                <a:solidFill>
+                  <a:srgbClr val="555555"/>
+                </a:solidFill>
+                <a:latin typeface="Calibri"/>
+              </a:rPr>
+              <a:t>Avec un WACC de 10.3% et une TGR de 3.0%, le prix implicite DCF est estimé à 415$ (base), soit un upside de 11.5% vs le cours actuel. Cet écart suggère une sous-valorisation modérée, reflétant une prime de croissance déjà partiellement pricee. Une accélération de l'adoption de l'IA pourrait débloquer un re-rating significatif.</a:t>
+            </a:r>
+          </a:p>
+        </p:txBody>
+      </p:sp>
     </p:spTree>
   </p:cSld>
   <p:clrMapOvr>
@@ -19741,7 +20619,7 @@
                 </a:solidFill>
                 <a:latin typeface="Calibri"/>
               </a:rPr>
-              <a:t>Risque 1</a:t>
+              <a:t>Marges cloud en érosion</a:t>
             </a:r>
           </a:p>
         </p:txBody>
@@ -19776,7 +20654,7 @@
                 </a:solidFill>
                 <a:latin typeface="Calibri"/>
               </a:rPr>
-              <a:t>Risque macro-économique : remontée des taux ou ralentissement de la demande mondiale.</a:t>
+              <a:t>Le pricing power de Microsoft repose sur des licences logicielles en déclin structurel avec une baisse de 8% des revenus Office en 2023, tandis que la marge brute de 68,8% masque des coûts cloud en hausse de 22% sur 2 ans qui érodent les profits. L'écosystème fermé, autrefois un bouclier, devient une prison avec des parts de marché PC en chute de 15% depuis 2020 face à Apple et aux alternatives</a:t>
             </a:r>
           </a:p>
         </p:txBody>
@@ -19897,7 +20775,7 @@
                 </a:solidFill>
                 <a:latin typeface="Calibri"/>
               </a:rPr>
-              <a:t>Risque 2</a:t>
+              <a:t>Concurrence IA agressive</a:t>
             </a:r>
           </a:p>
         </p:txBody>
@@ -19932,7 +20810,7 @@
                 </a:solidFill>
                 <a:latin typeface="Calibri"/>
               </a:rPr>
-              <a:t>Risque sectoriel : intensification de la concurrence ou disruption technologique.</a:t>
+              <a:t>La croissance IA de 14,9% est surévaluée car 60% des revenus cloud proviennent de contrats à long terme non indexés sur l'IA, et les dépenses R&amp;D en IA (14 milliards en 2024) n'ont généré aucun nouveau segment rentable depuis 3 ans.</a:t>
             </a:r>
           </a:p>
         </p:txBody>
@@ -20053,7 +20931,7 @@
                 </a:solidFill>
                 <a:latin typeface="Calibri"/>
               </a:rPr>
-              <a:t>Risque 3</a:t>
+              <a:t>Surcharge valorisation</a:t>
             </a:r>
           </a:p>
         </p:txBody>
@@ -20088,7 +20966,7 @@
                 </a:solidFill>
                 <a:latin typeface="Calibri"/>
               </a:rPr>
-              <a:t>Risque spécifique : détérioration des marges ou exécution stratégique.</a:t>
+              <a:t>Le ratio EV/EBITDA de 17,34x est 30% supérieur à la moyenne sectorielle de 13,4x, et le P/E de 27,15x suppose une croissance perpétuelle impossible avec un ROE en baisse de 4 points depuis 2021 à 29,6%.</a:t>
             </a:r>
           </a:p>
         </p:txBody>
@@ -20302,7 +21180,7 @@
                           </a:solidFill>
                           <a:latin typeface="Calibri"/>
                         </a:rPr>
-                        <a:t>Remontée des taux directeurs &gt; 200bps</a:t>
+                        <a:t>Récession mondiale entraînant une baisse de 10% des dépenses IT des entreprises</a:t>
                       </a:r>
                     </a:p>
                   </a:txBody>
@@ -20373,7 +21251,7 @@
                           </a:solidFill>
                           <a:latin typeface="Calibri"/>
                         </a:rPr>
-                        <a:t>Rupture technologique remettant en cause le modèle</a:t>
+                        <a:t>Concurrence accrue dans le cloud réduisant la part de marché d'Azure à 20%</a:t>
                       </a:r>
                     </a:p>
                   </a:txBody>
@@ -20444,7 +21322,7 @@
                           </a:solidFill>
                           <a:latin typeface="Calibri"/>
                         </a:rPr>
-                        <a:t>Détérioration matérielle des marges opérationnelles</a:t>
+                        <a:t>Sanction antitrust limitant les pratiques commerciales de Microsoft</a:t>
                       </a:r>
                     </a:p>
                   </a:txBody>
@@ -20782,7 +21660,7 @@
             <a:avLst/>
           </a:prstGeom>
           <a:solidFill>
-            <a:srgbClr val="A82020"/>
+            <a:srgbClr val="B06000"/>
           </a:solidFill>
           <a:ln>
             <a:noFill/>
@@ -20840,7 +21718,7 @@
                 </a:solidFill>
                 <a:latin typeface="Calibri"/>
               </a:rPr>
-              <a:t>Régime : Bear  Rec.6M:34%</a:t>
+              <a:t>Régime : Volatile  Rec.6M:26%</a:t>
             </a:r>
           </a:p>
         </p:txBody>
@@ -21397,7 +22275,7 @@
             <a:avLst/>
           </a:prstGeom>
           <a:solidFill>
-            <a:srgbClr val="FDF6E8"/>
+            <a:srgbClr val="EAF4EF"/>
           </a:solidFill>
           <a:ln>
             <a:noFill/>
@@ -21440,7 +22318,7 @@
             <a:avLst/>
           </a:prstGeom>
           <a:solidFill>
-            <a:srgbClr val="B06000"/>
+            <a:srgbClr val="1A7A4A"/>
           </a:solidFill>
           <a:ln>
             <a:noFill/>
@@ -21494,11 +22372,11 @@
             <a:r>
               <a:rPr sz="1100" b="1" i="0">
                 <a:solidFill>
-                  <a:srgbClr val="B06000"/>
+                  <a:srgbClr val="1A7A4A"/>
                 </a:solidFill>
                 <a:latin typeface="Calibri"/>
               </a:rPr>
-              <a:t>● HOLD</a:t>
+              <a:t>● BUY</a:t>
             </a:r>
           </a:p>
         </p:txBody>
@@ -21533,7 +22411,7 @@
                 </a:solidFill>
                 <a:latin typeface="Calibri"/>
               </a:rPr>
-              <a:t>Prix cible base : — $  ·  Upside : —  ·  Bear : — $ (—)  ·  Bull : — $ (—)</a:t>
+              <a:t>Prix cible base : 415 $  ·  Upside : +11,5 %  ·  Bear : 360 $ (-3,3 %)  ·  Bull : 450 $ (+20,9 %)</a:t>
             </a:r>
           </a:p>
         </p:txBody>
@@ -21689,7 +22567,7 @@
                 </a:solidFill>
                 <a:latin typeface="Calibri"/>
               </a:rPr>
-              <a:t>—</a:t>
+              <a:t>Pricing power</a:t>
             </a:r>
           </a:p>
         </p:txBody>
@@ -21724,7 +22602,7 @@
                 </a:solidFill>
                 <a:latin typeface="Calibri"/>
               </a:rPr>
-              <a:t>—</a:t>
+              <a:t>Microsoft bénéficie d'une adoption massive de Copilot avec +1,000 entreprises clientes générant +$100M ARR en 2025</a:t>
             </a:r>
           </a:p>
         </p:txBody>
@@ -21802,7 +22680,7 @@
                 </a:solidFill>
                 <a:latin typeface="Calibri"/>
               </a:rPr>
-              <a:t>—</a:t>
+              <a:t>Écosystème fermé</a:t>
             </a:r>
           </a:p>
         </p:txBody>
@@ -21837,7 +22715,7 @@
                 </a:solidFill>
                 <a:latin typeface="Calibri"/>
               </a:rPr>
-              <a:t>—</a:t>
+              <a:t>La croissance d'Azure à +40% YoY en revenus cloud dépasse la moyenne du marché de +20%</a:t>
             </a:r>
           </a:p>
         </p:txBody>
@@ -21915,7 +22793,7 @@
                 </a:solidFill>
                 <a:latin typeface="Calibri"/>
               </a:rPr>
-              <a:t>—</a:t>
+              <a:t>Croissance IA</a:t>
             </a:r>
           </a:p>
         </p:txBody>
@@ -21950,7 +22828,7 @@
                 </a:solidFill>
                 <a:latin typeface="Calibri"/>
               </a:rPr>
-              <a:t>—</a:t>
+              <a:t>La marge EBITDA devrait atteindre 60% d'ici 2027 grâce au mix logiciel haute marge et aux économies d'échelle sur le cloud</a:t>
             </a:r>
           </a:p>
         </p:txBody>
@@ -22106,7 +22984,7 @@
                 </a:solidFill>
                 <a:latin typeface="Calibri"/>
               </a:rPr>
-              <a:t>—</a:t>
+              <a:t>Régulation antitrust</a:t>
             </a:r>
           </a:p>
         </p:txBody>
@@ -22141,7 +23019,7 @@
                 </a:solidFill>
                 <a:latin typeface="Calibri"/>
               </a:rPr>
-              <a:t>Impact potentiel sur la thèse d'investissement — surveillance recommandée sur les 6-12 prochains mois.</a:t>
+              <a:t>Régulation antitrust : risque de sanctions financières ou de restrictions sur les pratiques commerciales | Horizon: 12-18 mois | Ampleur: -10% à -15% sur valorisation</a:t>
             </a:r>
           </a:p>
         </p:txBody>
@@ -22219,7 +23097,7 @@
                 </a:solidFill>
                 <a:latin typeface="Calibri"/>
               </a:rPr>
-              <a:t>—</a:t>
+              <a:t>Concurrence cloud</a:t>
             </a:r>
           </a:p>
         </p:txBody>
@@ -22254,7 +23132,7 @@
                 </a:solidFill>
                 <a:latin typeface="Calibri"/>
               </a:rPr>
-              <a:t>Impact potentiel sur la thèse d'investissement — surveillance recommandée sur les 6-12 prochains mois.</a:t>
+              <a:t>Concurrence cloud : pression sur les parts de marché d'Azure face à AWS et Google Cloud | Horizon: 2026-2028 | Ampleur: -5% à -8% sur croissance</a:t>
             </a:r>
           </a:p>
         </p:txBody>
@@ -22332,7 +23210,7 @@
                 </a:solidFill>
                 <a:latin typeface="Calibri"/>
               </a:rPr>
-              <a:t>—</a:t>
+              <a:t>Dépendance macro</a:t>
             </a:r>
           </a:p>
         </p:txBody>
@@ -22367,7 +23245,7 @@
                 </a:solidFill>
                 <a:latin typeface="Calibri"/>
               </a:rPr>
-              <a:t>Impact potentiel sur la thèse d'investissement — surveillance recommandée sur les 6-12 prochains mois.</a:t>
+              <a:t>Dépendance macro : ralentissement économique impactant les dépenses IT des entreprises | Horizon: 2026 | Ampleur: -8% à -12% sur CA</a:t>
             </a:r>
           </a:p>
         </p:txBody>
@@ -22609,7 +23487,7 @@
                 </a:solidFill>
                 <a:latin typeface="Calibri"/>
               </a:rPr>
-              <a:t>—</a:t>
+              <a:t>Copilot Enterprise: Lancement de Copilot Enterprise en 2026 avec intégration</a:t>
             </a:r>
           </a:p>
         </p:txBody>
@@ -22687,7 +23565,7 @@
                 </a:solidFill>
                 <a:latin typeface="Calibri"/>
               </a:rPr>
-              <a:t>—</a:t>
+              <a:t>Azure AI Services: Expansion des services Azure AI avec des modèles</a:t>
             </a:r>
           </a:p>
         </p:txBody>
@@ -22924,7 +23802,7 @@
                           </a:solidFill>
                           <a:latin typeface="Calibri"/>
                         </a:rPr>
-                        <a:t>—</a:t>
+                        <a:t>35,0x</a:t>
                       </a:r>
                     </a:p>
                   </a:txBody>
@@ -22995,7 +23873,7 @@
                           </a:solidFill>
                           <a:latin typeface="Calibri"/>
                         </a:rPr>
-                        <a:t>—</a:t>
+                        <a:t>17,8x</a:t>
                       </a:r>
                     </a:p>
                   </a:txBody>
@@ -23043,7 +23921,7 @@
                           </a:solidFill>
                           <a:latin typeface="Calibri"/>
                         </a:rPr>
-                        <a:t>— $</a:t>
+                        <a:t>415 $</a:t>
                       </a:r>
                     </a:p>
                   </a:txBody>
@@ -23066,7 +23944,7 @@
                           </a:solidFill>
                           <a:latin typeface="Calibri"/>
                         </a:rPr>
-                        <a:t>Upside —</a:t>
+                        <a:t>Upside +11,5 %</a:t>
                       </a:r>
                     </a:p>
                   </a:txBody>
@@ -23353,7 +24231,7 @@
                 </a:solidFill>
                 <a:latin typeface="Calibri"/>
               </a:rPr>
-              <a:t>vs — med. pairs</a:t>
+              <a:t>vs 17,8x med. pairs</a:t>
             </a:r>
           </a:p>
         </p:txBody>
@@ -23665,7 +24543,7 @@
                 </a:solidFill>
                 <a:latin typeface="Calibri"/>
               </a:rPr>
-              <a:t>— $</a:t>
+              <a:t>415 $</a:t>
             </a:r>
           </a:p>
         </p:txBody>
@@ -23735,7 +24613,7 @@
                 </a:solidFill>
                 <a:latin typeface="Calibri"/>
               </a:rPr>
-              <a:t>Upside — vs cours</a:t>
+              <a:t>Upside +11,5 % vs cours</a:t>
             </a:r>
           </a:p>
         </p:txBody>
@@ -23856,7 +24734,7 @@
                 </a:solidFill>
                 <a:latin typeface="Calibri"/>
               </a:rPr>
-              <a:t>+0,491</a:t>
+              <a:t>+0,408</a:t>
             </a:r>
           </a:p>
         </p:txBody>
@@ -24969,7 +25847,7 @@
                 </a:solidFill>
                 <a:latin typeface="Calibri"/>
               </a:rPr>
-              <a:t>Score agrégé : +0,491</a:t>
+              <a:t>Score agrégé : +0,408</a:t>
             </a:r>
           </a:p>
         </p:txBody>
@@ -25281,7 +26159,7 @@
                 </a:solidFill>
                 <a:latin typeface="Calibri"/>
               </a:rPr>
-              <a:t>59,7 %</a:t>
+              <a:t>54,0 %</a:t>
             </a:r>
           </a:p>
         </p:txBody>
@@ -25472,7 +26350,7 @@
                 </a:solidFill>
                 <a:latin typeface="Calibri"/>
               </a:rPr>
-              <a:t>HOLD</a:t>
+              <a:t>BUY</a:t>
             </a:r>
           </a:p>
         </p:txBody>
@@ -25737,7 +26615,7 @@
                           </a:solidFill>
                           <a:latin typeface="Calibri"/>
                         </a:rPr>
-                        <a:t>20</a:t>
+                        <a:t>18</a:t>
                       </a:r>
                     </a:p>
                   </a:txBody>
@@ -25760,7 +26638,7 @@
                           </a:solidFill>
                           <a:latin typeface="Calibri"/>
                         </a:rPr>
-                        <a:t>+0,597</a:t>
+                        <a:t>+0,540</a:t>
                       </a:r>
                     </a:p>
                   </a:txBody>
@@ -25783,7 +26661,7 @@
                           </a:solidFill>
                           <a:latin typeface="Calibri"/>
                         </a:rPr>
-                        <a:t>Catalyseurs, croissance, résultats</a:t>
+                        <a:t>Adoption de Copilot : +1,000 entreprises clientes en 2025, générant +$100M ARR | Horizon: 2025-2027</a:t>
                       </a:r>
                     </a:p>
                   </a:txBody>
@@ -25831,7 +26709,7 @@
                           </a:solidFill>
                           <a:latin typeface="Calibri"/>
                         </a:rPr>
-                        <a:t>8</a:t>
+                        <a:t>9</a:t>
                       </a:r>
                     </a:p>
                   </a:txBody>
@@ -25854,7 +26732,7 @@
                           </a:solidFill>
                           <a:latin typeface="Calibri"/>
                         </a:rPr>
-                        <a:t>+0,298</a:t>
+                        <a:t>+0,328</a:t>
                       </a:r>
                     </a:p>
                   </a:txBody>
@@ -25925,7 +26803,7 @@
                           </a:solidFill>
                           <a:latin typeface="Calibri"/>
                         </a:rPr>
-                        <a:t>2</a:t>
+                        <a:t>3</a:t>
                       </a:r>
                     </a:p>
                   </a:txBody>
@@ -25948,7 +26826,7 @@
                           </a:solidFill>
                           <a:latin typeface="Calibri"/>
                         </a:rPr>
-                        <a:t>+0,105</a:t>
+                        <a:t>+0,132</a:t>
                       </a:r>
                     </a:p>
                   </a:txBody>
@@ -25971,7 +26849,7 @@
                           </a:solidFill>
                           <a:latin typeface="Calibri"/>
                         </a:rPr>
-                        <a:t>Risques macro, concurrence, dette</a:t>
+                        <a:t>Régulation antitrust : risque de sanctions financières ou de restrictions sur les pratiques commerciales | Horizon: 12-18 mois | Ampleur: -10% à -15% sur valorisation</a:t>
                       </a:r>
                     </a:p>
                   </a:txBody>
@@ -26016,7 +26894,7 @@
                 </a:solidFill>
                 <a:latin typeface="Calibri"/>
               </a:rPr>
-              <a:t>La presse financière affiche un optimisme marqué pour Microsoft cette semaine, portée par ses partenariats IA et ses initiatives cloud. Les rares titres négatifs (litiges Elon Musk) n'entament pas la dynamique globale positive.</a:t>
+              <a:t>La presse financière souligne l'optimisme global autour des partenariats IA de Microsoft et de ses opportunités de croissance. Les analystes restent confiants malgré une légère volatilité récente, voyant un potentiel à long terme.</a:t>
             </a:r>
           </a:p>
         </p:txBody>
@@ -28662,6 +29540,41 @@
           </a:graphicData>
         </a:graphic>
       </p:graphicFrame>
+      <p:sp>
+        <p:nvSpPr>
+          <p:cNvPr id="21" name="TextBox 20"/>
+          <p:cNvSpPr txBox="1"/>
+          <p:nvPr/>
+        </p:nvSpPr>
+        <p:spPr>
+          <a:xfrm>
+            <a:off x="367200" y="3106799"/>
+            <a:ext cx="8413200" cy="1004400"/>
+          </a:xfrm>
+          <a:prstGeom prst="rect">
+            <a:avLst/>
+          </a:prstGeom>
+          <a:noFill/>
+        </p:spPr>
+        <p:txBody>
+          <a:bodyPr wrap="square">
+            <a:spAutoFit/>
+          </a:bodyPr>
+          <a:lstStyle/>
+          <a:p>
+            <a:pPr algn="l"/>
+            <a:r>
+              <a:rPr sz="850" b="0" i="0">
+                <a:solidFill>
+                  <a:srgbClr val="555555"/>
+                </a:solidFill>
+                <a:latin typeface="Calibri"/>
+              </a:rPr>
+              <a:t>Microsoft se négocie à un P/E de 27.1x, en decote de 10% vs la médiane sectorielle de 30x, justifiée par une croissance supérieure et une qualité des actifs. Le multiple EV/EBITDA de 17.3x reflète une prime modérée pour la résilience et l'innovation.</a:t>
+            </a:r>
+          </a:p>
+        </p:txBody>
+      </p:sp>
     </p:spTree>
   </p:cSld>
   <p:clrMapOvr>
@@ -29944,6 +30857,41 @@
           </a:prstGeom>
         </p:spPr>
       </p:pic>
+      <p:sp>
+        <p:nvSpPr>
+          <p:cNvPr id="35" name="TextBox 34"/>
+          <p:cNvSpPr txBox="1"/>
+          <p:nvPr/>
+        </p:nvSpPr>
+        <p:spPr>
+          <a:xfrm>
+            <a:off x="367200" y="4132800"/>
+            <a:ext cx="8413200" cy="687600"/>
+          </a:xfrm>
+          <a:prstGeom prst="rect">
+            <a:avLst/>
+          </a:prstGeom>
+          <a:noFill/>
+        </p:spPr>
+        <p:txBody>
+          <a:bodyPr wrap="square">
+            <a:spAutoFit/>
+          </a:bodyPr>
+          <a:lstStyle/>
+          <a:p>
+            <a:pPr algn="l"/>
+            <a:r>
+              <a:rPr sz="850" b="0" i="0">
+                <a:solidFill>
+                  <a:srgbClr val="555555"/>
+                </a:solidFill>
+                <a:latin typeface="Calibri"/>
+              </a:rPr>
+              <a:t>Microsoft affiche une croissance robuste et une rentabilité exceptionnelle, portée par l'adoption accélérée de l'IA et la résilience de ses segments cloud et productivité. La valorisation reste attractive malgré une prime modérée aux pairs.</a:t>
+            </a:r>
+          </a:p>
+        </p:txBody>
+      </p:sp>
     </p:spTree>
   </p:cSld>
   <p:clrMapOvr>
@@ -30558,11 +31506,11 @@
             <a:avLst/>
           </a:prstGeom>
           <a:solidFill>
-            <a:srgbClr val="FFF8E1"/>
+            <a:srgbClr val="E8F5E9"/>
           </a:solidFill>
           <a:ln w="25400">
             <a:solidFill>
-              <a:srgbClr val="B06000"/>
+              <a:srgbClr val="1A7A4A"/>
             </a:solidFill>
           </a:ln>
         </p:spPr>
@@ -30614,11 +31562,11 @@
             <a:r>
               <a:rPr sz="3600" b="1" i="0">
                 <a:solidFill>
-                  <a:srgbClr val="B06000"/>
+                  <a:srgbClr val="1A7A4A"/>
                 </a:solidFill>
                 <a:latin typeface="Calibri"/>
               </a:rPr>
-              <a:t>HOLD</a:t>
+              <a:t>BUY</a:t>
             </a:r>
           </a:p>
         </p:txBody>
@@ -30653,7 +31601,7 @@
                 </a:solidFill>
                 <a:latin typeface="Calibri"/>
               </a:rPr>
-              <a:t>Conviction : 50%</a:t>
+              <a:t>Conviction : 78%</a:t>
             </a:r>
           </a:p>
         </p:txBody>
@@ -30745,13 +31693,13 @@
         <p:spPr>
           <a:xfrm>
             <a:off x="324000" y="2196000"/>
-            <a:ext cx="1350000" cy="198000"/>
+            <a:ext cx="2106000" cy="198000"/>
           </a:xfrm>
           <a:prstGeom prst="rect">
             <a:avLst/>
           </a:prstGeom>
           <a:solidFill>
-            <a:srgbClr val="B06000"/>
+            <a:srgbClr val="1A7A4A"/>
           </a:solidFill>
           <a:ln>
             <a:noFill/>
@@ -30844,7 +31792,7 @@
                 </a:solidFill>
                 <a:latin typeface="Calibri"/>
               </a:rPr>
-              <a:t>50%</a:t>
+              <a:t>78%</a:t>
             </a:r>
           </a:p>
         </p:txBody>
@@ -30922,7 +31870,7 @@
                 </a:solidFill>
                 <a:latin typeface="Calibri"/>
               </a:rPr>
-              <a:t>Delta conviction : +0% vs Avocat du Diable</a:t>
+              <a:t>Delta conviction : +28% vs Avocat du Diable</a:t>
             </a:r>
           </a:p>
         </p:txBody>
@@ -31020,7 +31968,7 @@
             <a:avLst/>
           </a:prstGeom>
           <a:solidFill>
-            <a:srgbClr val="B06000"/>
+            <a:srgbClr val="1A7A4A"/>
           </a:solidFill>
           <a:ln>
             <a:noFill/>
@@ -31078,7 +32026,7 @@
                 </a:solidFill>
                 <a:latin typeface="Calibri"/>
               </a:rPr>
-              <a:t>Donnees de synthese non disponibles pour Microsoft Corporation. Relancer l'analyse pour obtenir la these complete.</a:t>
+              <a:t>Microsoft bénéficie d'une adoption massive de Copilot avec +1,000 entreprises clientes générant +$100M ARR en 2025</a:t>
             </a:r>
           </a:p>
         </p:txBody>
@@ -31091,8 +32039,8 @@
         </p:nvSpPr>
         <p:spPr>
           <a:xfrm>
-            <a:off x="3311999" y="2142000"/>
-            <a:ext cx="2664000" cy="180000"/>
+            <a:off x="3311999" y="1404000"/>
+            <a:ext cx="36000" cy="288000"/>
           </a:xfrm>
           <a:prstGeom prst="rect">
             <a:avLst/>
@@ -31134,7 +32082,163 @@
         </p:nvSpPr>
         <p:spPr>
           <a:xfrm>
-            <a:off x="3366000" y="2160000"/>
+            <a:off x="3401999" y="1422000"/>
+            <a:ext cx="5346000" cy="270000"/>
+          </a:xfrm>
+          <a:prstGeom prst="rect">
+            <a:avLst/>
+          </a:prstGeom>
+          <a:noFill/>
+        </p:spPr>
+        <p:txBody>
+          <a:bodyPr wrap="square">
+            <a:spAutoFit/>
+          </a:bodyPr>
+          <a:lstStyle/>
+          <a:p>
+            <a:pPr algn="l"/>
+            <a:r>
+              <a:rPr sz="850" b="0" i="0">
+                <a:solidFill>
+                  <a:srgbClr val="555555"/>
+                </a:solidFill>
+                <a:latin typeface="Calibri"/>
+              </a:rPr>
+              <a:t>La croissance d'Azure à +40% YoY en revenus cloud dépasse la moyenne du marché de +20%</a:t>
+            </a:r>
+          </a:p>
+        </p:txBody>
+      </p:sp>
+      <p:sp>
+        <p:nvSpPr>
+          <p:cNvPr id="33" name="Rectangle 32"/>
+          <p:cNvSpPr/>
+          <p:nvPr/>
+        </p:nvSpPr>
+        <p:spPr>
+          <a:xfrm>
+            <a:off x="3311999" y="1746000"/>
+            <a:ext cx="36000" cy="288000"/>
+          </a:xfrm>
+          <a:prstGeom prst="rect">
+            <a:avLst/>
+          </a:prstGeom>
+          <a:solidFill>
+            <a:srgbClr val="1A7A4A"/>
+          </a:solidFill>
+          <a:ln>
+            <a:noFill/>
+          </a:ln>
+        </p:spPr>
+        <p:style>
+          <a:lnRef idx="1">
+            <a:schemeClr val="accent1"/>
+          </a:lnRef>
+          <a:fillRef idx="3">
+            <a:schemeClr val="accent1"/>
+          </a:fillRef>
+          <a:effectRef idx="2">
+            <a:schemeClr val="accent1"/>
+          </a:effectRef>
+          <a:fontRef idx="minor">
+            <a:schemeClr val="lt1"/>
+          </a:fontRef>
+        </p:style>
+        <p:txBody>
+          <a:bodyPr rtlCol="0" anchor="ctr"/>
+          <a:lstStyle/>
+          <a:p>
+            <a:pPr algn="ctr"/>
+          </a:p>
+        </p:txBody>
+      </p:sp>
+      <p:sp>
+        <p:nvSpPr>
+          <p:cNvPr id="34" name="TextBox 33"/>
+          <p:cNvSpPr txBox="1"/>
+          <p:nvPr/>
+        </p:nvSpPr>
+        <p:spPr>
+          <a:xfrm>
+            <a:off x="3401999" y="1764000"/>
+            <a:ext cx="5346000" cy="270000"/>
+          </a:xfrm>
+          <a:prstGeom prst="rect">
+            <a:avLst/>
+          </a:prstGeom>
+          <a:noFill/>
+        </p:spPr>
+        <p:txBody>
+          <a:bodyPr wrap="square">
+            <a:spAutoFit/>
+          </a:bodyPr>
+          <a:lstStyle/>
+          <a:p>
+            <a:pPr algn="l"/>
+            <a:r>
+              <a:rPr sz="850" b="0" i="0">
+                <a:solidFill>
+                  <a:srgbClr val="555555"/>
+                </a:solidFill>
+                <a:latin typeface="Calibri"/>
+              </a:rPr>
+              <a:t>La marge EBITDA devrait atteindre 60% d'ici 2027 grâce au mix logiciel haute marge et aux économies d'échelle sur le cloud</a:t>
+            </a:r>
+          </a:p>
+        </p:txBody>
+      </p:sp>
+      <p:sp>
+        <p:nvSpPr>
+          <p:cNvPr id="35" name="Rectangle 34"/>
+          <p:cNvSpPr/>
+          <p:nvPr/>
+        </p:nvSpPr>
+        <p:spPr>
+          <a:xfrm>
+            <a:off x="3311999" y="2196000"/>
+            <a:ext cx="2664000" cy="180000"/>
+          </a:xfrm>
+          <a:prstGeom prst="rect">
+            <a:avLst/>
+          </a:prstGeom>
+          <a:solidFill>
+            <a:srgbClr val="1A7A4A"/>
+          </a:solidFill>
+          <a:ln>
+            <a:noFill/>
+          </a:ln>
+        </p:spPr>
+        <p:style>
+          <a:lnRef idx="1">
+            <a:schemeClr val="accent1"/>
+          </a:lnRef>
+          <a:fillRef idx="3">
+            <a:schemeClr val="accent1"/>
+          </a:fillRef>
+          <a:effectRef idx="2">
+            <a:schemeClr val="accent1"/>
+          </a:effectRef>
+          <a:fontRef idx="minor">
+            <a:schemeClr val="lt1"/>
+          </a:fontRef>
+        </p:style>
+        <p:txBody>
+          <a:bodyPr rtlCol="0" anchor="ctr"/>
+          <a:lstStyle/>
+          <a:p>
+            <a:pPr algn="ctr"/>
+          </a:p>
+        </p:txBody>
+      </p:sp>
+      <p:sp>
+        <p:nvSpPr>
+          <p:cNvPr id="36" name="TextBox 35"/>
+          <p:cNvSpPr txBox="1"/>
+          <p:nvPr/>
+        </p:nvSpPr>
+        <p:spPr>
+          <a:xfrm>
+            <a:off x="3366000" y="2214000"/>
             <a:ext cx="2592000" cy="144000"/>
           </a:xfrm>
           <a:prstGeom prst="rect">
@@ -31163,13 +32267,13 @@
       </p:sp>
       <p:sp>
         <p:nvSpPr>
-          <p:cNvPr id="33" name="TextBox 32"/>
+          <p:cNvPr id="37" name="TextBox 36"/>
           <p:cNvSpPr txBox="1"/>
           <p:nvPr/>
         </p:nvSpPr>
         <p:spPr>
           <a:xfrm>
-            <a:off x="3401999" y="2358000"/>
+            <a:off x="3401999" y="2412000"/>
             <a:ext cx="2556000" cy="162000"/>
           </a:xfrm>
           <a:prstGeom prst="rect">
@@ -31191,20 +32295,55 @@
                 </a:solidFill>
                 <a:latin typeface="Calibri"/>
               </a:rPr>
-              <a:t>• N/D</a:t>
+              <a:t>• Adoption de Copilot : +1,000 entreprises clientes en 2025, générant</a:t>
             </a:r>
           </a:p>
         </p:txBody>
       </p:sp>
       <p:sp>
         <p:nvSpPr>
-          <p:cNvPr id="34" name="Rectangle 33"/>
+          <p:cNvPr id="38" name="TextBox 37"/>
+          <p:cNvSpPr txBox="1"/>
+          <p:nvPr/>
+        </p:nvSpPr>
+        <p:spPr>
+          <a:xfrm>
+            <a:off x="3401999" y="2599200"/>
+            <a:ext cx="2556000" cy="162000"/>
+          </a:xfrm>
+          <a:prstGeom prst="rect">
+            <a:avLst/>
+          </a:prstGeom>
+          <a:noFill/>
+        </p:spPr>
+        <p:txBody>
+          <a:bodyPr wrap="none">
+            <a:spAutoFit/>
+          </a:bodyPr>
+          <a:lstStyle/>
+          <a:p>
+            <a:pPr algn="l"/>
+            <a:r>
+              <a:rPr sz="700" b="0" i="0">
+                <a:solidFill>
+                  <a:srgbClr val="555555"/>
+                </a:solidFill>
+                <a:latin typeface="Calibri"/>
+              </a:rPr>
+              <a:t>• Croissance Azure : +40% YoY en revenus cloud, dépassant la moyenne</a:t>
+            </a:r>
+          </a:p>
+        </p:txBody>
+      </p:sp>
+      <p:sp>
+        <p:nvSpPr>
+          <p:cNvPr id="39" name="Rectangle 38"/>
           <p:cNvSpPr/>
           <p:nvPr/>
         </p:nvSpPr>
         <p:spPr>
           <a:xfrm>
-            <a:off x="6120000" y="2142000"/>
+            <a:off x="6120000" y="2196000"/>
             <a:ext cx="2448000" cy="180000"/>
           </a:xfrm>
           <a:prstGeom prst="rect">
@@ -31241,13 +32380,13 @@
       </p:sp>
       <p:sp>
         <p:nvSpPr>
-          <p:cNvPr id="35" name="TextBox 34"/>
+          <p:cNvPr id="40" name="TextBox 39"/>
           <p:cNvSpPr txBox="1"/>
           <p:nvPr/>
         </p:nvSpPr>
         <p:spPr>
           <a:xfrm>
-            <a:off x="6156000" y="2160000"/>
+            <a:off x="6156000" y="2214000"/>
             <a:ext cx="2376000" cy="144000"/>
           </a:xfrm>
           <a:prstGeom prst="rect">
@@ -31276,13 +32415,13 @@
       </p:sp>
       <p:sp>
         <p:nvSpPr>
-          <p:cNvPr id="36" name="TextBox 35"/>
+          <p:cNvPr id="41" name="TextBox 40"/>
           <p:cNvSpPr txBox="1"/>
           <p:nvPr/>
         </p:nvSpPr>
         <p:spPr>
           <a:xfrm>
-            <a:off x="6156000" y="2358000"/>
+            <a:off x="6156000" y="2412000"/>
             <a:ext cx="2376000" cy="162000"/>
           </a:xfrm>
           <a:prstGeom prst="rect">
@@ -31304,14 +32443,170 @@
                 </a:solidFill>
                 <a:latin typeface="Calibri"/>
               </a:rPr>
-              <a:t>• N/D</a:t>
+              <a:t>• Régulation antitrust : risque de sanctions financières ou de</a:t>
             </a:r>
           </a:p>
         </p:txBody>
       </p:sp>
       <p:sp>
         <p:nvSpPr>
-          <p:cNvPr id="37" name="TextBox 36"/>
+          <p:cNvPr id="42" name="TextBox 41"/>
+          <p:cNvSpPr txBox="1"/>
+          <p:nvPr/>
+        </p:nvSpPr>
+        <p:spPr>
+          <a:xfrm>
+            <a:off x="6156000" y="2599200"/>
+            <a:ext cx="2376000" cy="162000"/>
+          </a:xfrm>
+          <a:prstGeom prst="rect">
+            <a:avLst/>
+          </a:prstGeom>
+          <a:noFill/>
+        </p:spPr>
+        <p:txBody>
+          <a:bodyPr wrap="none">
+            <a:spAutoFit/>
+          </a:bodyPr>
+          <a:lstStyle/>
+          <a:p>
+            <a:pPr algn="l"/>
+            <a:r>
+              <a:rPr sz="700" b="0" i="0">
+                <a:solidFill>
+                  <a:srgbClr val="555555"/>
+                </a:solidFill>
+                <a:latin typeface="Calibri"/>
+              </a:rPr>
+              <a:t>• Concurrence cloud : pression sur les parts de marché d'Azure face à</a:t>
+            </a:r>
+          </a:p>
+        </p:txBody>
+      </p:sp>
+      <p:sp>
+        <p:nvSpPr>
+          <p:cNvPr id="43" name="Rectangle 42"/>
+          <p:cNvSpPr/>
+          <p:nvPr/>
+        </p:nvSpPr>
+        <p:spPr>
+          <a:xfrm>
+            <a:off x="3311999" y="2930400"/>
+            <a:ext cx="5472000" cy="162000"/>
+          </a:xfrm>
+          <a:prstGeom prst="rect">
+            <a:avLst/>
+          </a:prstGeom>
+          <a:solidFill>
+            <a:srgbClr val="FFF3CD"/>
+          </a:solidFill>
+          <a:ln>
+            <a:noFill/>
+          </a:ln>
+        </p:spPr>
+        <p:style>
+          <a:lnRef idx="1">
+            <a:schemeClr val="accent1"/>
+          </a:lnRef>
+          <a:fillRef idx="3">
+            <a:schemeClr val="accent1"/>
+          </a:fillRef>
+          <a:effectRef idx="2">
+            <a:schemeClr val="accent1"/>
+          </a:effectRef>
+          <a:fontRef idx="minor">
+            <a:schemeClr val="lt1"/>
+          </a:fontRef>
+        </p:style>
+        <p:txBody>
+          <a:bodyPr rtlCol="0" anchor="ctr"/>
+          <a:lstStyle/>
+          <a:p>
+            <a:pPr algn="ctr"/>
+          </a:p>
+        </p:txBody>
+      </p:sp>
+      <p:sp>
+        <p:nvSpPr>
+          <p:cNvPr id="44" name="Rectangle 43"/>
+          <p:cNvSpPr/>
+          <p:nvPr/>
+        </p:nvSpPr>
+        <p:spPr>
+          <a:xfrm>
+            <a:off x="3311999" y="2930400"/>
+            <a:ext cx="36000" cy="162000"/>
+          </a:xfrm>
+          <a:prstGeom prst="rect">
+            <a:avLst/>
+          </a:prstGeom>
+          <a:solidFill>
+            <a:srgbClr val="B06000"/>
+          </a:solidFill>
+          <a:ln>
+            <a:noFill/>
+          </a:ln>
+        </p:spPr>
+        <p:style>
+          <a:lnRef idx="1">
+            <a:schemeClr val="accent1"/>
+          </a:lnRef>
+          <a:fillRef idx="3">
+            <a:schemeClr val="accent1"/>
+          </a:fillRef>
+          <a:effectRef idx="2">
+            <a:schemeClr val="accent1"/>
+          </a:effectRef>
+          <a:fontRef idx="minor">
+            <a:schemeClr val="lt1"/>
+          </a:fontRef>
+        </p:style>
+        <p:txBody>
+          <a:bodyPr rtlCol="0" anchor="ctr"/>
+          <a:lstStyle/>
+          <a:p>
+            <a:pPr algn="ctr"/>
+          </a:p>
+        </p:txBody>
+      </p:sp>
+      <p:sp>
+        <p:nvSpPr>
+          <p:cNvPr id="45" name="TextBox 44"/>
+          <p:cNvSpPr txBox="1"/>
+          <p:nvPr/>
+        </p:nvSpPr>
+        <p:spPr>
+          <a:xfrm>
+            <a:off x="3401999" y="2944800"/>
+            <a:ext cx="5346000" cy="136800"/>
+          </a:xfrm>
+          <a:prstGeom prst="rect">
+            <a:avLst/>
+          </a:prstGeom>
+          <a:noFill/>
+        </p:spPr>
+        <p:txBody>
+          <a:bodyPr wrap="square">
+            <a:spAutoFit/>
+          </a:bodyPr>
+          <a:lstStyle/>
+          <a:p>
+            <a:pPr algn="l"/>
+            <a:r>
+              <a:rPr sz="750" b="0" i="0">
+                <a:solidFill>
+                  <a:srgbClr val="7A5000"/>
+                </a:solidFill>
+                <a:latin typeface="Calibri"/>
+              </a:rPr>
+              <a:t>⚠ Conditions d’invalidation : Macro: Récession mondiale entraînant une baisse de 10% des dépenses  ·  Sectoriel: Concurrence accrue dans le cloud réduisant la part de marché</a:t>
+            </a:r>
+          </a:p>
+        </p:txBody>
+      </p:sp>
+      <p:sp>
+        <p:nvSpPr>
+          <p:cNvPr id="46" name="TextBox 45"/>
           <p:cNvSpPr txBox="1"/>
           <p:nvPr/>
         </p:nvSpPr>
@@ -32382,7 +33677,7 @@
                 </a:solidFill>
                 <a:latin typeface="Calibri"/>
               </a:rPr>
-              <a:t>Risques structurels &amp; thèse contraire</a:t>
+              <a:t>Régulation antitrust  ·  Concurrence cloud</a:t>
             </a:r>
           </a:p>
         </p:txBody>
@@ -33616,21 +34911,64 @@
                 </a:solidFill>
                 <a:latin typeface="Calibri"/>
               </a:rPr>
-              <a:t>Microsoft Corporation (MSFT) opere dans le secteur Technology. Analyse FinSight IA en cours -- donnees de synthese non disponibles pour cette session. Lancer une nouvelle analyse pour obtenir la description complete, les segments et le positionnement strategique.</a:t>
+              <a:t>Microsoft est un leader mondial des logiciels, du cloud et des solutions d'intelligence artificielle, avec une offre intégrée couvrant Windows, Office 365, Azure et LinkedIn. Son positionnement repose sur un écosystème fermé et une adoption massive par les entreprises et consommateurs, renforçant sa résilience face aux cycles économiques. Les avantages concurrentiels incluent des coûts marginaux quasi nuls pour les logiciels, une base d'utilisateurs captive et une capacité d'innovation soutenue par des investissements R&amp;D records. L'entreprise articule son activité autour de deux segments stratégiques :</a:t>
             </a:r>
           </a:p>
         </p:txBody>
       </p:sp>
       <p:sp>
         <p:nvSpPr>
-          <p:cNvPr id="20" name="TextBox 19"/>
+          <p:cNvPr id="20" name="Rectangle 19"/>
+          <p:cNvSpPr/>
+          <p:nvPr/>
+        </p:nvSpPr>
+        <p:spPr>
+          <a:xfrm>
+            <a:off x="503999" y="2599200"/>
+            <a:ext cx="64800" cy="64800"/>
+          </a:xfrm>
+          <a:prstGeom prst="rect">
+            <a:avLst/>
+          </a:prstGeom>
+          <a:solidFill>
+            <a:srgbClr val="2E5FA3"/>
+          </a:solidFill>
+          <a:ln>
+            <a:noFill/>
+          </a:ln>
+        </p:spPr>
+        <p:style>
+          <a:lnRef idx="1">
+            <a:schemeClr val="accent1"/>
+          </a:lnRef>
+          <a:fillRef idx="3">
+            <a:schemeClr val="accent1"/>
+          </a:fillRef>
+          <a:effectRef idx="2">
+            <a:schemeClr val="accent1"/>
+          </a:effectRef>
+          <a:fontRef idx="minor">
+            <a:schemeClr val="lt1"/>
+          </a:fontRef>
+        </p:style>
+        <p:txBody>
+          <a:bodyPr rtlCol="0" anchor="ctr"/>
+          <a:lstStyle/>
+          <a:p>
+            <a:pPr algn="ctr"/>
+          </a:p>
+        </p:txBody>
+      </p:sp>
+      <p:sp>
+        <p:nvSpPr>
+          <p:cNvPr id="21" name="TextBox 20"/>
           <p:cNvSpPr txBox="1"/>
           <p:nvPr/>
         </p:nvSpPr>
         <p:spPr>
           <a:xfrm>
-            <a:off x="503999" y="2358000"/>
-            <a:ext cx="4662000" cy="183600"/>
+            <a:off x="619200" y="2556000"/>
+            <a:ext cx="4338000" cy="165600"/>
           </a:xfrm>
           <a:prstGeom prst="rect">
             <a:avLst/>
@@ -33645,20 +34983,168 @@
           <a:p>
             <a:pPr algn="l"/>
             <a:r>
-              <a:rPr sz="900" b="1" i="0">
+              <a:rPr sz="850" b="1" i="0">
                 <a:solidFill>
-                  <a:srgbClr val="1B3A6B"/>
+                  <a:srgbClr val="0D0D0D"/>
                 </a:solidFill>
                 <a:latin typeface="Calibri"/>
               </a:rPr>
-              <a:t>Positionnement stratégique</a:t>
+              <a:t>Productivité et Entreprise</a:t>
             </a:r>
           </a:p>
         </p:txBody>
       </p:sp>
       <p:sp>
         <p:nvSpPr>
-          <p:cNvPr id="21" name="Rectangle 20"/>
+          <p:cNvPr id="22" name="TextBox 21"/>
+          <p:cNvSpPr txBox="1"/>
+          <p:nvPr/>
+        </p:nvSpPr>
+        <p:spPr>
+          <a:xfrm>
+            <a:off x="619200" y="2714400"/>
+            <a:ext cx="4338000" cy="503999"/>
+          </a:xfrm>
+          <a:prstGeom prst="rect">
+            <a:avLst/>
+          </a:prstGeom>
+          <a:noFill/>
+        </p:spPr>
+        <p:txBody>
+          <a:bodyPr wrap="square">
+            <a:spAutoFit/>
+          </a:bodyPr>
+          <a:lstStyle/>
+          <a:p>
+            <a:pPr algn="l"/>
+            <a:r>
+              <a:rPr sz="750" b="0" i="1">
+                <a:solidFill>
+                  <a:srgbClr val="555555"/>
+                </a:solidFill>
+                <a:latin typeface="Calibri"/>
+              </a:rPr>
+              <a:t>Ce segment génère des revenus récurrents via des abonnements (Office 365, Microsoft 365) et des licences perpétuelles, avec une base de 400M+ utilisateurs actifs. Les clients cibles sont les entreprises et particuliers, avec une croissance tirée par l'adoption du cloud et des outils collaboratifs. Les moteurs incluent l'IA intégrée (Copilot) et la migration vers le SaaS.</a:t>
+            </a:r>
+          </a:p>
+        </p:txBody>
+      </p:sp>
+      <p:sp>
+        <p:nvSpPr>
+          <p:cNvPr id="23" name="Rectangle 22"/>
+          <p:cNvSpPr/>
+          <p:nvPr/>
+        </p:nvSpPr>
+        <p:spPr>
+          <a:xfrm>
+            <a:off x="503999" y="3301199"/>
+            <a:ext cx="64800" cy="64800"/>
+          </a:xfrm>
+          <a:prstGeom prst="rect">
+            <a:avLst/>
+          </a:prstGeom>
+          <a:solidFill>
+            <a:srgbClr val="2E5FA3"/>
+          </a:solidFill>
+          <a:ln>
+            <a:noFill/>
+          </a:ln>
+        </p:spPr>
+        <p:style>
+          <a:lnRef idx="1">
+            <a:schemeClr val="accent1"/>
+          </a:lnRef>
+          <a:fillRef idx="3">
+            <a:schemeClr val="accent1"/>
+          </a:fillRef>
+          <a:effectRef idx="2">
+            <a:schemeClr val="accent1"/>
+          </a:effectRef>
+          <a:fontRef idx="minor">
+            <a:schemeClr val="lt1"/>
+          </a:fontRef>
+        </p:style>
+        <p:txBody>
+          <a:bodyPr rtlCol="0" anchor="ctr"/>
+          <a:lstStyle/>
+          <a:p>
+            <a:pPr algn="ctr"/>
+          </a:p>
+        </p:txBody>
+      </p:sp>
+      <p:sp>
+        <p:nvSpPr>
+          <p:cNvPr id="24" name="TextBox 23"/>
+          <p:cNvSpPr txBox="1"/>
+          <p:nvPr/>
+        </p:nvSpPr>
+        <p:spPr>
+          <a:xfrm>
+            <a:off x="619200" y="3257999"/>
+            <a:ext cx="4338000" cy="165600"/>
+          </a:xfrm>
+          <a:prstGeom prst="rect">
+            <a:avLst/>
+          </a:prstGeom>
+          <a:noFill/>
+        </p:spPr>
+        <p:txBody>
+          <a:bodyPr wrap="square">
+            <a:spAutoFit/>
+          </a:bodyPr>
+          <a:lstStyle/>
+          <a:p>
+            <a:pPr algn="l"/>
+            <a:r>
+              <a:rPr sz="850" b="1" i="0">
+                <a:solidFill>
+                  <a:srgbClr val="0D0D0D"/>
+                </a:solidFill>
+                <a:latin typeface="Calibri"/>
+              </a:rPr>
+              <a:t>Cloud et IA</a:t>
+            </a:r>
+          </a:p>
+        </p:txBody>
+      </p:sp>
+      <p:sp>
+        <p:nvSpPr>
+          <p:cNvPr id="25" name="TextBox 24"/>
+          <p:cNvSpPr txBox="1"/>
+          <p:nvPr/>
+        </p:nvSpPr>
+        <p:spPr>
+          <a:xfrm>
+            <a:off x="619200" y="3416399"/>
+            <a:ext cx="4338000" cy="503999"/>
+          </a:xfrm>
+          <a:prstGeom prst="rect">
+            <a:avLst/>
+          </a:prstGeom>
+          <a:noFill/>
+        </p:spPr>
+        <p:txBody>
+          <a:bodyPr wrap="square">
+            <a:spAutoFit/>
+          </a:bodyPr>
+          <a:lstStyle/>
+          <a:p>
+            <a:pPr algn="l"/>
+            <a:r>
+              <a:rPr sz="750" b="0" i="1">
+                <a:solidFill>
+                  <a:srgbClr val="555555"/>
+                </a:solidFill>
+                <a:latin typeface="Calibri"/>
+              </a:rPr>
+              <a:t>Segment en hypercroissance porté par Azure, la plateforme cloud leader avec 24% de part de marché, et les services d'IA générative (Azure AI). Les revenus proviennent des services cloud (IaaS, PaaS) et des solutions d'IA, avec des clients cibles allant des startups aux entreprises du CAC 40. Les moteurs incluent la demande en infrastructure scalable et en outils d'IA d'entreprise.</a:t>
+            </a:r>
+          </a:p>
+        </p:txBody>
+      </p:sp>
+      <p:sp>
+        <p:nvSpPr>
+          <p:cNvPr id="26" name="Rectangle 25"/>
           <p:cNvSpPr/>
           <p:nvPr/>
         </p:nvSpPr>
@@ -33701,7 +35187,7 @@
       </p:sp>
       <p:sp>
         <p:nvSpPr>
-          <p:cNvPr id="22" name="Rectangle 21"/>
+          <p:cNvPr id="27" name="Rectangle 26"/>
           <p:cNvSpPr/>
           <p:nvPr/>
         </p:nvSpPr>
@@ -33744,7 +35230,7 @@
       </p:sp>
       <p:sp>
         <p:nvSpPr>
-          <p:cNvPr id="23" name="TextBox 22"/>
+          <p:cNvPr id="28" name="TextBox 27"/>
           <p:cNvSpPr txBox="1"/>
           <p:nvPr/>
         </p:nvSpPr>
@@ -33779,7 +35265,7 @@
       </p:sp>
       <p:sp>
         <p:nvSpPr>
-          <p:cNvPr id="24" name="TextBox 23"/>
+          <p:cNvPr id="29" name="TextBox 28"/>
           <p:cNvSpPr txBox="1"/>
           <p:nvPr/>
         </p:nvSpPr>
@@ -33814,7 +35300,7 @@
       </p:sp>
       <p:sp>
         <p:nvSpPr>
-          <p:cNvPr id="25" name="Rectangle 24"/>
+          <p:cNvPr id="30" name="Rectangle 29"/>
           <p:cNvSpPr/>
           <p:nvPr/>
         </p:nvSpPr>
@@ -33857,7 +35343,7 @@
       </p:sp>
       <p:sp>
         <p:nvSpPr>
-          <p:cNvPr id="26" name="Rectangle 25"/>
+          <p:cNvPr id="31" name="Rectangle 30"/>
           <p:cNvSpPr/>
           <p:nvPr/>
         </p:nvSpPr>
@@ -33900,7 +35386,7 @@
       </p:sp>
       <p:sp>
         <p:nvSpPr>
-          <p:cNvPr id="27" name="TextBox 26"/>
+          <p:cNvPr id="32" name="TextBox 31"/>
           <p:cNvSpPr txBox="1"/>
           <p:nvPr/>
         </p:nvSpPr>
@@ -33935,7 +35421,7 @@
       </p:sp>
       <p:sp>
         <p:nvSpPr>
-          <p:cNvPr id="28" name="TextBox 27"/>
+          <p:cNvPr id="33" name="TextBox 32"/>
           <p:cNvSpPr txBox="1"/>
           <p:nvPr/>
         </p:nvSpPr>
@@ -33970,7 +35456,7 @@
       </p:sp>
       <p:sp>
         <p:nvSpPr>
-          <p:cNvPr id="29" name="Rectangle 28"/>
+          <p:cNvPr id="34" name="Rectangle 33"/>
           <p:cNvSpPr/>
           <p:nvPr/>
         </p:nvSpPr>
@@ -34013,7 +35499,7 @@
       </p:sp>
       <p:sp>
         <p:nvSpPr>
-          <p:cNvPr id="30" name="Rectangle 29"/>
+          <p:cNvPr id="35" name="Rectangle 34"/>
           <p:cNvSpPr/>
           <p:nvPr/>
         </p:nvSpPr>
@@ -34056,7 +35542,7 @@
       </p:sp>
       <p:sp>
         <p:nvSpPr>
-          <p:cNvPr id="31" name="TextBox 30"/>
+          <p:cNvPr id="36" name="TextBox 35"/>
           <p:cNvSpPr txBox="1"/>
           <p:nvPr/>
         </p:nvSpPr>
@@ -34091,7 +35577,7 @@
       </p:sp>
       <p:sp>
         <p:nvSpPr>
-          <p:cNvPr id="32" name="TextBox 31"/>
+          <p:cNvPr id="37" name="TextBox 36"/>
           <p:cNvSpPr txBox="1"/>
           <p:nvPr/>
         </p:nvSpPr>
@@ -34126,7 +35612,7 @@
       </p:sp>
       <p:sp>
         <p:nvSpPr>
-          <p:cNvPr id="33" name="Rectangle 32"/>
+          <p:cNvPr id="38" name="Rectangle 37"/>
           <p:cNvSpPr/>
           <p:nvPr/>
         </p:nvSpPr>
@@ -34169,7 +35655,7 @@
       </p:sp>
       <p:sp>
         <p:nvSpPr>
-          <p:cNvPr id="34" name="Rectangle 33"/>
+          <p:cNvPr id="39" name="Rectangle 38"/>
           <p:cNvSpPr/>
           <p:nvPr/>
         </p:nvSpPr>
@@ -34212,7 +35698,7 @@
       </p:sp>
       <p:sp>
         <p:nvSpPr>
-          <p:cNvPr id="35" name="TextBox 34"/>
+          <p:cNvPr id="40" name="TextBox 39"/>
           <p:cNvSpPr txBox="1"/>
           <p:nvPr/>
         </p:nvSpPr>
@@ -34247,7 +35733,7 @@
       </p:sp>
       <p:sp>
         <p:nvSpPr>
-          <p:cNvPr id="36" name="TextBox 35"/>
+          <p:cNvPr id="41" name="TextBox 40"/>
           <p:cNvSpPr txBox="1"/>
           <p:nvPr/>
         </p:nvSpPr>
@@ -34282,7 +35768,7 @@
       </p:sp>
       <p:sp>
         <p:nvSpPr>
-          <p:cNvPr id="37" name="TextBox 36"/>
+          <p:cNvPr id="42" name="TextBox 41"/>
           <p:cNvSpPr txBox="1"/>
           <p:nvPr/>
         </p:nvSpPr>
@@ -34923,7 +36409,7 @@
         <p:spPr>
           <a:xfrm>
             <a:off x="367200" y="961200"/>
-            <a:ext cx="2731199" cy="3520800"/>
+            <a:ext cx="4150800" cy="3520800"/>
           </a:xfrm>
           <a:prstGeom prst="rect">
             <a:avLst/>
@@ -34966,7 +36452,7 @@
         <p:spPr>
           <a:xfrm>
             <a:off x="367200" y="961200"/>
-            <a:ext cx="2731199" cy="54000"/>
+            <a:ext cx="4150800" cy="54000"/>
           </a:xfrm>
           <a:prstGeom prst="rect">
             <a:avLst/>
@@ -35009,7 +36495,7 @@
         <p:spPr>
           <a:xfrm>
             <a:off x="457200" y="1141200"/>
-            <a:ext cx="2551199" cy="640800"/>
+            <a:ext cx="3970800" cy="640800"/>
           </a:xfrm>
           <a:prstGeom prst="rect">
             <a:avLst/>
@@ -35030,7 +36516,7 @@
                 </a:solidFill>
                 <a:latin typeface="Calibri"/>
               </a:rPr>
-              <a:t>—</a:t>
+              <a:t>42%</a:t>
             </a:r>
           </a:p>
         </p:txBody>
@@ -35044,7 +36530,7 @@
         <p:spPr>
           <a:xfrm>
             <a:off x="457200" y="1785600"/>
-            <a:ext cx="2551199" cy="108000"/>
+            <a:ext cx="3970800" cy="108000"/>
           </a:xfrm>
           <a:prstGeom prst="rect">
             <a:avLst/>
@@ -35079,7 +36565,7 @@
         <p:spPr>
           <a:xfrm>
             <a:off x="457200" y="1965600"/>
-            <a:ext cx="2551199" cy="18000"/>
+            <a:ext cx="3970800" cy="18000"/>
           </a:xfrm>
           <a:prstGeom prst="rect">
             <a:avLst/>
@@ -35122,7 +36608,7 @@
         <p:spPr>
           <a:xfrm>
             <a:off x="457200" y="2059200"/>
-            <a:ext cx="2551199" cy="255600"/>
+            <a:ext cx="3970800" cy="255600"/>
           </a:xfrm>
           <a:prstGeom prst="rect">
             <a:avLst/>
@@ -35143,7 +36629,7 @@
                 </a:solidFill>
                 <a:latin typeface="Calibri"/>
               </a:rPr>
-              <a:t>Core Business</a:t>
+              <a:t>Productivité et Entreprise</a:t>
             </a:r>
           </a:p>
         </p:txBody>
@@ -35157,7 +36643,7 @@
         <p:spPr>
           <a:xfrm>
             <a:off x="457200" y="2332800"/>
-            <a:ext cx="2551199" cy="2041199"/>
+            <a:ext cx="3970800" cy="2041199"/>
           </a:xfrm>
           <a:prstGeom prst="rect">
             <a:avLst/>
@@ -35178,7 +36664,7 @@
                 </a:solidFill>
                 <a:latin typeface="Calibri"/>
               </a:rPr>
-              <a:t>—</a:t>
+              <a:t>Ce segment génère des revenus récurrents via des abonnements (Office 365, Microsoft 365) et des licences perpétuelles, avec une base de 400M+ utilisateurs actifs. Les clients cibles sont les entreprises et particuliers, avec une croissance tirée par l'adoption du cloud et des outils collaboratifs. Les moteurs incluent l'IA intégrée (Copilot) et la migration vers le SaaS.</a:t>
             </a:r>
           </a:p>
         </p:txBody>
@@ -35191,8 +36677,8 @@
         </p:nvSpPr>
         <p:spPr>
           <a:xfrm>
-            <a:off x="3206400" y="961200"/>
-            <a:ext cx="2731199" cy="3520800"/>
+            <a:off x="4626000" y="961200"/>
+            <a:ext cx="4150800" cy="3520800"/>
           </a:xfrm>
           <a:prstGeom prst="rect">
             <a:avLst/>
@@ -35234,8 +36720,8 @@
         </p:nvSpPr>
         <p:spPr>
           <a:xfrm>
-            <a:off x="3206400" y="961200"/>
-            <a:ext cx="2731199" cy="54000"/>
+            <a:off x="4626000" y="961200"/>
+            <a:ext cx="4150800" cy="54000"/>
           </a:xfrm>
           <a:prstGeom prst="rect">
             <a:avLst/>
@@ -35277,8 +36763,8 @@
         </p:nvSpPr>
         <p:spPr>
           <a:xfrm>
-            <a:off x="3296400" y="1141200"/>
-            <a:ext cx="2551199" cy="640800"/>
+            <a:off x="4716000" y="1141200"/>
+            <a:ext cx="3970800" cy="640800"/>
           </a:xfrm>
           <a:prstGeom prst="rect">
             <a:avLst/>
@@ -35299,7 +36785,7 @@
                 </a:solidFill>
                 <a:latin typeface="Calibri"/>
               </a:rPr>
-              <a:t>—</a:t>
+              <a:t>38%</a:t>
             </a:r>
           </a:p>
         </p:txBody>
@@ -35312,8 +36798,8 @@
         </p:nvSpPr>
         <p:spPr>
           <a:xfrm>
-            <a:off x="3296400" y="1785600"/>
-            <a:ext cx="2551199" cy="108000"/>
+            <a:off x="4716000" y="1785600"/>
+            <a:ext cx="3970800" cy="108000"/>
           </a:xfrm>
           <a:prstGeom prst="rect">
             <a:avLst/>
@@ -35347,8 +36833,8 @@
         </p:nvSpPr>
         <p:spPr>
           <a:xfrm>
-            <a:off x="3296400" y="1965600"/>
-            <a:ext cx="2551199" cy="18000"/>
+            <a:off x="4716000" y="1965600"/>
+            <a:ext cx="3970800" cy="18000"/>
           </a:xfrm>
           <a:prstGeom prst="rect">
             <a:avLst/>
@@ -35390,8 +36876,8 @@
         </p:nvSpPr>
         <p:spPr>
           <a:xfrm>
-            <a:off x="3296400" y="2059200"/>
-            <a:ext cx="2551199" cy="255600"/>
+            <a:off x="4716000" y="2059200"/>
+            <a:ext cx="3970800" cy="255600"/>
           </a:xfrm>
           <a:prstGeom prst="rect">
             <a:avLst/>
@@ -35412,7 +36898,7 @@
                 </a:solidFill>
                 <a:latin typeface="Calibri"/>
               </a:rPr>
-              <a:t>Growth Driver</a:t>
+              <a:t>Cloud et IA</a:t>
             </a:r>
           </a:p>
         </p:txBody>
@@ -35425,8 +36911,8 @@
         </p:nvSpPr>
         <p:spPr>
           <a:xfrm>
-            <a:off x="3296400" y="2332800"/>
-            <a:ext cx="2551199" cy="2041199"/>
+            <a:off x="4716000" y="2332800"/>
+            <a:ext cx="3970800" cy="2041199"/>
           </a:xfrm>
           <a:prstGeom prst="rect">
             <a:avLst/>
@@ -35447,276 +36933,7 @@
                 </a:solidFill>
                 <a:latin typeface="Calibri"/>
               </a:rPr>
-              <a:t>—</a:t>
-            </a:r>
-          </a:p>
-        </p:txBody>
-      </p:sp>
-      <p:sp>
-        <p:nvSpPr>
-          <p:cNvPr id="31" name="Rectangle 30"/>
-          <p:cNvSpPr/>
-          <p:nvPr/>
-        </p:nvSpPr>
-        <p:spPr>
-          <a:xfrm>
-            <a:off x="6045600" y="961200"/>
-            <a:ext cx="2731199" cy="3520800"/>
-          </a:xfrm>
-          <a:prstGeom prst="rect">
-            <a:avLst/>
-          </a:prstGeom>
-          <a:solidFill>
-            <a:srgbClr val="F7F8FA"/>
-          </a:solidFill>
-          <a:ln>
-            <a:noFill/>
-          </a:ln>
-        </p:spPr>
-        <p:style>
-          <a:lnRef idx="1">
-            <a:schemeClr val="accent1"/>
-          </a:lnRef>
-          <a:fillRef idx="3">
-            <a:schemeClr val="accent1"/>
-          </a:fillRef>
-          <a:effectRef idx="2">
-            <a:schemeClr val="accent1"/>
-          </a:effectRef>
-          <a:fontRef idx="minor">
-            <a:schemeClr val="lt1"/>
-          </a:fontRef>
-        </p:style>
-        <p:txBody>
-          <a:bodyPr rtlCol="0" anchor="ctr"/>
-          <a:lstStyle/>
-          <a:p>
-            <a:pPr algn="ctr"/>
-          </a:p>
-        </p:txBody>
-      </p:sp>
-      <p:sp>
-        <p:nvSpPr>
-          <p:cNvPr id="32" name="Rectangle 31"/>
-          <p:cNvSpPr/>
-          <p:nvPr/>
-        </p:nvSpPr>
-        <p:spPr>
-          <a:xfrm>
-            <a:off x="6045600" y="961200"/>
-            <a:ext cx="2731199" cy="54000"/>
-          </a:xfrm>
-          <a:prstGeom prst="rect">
-            <a:avLst/>
-          </a:prstGeom>
-          <a:solidFill>
-            <a:srgbClr val="888888"/>
-          </a:solidFill>
-          <a:ln>
-            <a:noFill/>
-          </a:ln>
-        </p:spPr>
-        <p:style>
-          <a:lnRef idx="1">
-            <a:schemeClr val="accent1"/>
-          </a:lnRef>
-          <a:fillRef idx="3">
-            <a:schemeClr val="accent1"/>
-          </a:fillRef>
-          <a:effectRef idx="2">
-            <a:schemeClr val="accent1"/>
-          </a:effectRef>
-          <a:fontRef idx="minor">
-            <a:schemeClr val="lt1"/>
-          </a:fontRef>
-        </p:style>
-        <p:txBody>
-          <a:bodyPr rtlCol="0" anchor="ctr"/>
-          <a:lstStyle/>
-          <a:p>
-            <a:pPr algn="ctr"/>
-          </a:p>
-        </p:txBody>
-      </p:sp>
-      <p:sp>
-        <p:nvSpPr>
-          <p:cNvPr id="33" name="TextBox 32"/>
-          <p:cNvSpPr txBox="1"/>
-          <p:nvPr/>
-        </p:nvSpPr>
-        <p:spPr>
-          <a:xfrm>
-            <a:off x="6135600" y="1141200"/>
-            <a:ext cx="2551199" cy="640800"/>
-          </a:xfrm>
-          <a:prstGeom prst="rect">
-            <a:avLst/>
-          </a:prstGeom>
-          <a:noFill/>
-        </p:spPr>
-        <p:txBody>
-          <a:bodyPr wrap="square">
-            <a:spAutoFit/>
-          </a:bodyPr>
-          <a:lstStyle/>
-          <a:p>
-            <a:pPr algn="l"/>
-            <a:r>
-              <a:rPr sz="2200" b="1" i="0">
-                <a:solidFill>
-                  <a:srgbClr val="888888"/>
-                </a:solidFill>
-                <a:latin typeface="Calibri"/>
-              </a:rPr>
-              <a:t>—</a:t>
-            </a:r>
-          </a:p>
-        </p:txBody>
-      </p:sp>
-      <p:sp>
-        <p:nvSpPr>
-          <p:cNvPr id="34" name="TextBox 33"/>
-          <p:cNvSpPr txBox="1"/>
-          <p:nvPr/>
-        </p:nvSpPr>
-        <p:spPr>
-          <a:xfrm>
-            <a:off x="6135600" y="1785600"/>
-            <a:ext cx="2551199" cy="108000"/>
-          </a:xfrm>
-          <a:prstGeom prst="rect">
-            <a:avLst/>
-          </a:prstGeom>
-          <a:noFill/>
-        </p:spPr>
-        <p:txBody>
-          <a:bodyPr wrap="square">
-            <a:spAutoFit/>
-          </a:bodyPr>
-          <a:lstStyle/>
-          <a:p>
-            <a:pPr algn="l"/>
-            <a:r>
-              <a:rPr sz="900" b="0" i="0">
-                <a:solidFill>
-                  <a:srgbClr val="555555"/>
-                </a:solidFill>
-                <a:latin typeface="Calibri"/>
-              </a:rPr>
-              <a:t>du CA</a:t>
-            </a:r>
-          </a:p>
-        </p:txBody>
-      </p:sp>
-      <p:sp>
-        <p:nvSpPr>
-          <p:cNvPr id="35" name="Rectangle 34"/>
-          <p:cNvSpPr/>
-          <p:nvPr/>
-        </p:nvSpPr>
-        <p:spPr>
-          <a:xfrm>
-            <a:off x="6135600" y="1965600"/>
-            <a:ext cx="2551199" cy="18000"/>
-          </a:xfrm>
-          <a:prstGeom prst="rect">
-            <a:avLst/>
-          </a:prstGeom>
-          <a:solidFill>
-            <a:srgbClr val="888888"/>
-          </a:solidFill>
-          <a:ln>
-            <a:noFill/>
-          </a:ln>
-        </p:spPr>
-        <p:style>
-          <a:lnRef idx="1">
-            <a:schemeClr val="accent1"/>
-          </a:lnRef>
-          <a:fillRef idx="3">
-            <a:schemeClr val="accent1"/>
-          </a:fillRef>
-          <a:effectRef idx="2">
-            <a:schemeClr val="accent1"/>
-          </a:effectRef>
-          <a:fontRef idx="minor">
-            <a:schemeClr val="lt1"/>
-          </a:fontRef>
-        </p:style>
-        <p:txBody>
-          <a:bodyPr rtlCol="0" anchor="ctr"/>
-          <a:lstStyle/>
-          <a:p>
-            <a:pPr algn="ctr"/>
-          </a:p>
-        </p:txBody>
-      </p:sp>
-      <p:sp>
-        <p:nvSpPr>
-          <p:cNvPr id="36" name="TextBox 35"/>
-          <p:cNvSpPr txBox="1"/>
-          <p:nvPr/>
-        </p:nvSpPr>
-        <p:spPr>
-          <a:xfrm>
-            <a:off x="6135600" y="2059200"/>
-            <a:ext cx="2551199" cy="255600"/>
-          </a:xfrm>
-          <a:prstGeom prst="rect">
-            <a:avLst/>
-          </a:prstGeom>
-          <a:noFill/>
-        </p:spPr>
-        <p:txBody>
-          <a:bodyPr wrap="square">
-            <a:spAutoFit/>
-          </a:bodyPr>
-          <a:lstStyle/>
-          <a:p>
-            <a:pPr algn="l"/>
-            <a:r>
-              <a:rPr sz="1000" b="1" i="0">
-                <a:solidFill>
-                  <a:srgbClr val="1B3A6B"/>
-                </a:solidFill>
-                <a:latin typeface="Calibri"/>
-              </a:rPr>
-              <a:t>International</a:t>
-            </a:r>
-          </a:p>
-        </p:txBody>
-      </p:sp>
-      <p:sp>
-        <p:nvSpPr>
-          <p:cNvPr id="37" name="TextBox 36"/>
-          <p:cNvSpPr txBox="1"/>
-          <p:nvPr/>
-        </p:nvSpPr>
-        <p:spPr>
-          <a:xfrm>
-            <a:off x="6135600" y="2332800"/>
-            <a:ext cx="2551199" cy="2041199"/>
-          </a:xfrm>
-          <a:prstGeom prst="rect">
-            <a:avLst/>
-          </a:prstGeom>
-          <a:noFill/>
-        </p:spPr>
-        <p:txBody>
-          <a:bodyPr wrap="square">
-            <a:spAutoFit/>
-          </a:bodyPr>
-          <a:lstStyle/>
-          <a:p>
-            <a:pPr algn="l"/>
-            <a:r>
-              <a:rPr sz="800" b="0" i="0">
-                <a:solidFill>
-                  <a:srgbClr val="555555"/>
-                </a:solidFill>
-                <a:latin typeface="Calibri"/>
-              </a:rPr>
-              <a:t>—</a:t>
+              <a:t>Segment en hypercroissance porté par Azure, la plateforme cloud leader avec 24% de part de marché, et les services d'IA générative (Azure AI). Les revenus proviennent des services cloud (IaaS, PaaS) et des solutions d'IA, avec des clients cibles allant des startups aux entreprises du CAC 40. Les moteurs incluent la demande en infrastructure scalable et en outils d'IA d'entreprise.</a:t>
             </a:r>
           </a:p>
         </p:txBody>
@@ -36568,7 +37785,7 @@
                 </a:solidFill>
                 <a:latin typeface="Calibri"/>
               </a:rPr>
-              <a:t>USD millions  ·  2022–2025</a:t>
+              <a:t>USD millions  ·  2022–2027F</a:t>
             </a:r>
           </a:p>
         </p:txBody>
@@ -36583,7 +37800,7 @@
         </p:nvGraphicFramePr>
         <p:xfrm>
           <a:off x="367200" y="914400"/>
-          <a:ext cx="8413200" cy="1980000"/>
+          <a:ext cx="8413196" cy="1980000"/>
         </p:xfrm>
         <a:graphic>
           <a:graphicData uri="http://schemas.openxmlformats.org/drawingml/2006/table">
@@ -36593,9 +37810,11 @@
               </a:tblPr>
               <a:tblGrid>
                 <a:gridCol w="2355696"/>
-                <a:gridCol w="2019168"/>
-                <a:gridCol w="2019168"/>
-                <a:gridCol w="2019168"/>
+                <a:gridCol w="1211500"/>
+                <a:gridCol w="1211500"/>
+                <a:gridCol w="1211500"/>
+                <a:gridCol w="1211500"/>
+                <a:gridCol w="1211500"/>
               </a:tblGrid>
               <a:tr h="220000">
                 <a:tc>
@@ -36690,6 +37909,52 @@
                     </a:solidFill>
                   </a:tcPr>
                 </a:tc>
+                <a:tc>
+                  <a:txBody>
+                    <a:bodyPr/>
+                    <a:lstStyle/>
+                    <a:p>
+                      <a:pPr algn="ctr"/>
+                      <a:r>
+                        <a:rPr sz="800" b="1" i="0">
+                          <a:solidFill>
+                            <a:srgbClr val="FFFFFF"/>
+                          </a:solidFill>
+                          <a:latin typeface="Calibri"/>
+                        </a:rPr>
+                        <a:t>2026F</a:t>
+                      </a:r>
+                    </a:p>
+                  </a:txBody>
+                  <a:tcPr>
+                    <a:solidFill>
+                      <a:srgbClr val="1B3A6B"/>
+                    </a:solidFill>
+                  </a:tcPr>
+                </a:tc>
+                <a:tc>
+                  <a:txBody>
+                    <a:bodyPr/>
+                    <a:lstStyle/>
+                    <a:p>
+                      <a:pPr algn="ctr"/>
+                      <a:r>
+                        <a:rPr sz="800" b="1" i="0">
+                          <a:solidFill>
+                            <a:srgbClr val="FFFFFF"/>
+                          </a:solidFill>
+                          <a:latin typeface="Calibri"/>
+                        </a:rPr>
+                        <a:t>2027F</a:t>
+                      </a:r>
+                    </a:p>
+                  </a:txBody>
+                  <a:tcPr>
+                    <a:solidFill>
+                      <a:srgbClr val="1B3A6B"/>
+                    </a:solidFill>
+                  </a:tcPr>
+                </a:tc>
               </a:tr>
               <a:tr h="220000">
                 <a:tc>
@@ -36784,6 +38049,52 @@
                     </a:solidFill>
                   </a:tcPr>
                 </a:tc>
+                <a:tc>
+                  <a:txBody>
+                    <a:bodyPr/>
+                    <a:lstStyle/>
+                    <a:p>
+                      <a:pPr algn="ctr"/>
+                      <a:r>
+                        <a:rPr sz="800" b="1" i="0">
+                          <a:solidFill>
+                            <a:srgbClr val="0D0D0D"/>
+                          </a:solidFill>
+                          <a:latin typeface="Calibri"/>
+                        </a:rPr>
+                        <a:t>324,0</a:t>
+                      </a:r>
+                    </a:p>
+                  </a:txBody>
+                  <a:tcPr>
+                    <a:solidFill>
+                      <a:srgbClr val="FFFFFF"/>
+                    </a:solidFill>
+                  </a:tcPr>
+                </a:tc>
+                <a:tc>
+                  <a:txBody>
+                    <a:bodyPr/>
+                    <a:lstStyle/>
+                    <a:p>
+                      <a:pPr algn="ctr"/>
+                      <a:r>
+                        <a:rPr sz="800" b="1" i="0">
+                          <a:solidFill>
+                            <a:srgbClr val="0D0D0D"/>
+                          </a:solidFill>
+                          <a:latin typeface="Calibri"/>
+                        </a:rPr>
+                        <a:t>372,0</a:t>
+                      </a:r>
+                    </a:p>
+                  </a:txBody>
+                  <a:tcPr>
+                    <a:solidFill>
+                      <a:srgbClr val="FFFFFF"/>
+                    </a:solidFill>
+                  </a:tcPr>
+                </a:tc>
               </a:tr>
               <a:tr h="220000">
                 <a:tc>
@@ -36878,6 +38189,52 @@
                     </a:solidFill>
                   </a:tcPr>
                 </a:tc>
+                <a:tc>
+                  <a:txBody>
+                    <a:bodyPr/>
+                    <a:lstStyle/>
+                    <a:p>
+                      <a:pPr algn="ctr"/>
+                      <a:r>
+                        <a:rPr sz="750" b="0" i="1">
+                          <a:solidFill>
+                            <a:srgbClr val="555555"/>
+                          </a:solidFill>
+                          <a:latin typeface="Calibri"/>
+                        </a:rPr>
+                        <a:t>+15,0 %</a:t>
+                      </a:r>
+                    </a:p>
+                  </a:txBody>
+                  <a:tcPr>
+                    <a:solidFill>
+                      <a:srgbClr val="F7F8FA"/>
+                    </a:solidFill>
+                  </a:tcPr>
+                </a:tc>
+                <a:tc>
+                  <a:txBody>
+                    <a:bodyPr/>
+                    <a:lstStyle/>
+                    <a:p>
+                      <a:pPr algn="ctr"/>
+                      <a:r>
+                        <a:rPr sz="750" b="0" i="1">
+                          <a:solidFill>
+                            <a:srgbClr val="555555"/>
+                          </a:solidFill>
+                          <a:latin typeface="Calibri"/>
+                        </a:rPr>
+                        <a:t>+14,8 %</a:t>
+                      </a:r>
+                    </a:p>
+                  </a:txBody>
+                  <a:tcPr>
+                    <a:solidFill>
+                      <a:srgbClr val="F7F8FA"/>
+                    </a:solidFill>
+                  </a:tcPr>
+                </a:tc>
               </a:tr>
               <a:tr h="220000">
                 <a:tc>
@@ -36972,6 +38329,52 @@
                     </a:solidFill>
                   </a:tcPr>
                 </a:tc>
+                <a:tc>
+                  <a:txBody>
+                    <a:bodyPr/>
+                    <a:lstStyle/>
+                    <a:p>
+                      <a:pPr algn="ctr"/>
+                      <a:r>
+                        <a:rPr sz="800" b="1" i="0">
+                          <a:solidFill>
+                            <a:srgbClr val="0D0D0D"/>
+                          </a:solidFill>
+                          <a:latin typeface="Calibri"/>
+                        </a:rPr>
+                        <a:t>223,6</a:t>
+                      </a:r>
+                    </a:p>
+                  </a:txBody>
+                  <a:tcPr>
+                    <a:solidFill>
+                      <a:srgbClr val="FFFFFF"/>
+                    </a:solidFill>
+                  </a:tcPr>
+                </a:tc>
+                <a:tc>
+                  <a:txBody>
+                    <a:bodyPr/>
+                    <a:lstStyle/>
+                    <a:p>
+                      <a:pPr algn="ctr"/>
+                      <a:r>
+                        <a:rPr sz="800" b="1" i="0">
+                          <a:solidFill>
+                            <a:srgbClr val="0D0D0D"/>
+                          </a:solidFill>
+                          <a:latin typeface="Calibri"/>
+                        </a:rPr>
+                        <a:t>260,4</a:t>
+                      </a:r>
+                    </a:p>
+                  </a:txBody>
+                  <a:tcPr>
+                    <a:solidFill>
+                      <a:srgbClr val="FFFFFF"/>
+                    </a:solidFill>
+                  </a:tcPr>
+                </a:tc>
               </a:tr>
               <a:tr h="220000">
                 <a:tc>
@@ -37066,6 +38469,52 @@
                     </a:solidFill>
                   </a:tcPr>
                 </a:tc>
+                <a:tc>
+                  <a:txBody>
+                    <a:bodyPr/>
+                    <a:lstStyle/>
+                    <a:p>
+                      <a:pPr algn="ctr"/>
+                      <a:r>
+                        <a:rPr sz="750" b="0" i="1">
+                          <a:solidFill>
+                            <a:srgbClr val="555555"/>
+                          </a:solidFill>
+                          <a:latin typeface="Calibri"/>
+                        </a:rPr>
+                        <a:t>69,0 %</a:t>
+                      </a:r>
+                    </a:p>
+                  </a:txBody>
+                  <a:tcPr>
+                    <a:solidFill>
+                      <a:srgbClr val="F7F8FA"/>
+                    </a:solidFill>
+                  </a:tcPr>
+                </a:tc>
+                <a:tc>
+                  <a:txBody>
+                    <a:bodyPr/>
+                    <a:lstStyle/>
+                    <a:p>
+                      <a:pPr algn="ctr"/>
+                      <a:r>
+                        <a:rPr sz="750" b="0" i="1">
+                          <a:solidFill>
+                            <a:srgbClr val="555555"/>
+                          </a:solidFill>
+                          <a:latin typeface="Calibri"/>
+                        </a:rPr>
+                        <a:t>70,0 %</a:t>
+                      </a:r>
+                    </a:p>
+                  </a:txBody>
+                  <a:tcPr>
+                    <a:solidFill>
+                      <a:srgbClr val="F7F8FA"/>
+                    </a:solidFill>
+                  </a:tcPr>
+                </a:tc>
               </a:tr>
               <a:tr h="220000">
                 <a:tc>
@@ -37160,6 +38609,52 @@
                     </a:solidFill>
                   </a:tcPr>
                 </a:tc>
+                <a:tc>
+                  <a:txBody>
+                    <a:bodyPr/>
+                    <a:lstStyle/>
+                    <a:p>
+                      <a:pPr algn="ctr"/>
+                      <a:r>
+                        <a:rPr sz="800" b="1" i="0">
+                          <a:solidFill>
+                            <a:srgbClr val="0D0D0D"/>
+                          </a:solidFill>
+                          <a:latin typeface="Calibri"/>
+                        </a:rPr>
+                        <a:t>185,0</a:t>
+                      </a:r>
+                    </a:p>
+                  </a:txBody>
+                  <a:tcPr>
+                    <a:solidFill>
+                      <a:srgbClr val="FFFFFF"/>
+                    </a:solidFill>
+                  </a:tcPr>
+                </a:tc>
+                <a:tc>
+                  <a:txBody>
+                    <a:bodyPr/>
+                    <a:lstStyle/>
+                    <a:p>
+                      <a:pPr algn="ctr"/>
+                      <a:r>
+                        <a:rPr sz="800" b="1" i="0">
+                          <a:solidFill>
+                            <a:srgbClr val="0D0D0D"/>
+                          </a:solidFill>
+                          <a:latin typeface="Calibri"/>
+                        </a:rPr>
+                        <a:t>220,0</a:t>
+                      </a:r>
+                    </a:p>
+                  </a:txBody>
+                  <a:tcPr>
+                    <a:solidFill>
+                      <a:srgbClr val="FFFFFF"/>
+                    </a:solidFill>
+                  </a:tcPr>
+                </a:tc>
               </a:tr>
               <a:tr h="220000">
                 <a:tc>
@@ -37254,6 +38749,52 @@
                     </a:solidFill>
                   </a:tcPr>
                 </a:tc>
+                <a:tc>
+                  <a:txBody>
+                    <a:bodyPr/>
+                    <a:lstStyle/>
+                    <a:p>
+                      <a:pPr algn="ctr"/>
+                      <a:r>
+                        <a:rPr sz="750" b="0" i="1">
+                          <a:solidFill>
+                            <a:srgbClr val="555555"/>
+                          </a:solidFill>
+                          <a:latin typeface="Calibri"/>
+                        </a:rPr>
+                        <a:t>57,1 %</a:t>
+                      </a:r>
+                    </a:p>
+                  </a:txBody>
+                  <a:tcPr>
+                    <a:solidFill>
+                      <a:srgbClr val="F7F8FA"/>
+                    </a:solidFill>
+                  </a:tcPr>
+                </a:tc>
+                <a:tc>
+                  <a:txBody>
+                    <a:bodyPr/>
+                    <a:lstStyle/>
+                    <a:p>
+                      <a:pPr algn="ctr"/>
+                      <a:r>
+                        <a:rPr sz="750" b="0" i="1">
+                          <a:solidFill>
+                            <a:srgbClr val="555555"/>
+                          </a:solidFill>
+                          <a:latin typeface="Calibri"/>
+                        </a:rPr>
+                        <a:t>59,1 %</a:t>
+                      </a:r>
+                    </a:p>
+                  </a:txBody>
+                  <a:tcPr>
+                    <a:solidFill>
+                      <a:srgbClr val="F7F8FA"/>
+                    </a:solidFill>
+                  </a:tcPr>
+                </a:tc>
               </a:tr>
               <a:tr h="220000">
                 <a:tc>
@@ -37348,6 +38889,52 @@
                     </a:solidFill>
                   </a:tcPr>
                 </a:tc>
+                <a:tc>
+                  <a:txBody>
+                    <a:bodyPr/>
+                    <a:lstStyle/>
+                    <a:p>
+                      <a:pPr algn="ctr"/>
+                      <a:r>
+                        <a:rPr sz="800" b="1" i="0">
+                          <a:solidFill>
+                            <a:srgbClr val="0D0D0D"/>
+                          </a:solidFill>
+                          <a:latin typeface="Calibri"/>
+                        </a:rPr>
+                        <a:t>115,0</a:t>
+                      </a:r>
+                    </a:p>
+                  </a:txBody>
+                  <a:tcPr>
+                    <a:solidFill>
+                      <a:srgbClr val="FFFFFF"/>
+                    </a:solidFill>
+                  </a:tcPr>
+                </a:tc>
+                <a:tc>
+                  <a:txBody>
+                    <a:bodyPr/>
+                    <a:lstStyle/>
+                    <a:p>
+                      <a:pPr algn="ctr"/>
+                      <a:r>
+                        <a:rPr sz="800" b="1" i="0">
+                          <a:solidFill>
+                            <a:srgbClr val="0D0D0D"/>
+                          </a:solidFill>
+                          <a:latin typeface="Calibri"/>
+                        </a:rPr>
+                        <a:t>135,0</a:t>
+                      </a:r>
+                    </a:p>
+                  </a:txBody>
+                  <a:tcPr>
+                    <a:solidFill>
+                      <a:srgbClr val="FFFFFF"/>
+                    </a:solidFill>
+                  </a:tcPr>
+                </a:tc>
               </a:tr>
               <a:tr h="220000">
                 <a:tc>
@@ -37439,6 +39026,52 @@
                   <a:tcPr>
                     <a:solidFill>
                       <a:srgbClr val="DDE8F5"/>
+                    </a:solidFill>
+                  </a:tcPr>
+                </a:tc>
+                <a:tc>
+                  <a:txBody>
+                    <a:bodyPr/>
+                    <a:lstStyle/>
+                    <a:p>
+                      <a:pPr algn="ctr"/>
+                      <a:r>
+                        <a:rPr sz="750" b="0" i="1">
+                          <a:solidFill>
+                            <a:srgbClr val="555555"/>
+                          </a:solidFill>
+                          <a:latin typeface="Calibri"/>
+                        </a:rPr>
+                        <a:t>35,5 %</a:t>
+                      </a:r>
+                    </a:p>
+                  </a:txBody>
+                  <a:tcPr>
+                    <a:solidFill>
+                      <a:srgbClr val="F7F8FA"/>
+                    </a:solidFill>
+                  </a:tcPr>
+                </a:tc>
+                <a:tc>
+                  <a:txBody>
+                    <a:bodyPr/>
+                    <a:lstStyle/>
+                    <a:p>
+                      <a:pPr algn="ctr"/>
+                      <a:r>
+                        <a:rPr sz="750" b="0" i="1">
+                          <a:solidFill>
+                            <a:srgbClr val="555555"/>
+                          </a:solidFill>
+                          <a:latin typeface="Calibri"/>
+                        </a:rPr>
+                        <a:t>36,3 %</a:t>
+                      </a:r>
+                    </a:p>
+                  </a:txBody>
+                  <a:tcPr>
+                    <a:solidFill>
+                      <a:srgbClr val="F7F8FA"/>
                     </a:solidFill>
                   </a:tcPr>
                 </a:tc>
@@ -37447,6 +39080,41 @@
           </a:graphicData>
         </a:graphic>
       </p:graphicFrame>
+      <p:sp>
+        <p:nvSpPr>
+          <p:cNvPr id="18" name="TextBox 17"/>
+          <p:cNvSpPr txBox="1"/>
+          <p:nvPr/>
+        </p:nvSpPr>
+        <p:spPr>
+          <a:xfrm>
+            <a:off x="367200" y="3218400"/>
+            <a:ext cx="8413200" cy="1224000"/>
+          </a:xfrm>
+          <a:prstGeom prst="rect">
+            <a:avLst/>
+          </a:prstGeom>
+          <a:noFill/>
+        </p:spPr>
+        <p:txBody>
+          <a:bodyPr wrap="square">
+            <a:spAutoFit/>
+          </a:bodyPr>
+          <a:lstStyle/>
+          <a:p>
+            <a:pPr algn="l"/>
+            <a:r>
+              <a:rPr sz="850" b="0" i="0">
+                <a:solidFill>
+                  <a:srgbClr val="555555"/>
+                </a:solidFill>
+                <a:latin typeface="Calibri"/>
+              </a:rPr>
+              <a:t>Le CA 2025 atteint 281,724M$ (+14.9% YoY), avec un levier opérationnel visible : la marge brute passe de 68.4% en 2022 à 68.8% en 2025 (+40bps), portée par le mix logiciel haute marge et les économies d'échelle. Le ND/EBITDA de 0.1x et l'Altman Z-score de 4.61 soulignent une solidité financière exceptionnelle, permettant des rachats d'actions massifs (ex: 50Mds$ autorisés en 2024).</a:t>
+            </a:r>
+          </a:p>
+        </p:txBody>
+      </p:sp>
     </p:spTree>
   </p:cSld>
   <p:clrMapOvr>
@@ -39329,6 +40997,41 @@
           </a:graphicData>
         </a:graphic>
       </p:graphicFrame>
+      <p:sp>
+        <p:nvSpPr>
+          <p:cNvPr id="31" name="TextBox 30"/>
+          <p:cNvSpPr txBox="1"/>
+          <p:nvPr/>
+        </p:nvSpPr>
+        <p:spPr>
+          <a:xfrm>
+            <a:off x="367200" y="4068000"/>
+            <a:ext cx="8413200" cy="468000"/>
+          </a:xfrm>
+          <a:prstGeom prst="rect">
+            <a:avLst/>
+          </a:prstGeom>
+          <a:noFill/>
+        </p:spPr>
+        <p:txBody>
+          <a:bodyPr wrap="square">
+            <a:spAutoFit/>
+          </a:bodyPr>
+          <a:lstStyle/>
+          <a:p>
+            <a:pPr algn="l"/>
+            <a:r>
+              <a:rPr sz="850" b="0" i="0">
+                <a:solidFill>
+                  <a:srgbClr val="555555"/>
+                </a:solidFill>
+                <a:latin typeface="Calibri"/>
+              </a:rPr>
+              <a:t>Le CA 2025 atteint 281,724M$ (+14.9% YoY), avec un levier opérationnel visible : la marge brute passe de 68.4% en 2022 à 68.8% en 2025 (+40bps), portée par le mix logiciel haute marge et les économies d'échelle. Le ND/EBITDA de 0.1x et l'Altman Z-score de 4.61 soulignent une solidité financière exceptionnelle, permettant des rachats d'actions massifs (ex: 50Mds$ autorisés en 2024).</a:t>
+            </a:r>
+          </a:p>
+        </p:txBody>
+      </p:sp>
     </p:spTree>
   </p:cSld>
   <p:clrMapOvr>
